--- a/content/decks/media-studies/media-studies-s1-lesson-08-the-viewing-protocol-and-a1.pptx
+++ b/content/decks/media-studies/media-studies-s1-lesson-08-the-viewing-protocol-and-a1.pptx
@@ -17,9 +17,10 @@
     <p:sldId id="265" r:id="rId11"/>
     <p:sldId id="266" r:id="rId12"/>
     <p:sldId id="267" r:id="rId13"/>
+    <p:sldId id="268" r:id="rId14"/>
   </p:sldIdLst>
   <p:notesMasterIdLst>
-    <p:notesMasterId r:id="rId14"/>
+    <p:notesMasterId r:id="rId15"/>
   </p:notesMasterIdLst>
   <p:sldSz cx="12192000" cy="6858000"/>
   <p:notesSz cx="6858000" cy="12192000"/>
@@ -601,7 +602,7 @@
           <a:p>
             <a:r>
               <a:rPr lang="en-US" dirty="0"/>
-              <a:t/>
+              <a:t>Marked with WS 4.6's rubric and comment bank, banded in the official Paper 2 five-criteria language. The per-criterion band descriptors on WS 4.6 are centre-authored, not Cambridge's; the criteria and band words are Cambridge's own.</a:t>
             </a:r>
             <a:endParaRPr lang="en-US" dirty="0"/>
           </a:p>
@@ -689,7 +690,7 @@
           <a:p>
             <a:r>
               <a:rPr lang="en-US" dirty="0"/>
-              <a:t/>
+              <a:t>The extract shortlist is PROPOSED and sealed until the sit: no text taught to this cohort. The Your Honor paper stays unscreened, held for the L18 rehearsal per the release strategy.</a:t>
             </a:r>
             <a:endParaRPr lang="en-US" dirty="0"/>
           </a:p>
@@ -777,7 +778,7 @@
           <a:p>
             <a:r>
               <a:rPr lang="en-US" dirty="0"/>
-              <a:t/>
+              <a:t>A2 was announced Monday (see slide 3): due Monday 26 October, posts 1 to 7 to the mid-point standard. Wednesday is the sit only; no announcements share it.</a:t>
             </a:r>
             <a:endParaRPr lang="en-US" dirty="0"/>
           </a:p>
@@ -801,6 +802,94 @@
             <a:fld id="{F7021451-1387-4CA6-816F-3879F97B5CBC}" type="slidenum">
               <a:rPr lang="en-US"/>
               <a:t>12</a:t>
+            </a:fld>
+            <a:endParaRPr lang="en-US"/>
+          </a:p>
+        </p:txBody>
+      </p:sp>
+    </p:spTree>
+    <p:extLst>
+      <p:ext uri="{BB962C8B-B14F-4D97-AF65-F5344CB8AC3E}">
+        <p14:creationId xmlns:p14="http://schemas.microsoft.com/office/powerpoint/2010/main" val="1024086991"/>
+      </p:ext>
+    </p:extLst>
+  </p:cSld>
+  <p:clrMapOvr>
+    <a:masterClrMapping/>
+  </p:clrMapOvr>
+</p:notes>
+</file>
+
+<file path=ppt/notesSlides/notesSlide13.xml><?xml version="1.0" encoding="utf-8"?>
+<p:notes xmlns:a="http://schemas.openxmlformats.org/drawingml/2006/main" xmlns:r="http://schemas.openxmlformats.org/officeDocument/2006/relationships" xmlns:p="http://schemas.openxmlformats.org/presentationml/2006/main">
+  <p:cSld>
+    <p:spTree>
+      <p:nvGrpSpPr>
+        <p:cNvPr id="1" name=""/>
+        <p:cNvGrpSpPr/>
+        <p:nvPr/>
+      </p:nvGrpSpPr>
+      <p:grpSpPr>
+        <a:xfrm>
+          <a:off x="0" y="0"/>
+          <a:ext cx="0" cy="0"/>
+          <a:chOff x="0" y="0"/>
+          <a:chExt cx="0" cy="0"/>
+        </a:xfrm>
+      </p:grpSpPr>
+      <p:sp>
+        <p:nvSpPr>
+          <p:cNvPr id="2" name="Slide Image Placeholder 1"/>
+          <p:cNvSpPr>
+            <a:spLocks noGrp="1" noRot="1" noChangeAspect="1"/>
+          </p:cNvSpPr>
+          <p:nvPr>
+            <p:ph type="sldImg"/>
+          </p:nvPr>
+        </p:nvSpPr>
+        <p:spPr/>
+      </p:sp>
+      <p:sp>
+        <p:nvSpPr>
+          <p:cNvPr id="3" name="Notes Placeholder 2"/>
+          <p:cNvSpPr>
+            <a:spLocks noGrp="1"/>
+          </p:cNvSpPr>
+          <p:nvPr>
+            <p:ph type="body" idx="1"/>
+          </p:nvPr>
+        </p:nvSpPr>
+        <p:spPr/>
+        <p:txBody>
+          <a:bodyPr/>
+          <a:lstStyle/>
+          <a:p>
+            <a:r>
+              <a:rPr lang="en-US" dirty="0"/>
+              <a:t/>
+            </a:r>
+            <a:endParaRPr lang="en-US" dirty="0"/>
+          </a:p>
+        </p:txBody>
+      </p:sp>
+      <p:sp>
+        <p:nvSpPr>
+          <p:cNvPr id="4" name="Slide Number Placeholder 3"/>
+          <p:cNvSpPr>
+            <a:spLocks noGrp="1"/>
+          </p:cNvSpPr>
+          <p:nvPr>
+            <p:ph type="sldNum" sz="quarter" idx="10"/>
+          </p:nvPr>
+        </p:nvSpPr>
+        <p:spPr/>
+        <p:txBody>
+          <a:bodyPr/>
+          <a:lstStyle/>
+          <a:p>
+            <a:fld id="{F7021451-1387-4CA6-816F-3879F97B5CBC}" type="slidenum">
+              <a:rPr lang="en-US"/>
+              <a:t>13</a:t>
             </a:fld>
             <a:endParaRPr lang="en-US"/>
           </a:p>
@@ -865,7 +954,7 @@
           <a:p>
             <a:r>
               <a:rPr lang="en-US" dirty="0"/>
-              <a:t>Until this build that sentence was false: sound and editing had twenty shared minutes and mise-en-scene had no session at all.</a:t>
+              <a:t>Until this build that sentence was false: sound and editing shared a fraction of the calendar and mise-en-scene had no session at all.</a:t>
             </a:r>
             <a:endParaRPr lang="en-US" dirty="0"/>
           </a:p>
@@ -953,7 +1042,7 @@
           <a:p>
             <a:r>
               <a:rPr lang="en-US" dirty="0"/>
-              <a:t/>
+              <a:t>The A2 announcement sits on Monday, day one, exactly as the register requires; announcing it at the Wednesday sit would shortchange the notice window. Warm-up frames: Adolescence, Toy Story, The Third Man (the canted canon). The 30-item list is PROPOSED content; note where it lives.</a:t>
             </a:r>
             <a:endParaRPr lang="en-US" dirty="0"/>
           </a:p>
@@ -1041,7 +1130,7 @@
           <a:p>
             <a:r>
               <a:rPr lang="en-US" dirty="0"/>
-              <a:t/>
+              <a:t>Six passes, identical to L07's list: narrative is not one of them. Narrative theory arrives at L10, after the sit, because Section A's prompt asks for the four technical elements, not for narrative theory. (The full-Ladder claim is contested between L07 and L08 on the routines page; the deck follows the plan until that is settled.)</a:t>
             </a:r>
             <a:endParaRPr lang="en-US" dirty="0"/>
           </a:p>
@@ -1129,7 +1218,7 @@
           <a:p>
             <a:r>
               <a:rPr lang="en-US" dirty="0"/>
-              <a:t>The photograph shows the attention the exam rewards. Same order, no hurry, nothing skipped.</a:t>
+              <a:t>The frame the room mapped for code families at L02 returns under the exam's discipline: same still, deeper read. The rehearsal read on D2 runs on an unseen extract, twice, with a cut count.</a:t>
             </a:r>
             <a:endParaRPr lang="en-US" dirty="0"/>
           </a:p>
@@ -1217,7 +1306,7 @@
           <a:p>
             <a:r>
               <a:rPr lang="en-US" dirty="0"/>
-              <a:t/>
+              <a:t>One worked example on the board (the next two slides), then one deliberately bad example where effect and meaning are the same sentence twice.</a:t>
             </a:r>
             <a:endParaRPr lang="en-US" dirty="0"/>
           </a:p>
@@ -1305,7 +1394,7 @@
           <a:p>
             <a:r>
               <a:rPr lang="en-US" dirty="0"/>
-              <a:t>The bad example matters more than the good one. Students cannot see this defect in their own writing until they have diagnosed it in someone else's.</a:t>
+              <a:t>The bad example matters more than the good one. Students cannot see this defect in their own writing until they have diagnosed it in someone else's. The frame gives the diagnosis a referent: Kane at the podium, the poster behind, the camera below the stage.</a:t>
             </a:r>
             <a:endParaRPr lang="en-US" dirty="0"/>
           </a:p>
@@ -1393,7 +1482,7 @@
           <a:p>
             <a:r>
               <a:rPr lang="en-US" dirty="0"/>
-              <a:t/>
+              <a:t>Board it live rather than showing it finished if time allows; the crossing-out is the teaching. Then Beat the Examiner lite on one specimen paragraph.</a:t>
             </a:r>
             <a:endParaRPr lang="en-US" dirty="0"/>
           </a:p>
@@ -1481,7 +1570,7 @@
           <a:p>
             <a:r>
               <a:rPr lang="en-US" dirty="0"/>
-              <a:t/>
+              <a:t>The old fourth-viewing label (narrative and meaning) was a pre-rebuild residue; narrative is L10's business, after the sit. The honest label is the integrated pass.</a:t>
             </a:r>
             <a:endParaRPr lang="en-US" dirty="0"/>
           </a:p>
@@ -2109,6 +2198,1181 @@
     <p:bg>
       <p:bgPr>
         <a:solidFill>
+          <a:srgbClr val="FAF8F1"/>
+        </a:solidFill>
+      </p:bgPr>
+    </p:bg>
+    <p:spTree>
+      <p:nvGrpSpPr>
+        <p:cNvPr id="1" name=""/>
+        <p:cNvGrpSpPr/>
+        <p:nvPr/>
+      </p:nvGrpSpPr>
+      <p:grpSpPr>
+        <a:xfrm>
+          <a:off x="0" y="0"/>
+          <a:ext cx="0" cy="0"/>
+          <a:chOff x="0" y="0"/>
+          <a:chExt cx="0" cy="0"/>
+        </a:xfrm>
+      </p:grpSpPr>
+      <p:sp>
+        <p:nvSpPr>
+          <p:cNvPr id="2" name="Text 0"/>
+          <p:cNvSpPr/>
+          <p:nvPr/>
+        </p:nvSpPr>
+        <p:spPr>
+          <a:xfrm>
+            <a:off x="822960" y="457200"/>
+            <a:ext cx="6400800" cy="274320"/>
+          </a:xfrm>
+          <a:prstGeom prst="rect">
+            <a:avLst/>
+          </a:prstGeom>
+          <a:noFill/>
+          <a:ln/>
+        </p:spPr>
+        <p:txBody>
+          <a:bodyPr wrap="square" lIns="0" tIns="0" rIns="0" bIns="0" rtlCol="0" anchor="ctr"/>
+          <a:lstStyle/>
+          <a:p>
+            <a:pPr algn="l" indent="0" marL="0">
+              <a:buNone/>
+            </a:pPr>
+            <a:r>
+              <a:rPr lang="en-US" sz="1100" b="1" spc="250" kern="0" dirty="0">
+                <a:solidFill>
+                  <a:srgbClr val="4A6B5D"/>
+                </a:solidFill>
+                <a:latin typeface="Arial" pitchFamily="34" charset="0"/>
+                <a:ea typeface="Arial" pitchFamily="34" charset="-122"/>
+                <a:cs typeface="Arial" pitchFamily="34" charset="-120"/>
+              </a:rPr>
+              <a:t>HOW A1 IS MARKED</a:t>
+            </a:r>
+            <a:endParaRPr lang="en-US" sz="1100" dirty="0"/>
+          </a:p>
+        </p:txBody>
+      </p:sp>
+      <p:sp>
+        <p:nvSpPr>
+          <p:cNvPr id="3" name="Text 1"/>
+          <p:cNvSpPr/>
+          <p:nvPr/>
+        </p:nvSpPr>
+        <p:spPr>
+          <a:xfrm>
+            <a:off x="6793992" y="457200"/>
+            <a:ext cx="4572000" cy="274320"/>
+          </a:xfrm>
+          <a:prstGeom prst="rect">
+            <a:avLst/>
+          </a:prstGeom>
+          <a:noFill/>
+          <a:ln/>
+        </p:spPr>
+        <p:txBody>
+          <a:bodyPr wrap="square" lIns="0" tIns="0" rIns="0" bIns="0" rtlCol="0" anchor="ctr"/>
+          <a:lstStyle/>
+          <a:p>
+            <a:pPr algn="r" indent="0" marL="0">
+              <a:buNone/>
+            </a:pPr>
+            <a:r>
+              <a:rPr lang="en-US" sz="1100" b="1" spc="250" kern="0" dirty="0">
+                <a:solidFill>
+                  <a:srgbClr val="7A7F72"/>
+                </a:solidFill>
+                <a:latin typeface="Arial" pitchFamily="34" charset="0"/>
+                <a:ea typeface="Arial" pitchFamily="34" charset="-122"/>
+                <a:cs typeface="Arial" pitchFamily="34" charset="-120"/>
+              </a:rPr>
+              <a:t>IN THE OFFICIAL PAPER 2 LANGUAGE</a:t>
+            </a:r>
+            <a:endParaRPr lang="en-US" sz="1100" dirty="0"/>
+          </a:p>
+        </p:txBody>
+      </p:sp>
+      <p:sp>
+        <p:nvSpPr>
+          <p:cNvPr id="4" name="Shape 2"/>
+          <p:cNvSpPr/>
+          <p:nvPr/>
+        </p:nvSpPr>
+        <p:spPr>
+          <a:xfrm>
+            <a:off x="822960" y="786384"/>
+            <a:ext cx="10543032" cy="0"/>
+          </a:xfrm>
+          <a:prstGeom prst="line">
+            <a:avLst/>
+          </a:prstGeom>
+          <a:noFill/>
+          <a:ln w="9525">
+            <a:solidFill>
+              <a:srgbClr val="D9D4C4"/>
+            </a:solidFill>
+            <a:prstDash val="solid"/>
+          </a:ln>
+        </p:spPr>
+      </p:sp>
+      <p:sp>
+        <p:nvSpPr>
+          <p:cNvPr id="5" name="Text 3"/>
+          <p:cNvSpPr/>
+          <p:nvPr/>
+        </p:nvSpPr>
+        <p:spPr>
+          <a:xfrm>
+            <a:off x="822960" y="932688"/>
+            <a:ext cx="10543032" cy="640080"/>
+          </a:xfrm>
+          <a:prstGeom prst="rect">
+            <a:avLst/>
+          </a:prstGeom>
+          <a:noFill/>
+          <a:ln/>
+        </p:spPr>
+        <p:txBody>
+          <a:bodyPr wrap="square" lIns="0" tIns="0" rIns="0" bIns="0" rtlCol="0" anchor="ctr"/>
+          <a:lstStyle/>
+          <a:p>
+            <a:pPr indent="0" marL="0">
+              <a:buNone/>
+            </a:pPr>
+            <a:r>
+              <a:rPr lang="en-US" sz="3000" dirty="0">
+                <a:solidFill>
+                  <a:srgbClr val="24313F"/>
+                </a:solidFill>
+                <a:latin typeface="Georgia" pitchFamily="34" charset="0"/>
+                <a:ea typeface="Georgia" pitchFamily="34" charset="-122"/>
+                <a:cs typeface="Georgia" pitchFamily="34" charset="-120"/>
+              </a:rPr>
+              <a:t>Five criteria, best-fit, 0 to 5 each</a:t>
+            </a:r>
+            <a:endParaRPr lang="en-US" sz="3000" dirty="0"/>
+          </a:p>
+        </p:txBody>
+      </p:sp>
+      <p:sp>
+        <p:nvSpPr>
+          <p:cNvPr id="6" name="Shape 4"/>
+          <p:cNvSpPr/>
+          <p:nvPr/>
+        </p:nvSpPr>
+        <p:spPr>
+          <a:xfrm>
+            <a:off x="822960" y="1737360"/>
+            <a:ext cx="10543032" cy="0"/>
+          </a:xfrm>
+          <a:prstGeom prst="line">
+            <a:avLst/>
+          </a:prstGeom>
+          <a:noFill/>
+          <a:ln w="12700">
+            <a:solidFill>
+              <a:srgbClr val="24313F"/>
+            </a:solidFill>
+            <a:prstDash val="solid"/>
+          </a:ln>
+        </p:spPr>
+      </p:sp>
+      <p:sp>
+        <p:nvSpPr>
+          <p:cNvPr id="7" name="Text 5"/>
+          <p:cNvSpPr/>
+          <p:nvPr/>
+        </p:nvSpPr>
+        <p:spPr>
+          <a:xfrm>
+            <a:off x="822960" y="1737360"/>
+            <a:ext cx="1463040" cy="548640"/>
+          </a:xfrm>
+          <a:prstGeom prst="rect">
+            <a:avLst/>
+          </a:prstGeom>
+          <a:noFill/>
+          <a:ln/>
+        </p:spPr>
+        <p:txBody>
+          <a:bodyPr wrap="square" lIns="0" tIns="0" rIns="0" bIns="0" rtlCol="0" anchor="ctr"/>
+          <a:lstStyle/>
+          <a:p>
+            <a:pPr indent="0" marL="0">
+              <a:buNone/>
+            </a:pPr>
+            <a:r>
+              <a:rPr lang="en-US" sz="1100" b="1" spc="100" kern="0" dirty="0">
+                <a:solidFill>
+                  <a:srgbClr val="7A7F72"/>
+                </a:solidFill>
+                <a:latin typeface="Arial" pitchFamily="34" charset="0"/>
+                <a:ea typeface="Arial" pitchFamily="34" charset="-122"/>
+                <a:cs typeface="Arial" pitchFamily="34" charset="-120"/>
+              </a:rPr>
+              <a:t>AO</a:t>
+            </a:r>
+            <a:endParaRPr lang="en-US" sz="1100" dirty="0"/>
+          </a:p>
+        </p:txBody>
+      </p:sp>
+      <p:sp>
+        <p:nvSpPr>
+          <p:cNvPr id="8" name="Text 6"/>
+          <p:cNvSpPr/>
+          <p:nvPr/>
+        </p:nvSpPr>
+        <p:spPr>
+          <a:xfrm>
+            <a:off x="2377440" y="1737360"/>
+            <a:ext cx="7315200" cy="548640"/>
+          </a:xfrm>
+          <a:prstGeom prst="rect">
+            <a:avLst/>
+          </a:prstGeom>
+          <a:noFill/>
+          <a:ln/>
+        </p:spPr>
+        <p:txBody>
+          <a:bodyPr wrap="square" lIns="0" tIns="0" rIns="0" bIns="0" rtlCol="0" anchor="ctr"/>
+          <a:lstStyle/>
+          <a:p>
+            <a:pPr indent="0" marL="0">
+              <a:buNone/>
+            </a:pPr>
+            <a:r>
+              <a:rPr lang="en-US" sz="1100" b="1" spc="100" kern="0" dirty="0">
+                <a:solidFill>
+                  <a:srgbClr val="7A7F72"/>
+                </a:solidFill>
+                <a:latin typeface="Arial" pitchFamily="34" charset="0"/>
+                <a:ea typeface="Arial" pitchFamily="34" charset="-122"/>
+                <a:cs typeface="Arial" pitchFamily="34" charset="-120"/>
+              </a:rPr>
+              <a:t>Criterion</a:t>
+            </a:r>
+            <a:endParaRPr lang="en-US" sz="1100" dirty="0"/>
+          </a:p>
+        </p:txBody>
+      </p:sp>
+      <p:sp>
+        <p:nvSpPr>
+          <p:cNvPr id="9" name="Text 7"/>
+          <p:cNvSpPr/>
+          <p:nvPr/>
+        </p:nvSpPr>
+        <p:spPr>
+          <a:xfrm>
+            <a:off x="9875520" y="1737360"/>
+            <a:ext cx="1463040" cy="548640"/>
+          </a:xfrm>
+          <a:prstGeom prst="rect">
+            <a:avLst/>
+          </a:prstGeom>
+          <a:noFill/>
+          <a:ln/>
+        </p:spPr>
+        <p:txBody>
+          <a:bodyPr wrap="square" lIns="0" tIns="0" rIns="0" bIns="0" rtlCol="0" anchor="ctr"/>
+          <a:lstStyle/>
+          <a:p>
+            <a:pPr algn="r" indent="0" marL="0">
+              <a:buNone/>
+            </a:pPr>
+            <a:r>
+              <a:rPr lang="en-US" sz="1100" b="1" spc="100" kern="0" dirty="0">
+                <a:solidFill>
+                  <a:srgbClr val="7A7F72"/>
+                </a:solidFill>
+                <a:latin typeface="Arial" pitchFamily="34" charset="0"/>
+                <a:ea typeface="Arial" pitchFamily="34" charset="-122"/>
+                <a:cs typeface="Arial" pitchFamily="34" charset="-120"/>
+              </a:rPr>
+              <a:t>Band</a:t>
+            </a:r>
+            <a:endParaRPr lang="en-US" sz="1100" dirty="0"/>
+          </a:p>
+        </p:txBody>
+      </p:sp>
+      <p:sp>
+        <p:nvSpPr>
+          <p:cNvPr id="10" name="Shape 8"/>
+          <p:cNvSpPr/>
+          <p:nvPr/>
+        </p:nvSpPr>
+        <p:spPr>
+          <a:xfrm>
+            <a:off x="822960" y="2286000"/>
+            <a:ext cx="10543032" cy="0"/>
+          </a:xfrm>
+          <a:prstGeom prst="line">
+            <a:avLst/>
+          </a:prstGeom>
+          <a:noFill/>
+          <a:ln w="9525">
+            <a:solidFill>
+              <a:srgbClr val="D9D4C4"/>
+            </a:solidFill>
+            <a:prstDash val="solid"/>
+          </a:ln>
+        </p:spPr>
+      </p:sp>
+      <p:sp>
+        <p:nvSpPr>
+          <p:cNvPr id="11" name="Text 9"/>
+          <p:cNvSpPr/>
+          <p:nvPr/>
+        </p:nvSpPr>
+        <p:spPr>
+          <a:xfrm>
+            <a:off x="822960" y="2286000"/>
+            <a:ext cx="1463040" cy="548640"/>
+          </a:xfrm>
+          <a:prstGeom prst="rect">
+            <a:avLst/>
+          </a:prstGeom>
+          <a:noFill/>
+          <a:ln/>
+        </p:spPr>
+        <p:txBody>
+          <a:bodyPr wrap="square" lIns="0" tIns="0" rIns="0" bIns="0" rtlCol="0" anchor="ctr"/>
+          <a:lstStyle/>
+          <a:p>
+            <a:pPr indent="0" marL="0">
+              <a:buNone/>
+            </a:pPr>
+            <a:r>
+              <a:rPr lang="en-US" sz="1300" b="1" spc="100" kern="0" dirty="0">
+                <a:solidFill>
+                  <a:srgbClr val="4A6B5D"/>
+                </a:solidFill>
+                <a:latin typeface="Arial" pitchFamily="34" charset="0"/>
+                <a:ea typeface="Arial" pitchFamily="34" charset="-122"/>
+                <a:cs typeface="Arial" pitchFamily="34" charset="-120"/>
+              </a:rPr>
+              <a:t>AO1</a:t>
+            </a:r>
+            <a:endParaRPr lang="en-US" sz="1300" dirty="0"/>
+          </a:p>
+        </p:txBody>
+      </p:sp>
+      <p:sp>
+        <p:nvSpPr>
+          <p:cNvPr id="12" name="Text 10"/>
+          <p:cNvSpPr/>
+          <p:nvPr/>
+        </p:nvSpPr>
+        <p:spPr>
+          <a:xfrm>
+            <a:off x="2377440" y="2286000"/>
+            <a:ext cx="7315200" cy="548640"/>
+          </a:xfrm>
+          <a:prstGeom prst="rect">
+            <a:avLst/>
+          </a:prstGeom>
+          <a:noFill/>
+          <a:ln/>
+        </p:spPr>
+        <p:txBody>
+          <a:bodyPr wrap="square" lIns="0" tIns="0" rIns="0" bIns="0" rtlCol="0" anchor="ctr"/>
+          <a:lstStyle/>
+          <a:p>
+            <a:pPr indent="0" marL="0">
+              <a:buNone/>
+            </a:pPr>
+            <a:r>
+              <a:rPr lang="en-US" sz="1600" dirty="0">
+                <a:solidFill>
+                  <a:srgbClr val="24313F"/>
+                </a:solidFill>
+                <a:latin typeface="Georgia" pitchFamily="34" charset="0"/>
+                <a:ea typeface="Georgia" pitchFamily="34" charset="-122"/>
+                <a:cs typeface="Georgia" pitchFamily="34" charset="-120"/>
+              </a:rPr>
+              <a:t>Media Concepts: language and representation</a:t>
+            </a:r>
+            <a:endParaRPr lang="en-US" sz="1600" dirty="0"/>
+          </a:p>
+        </p:txBody>
+      </p:sp>
+      <p:sp>
+        <p:nvSpPr>
+          <p:cNvPr id="13" name="Text 11"/>
+          <p:cNvSpPr/>
+          <p:nvPr/>
+        </p:nvSpPr>
+        <p:spPr>
+          <a:xfrm>
+            <a:off x="9875520" y="2286000"/>
+            <a:ext cx="1463040" cy="548640"/>
+          </a:xfrm>
+          <a:prstGeom prst="rect">
+            <a:avLst/>
+          </a:prstGeom>
+          <a:noFill/>
+          <a:ln/>
+        </p:spPr>
+        <p:txBody>
+          <a:bodyPr wrap="square" lIns="0" tIns="0" rIns="0" bIns="0" rtlCol="0" anchor="ctr"/>
+          <a:lstStyle/>
+          <a:p>
+            <a:pPr algn="r" indent="0" marL="0">
+              <a:buNone/>
+            </a:pPr>
+            <a:r>
+              <a:rPr lang="en-US" sz="1300" b="1" dirty="0">
+                <a:solidFill>
+                  <a:srgbClr val="A3C1AD"/>
+                </a:solidFill>
+                <a:latin typeface="Arial" pitchFamily="34" charset="0"/>
+                <a:ea typeface="Arial" pitchFamily="34" charset="-122"/>
+                <a:cs typeface="Arial" pitchFamily="34" charset="-120"/>
+              </a:rPr>
+              <a:t>/5</a:t>
+            </a:r>
+            <a:endParaRPr lang="en-US" sz="1300" dirty="0"/>
+          </a:p>
+        </p:txBody>
+      </p:sp>
+      <p:sp>
+        <p:nvSpPr>
+          <p:cNvPr id="14" name="Shape 12"/>
+          <p:cNvSpPr/>
+          <p:nvPr/>
+        </p:nvSpPr>
+        <p:spPr>
+          <a:xfrm>
+            <a:off x="822960" y="2834640"/>
+            <a:ext cx="10543032" cy="0"/>
+          </a:xfrm>
+          <a:prstGeom prst="line">
+            <a:avLst/>
+          </a:prstGeom>
+          <a:noFill/>
+          <a:ln w="9525">
+            <a:solidFill>
+              <a:srgbClr val="D9D4C4"/>
+            </a:solidFill>
+            <a:prstDash val="solid"/>
+          </a:ln>
+        </p:spPr>
+      </p:sp>
+      <p:sp>
+        <p:nvSpPr>
+          <p:cNvPr id="15" name="Text 13"/>
+          <p:cNvSpPr/>
+          <p:nvPr/>
+        </p:nvSpPr>
+        <p:spPr>
+          <a:xfrm>
+            <a:off x="822960" y="2834640"/>
+            <a:ext cx="1463040" cy="548640"/>
+          </a:xfrm>
+          <a:prstGeom prst="rect">
+            <a:avLst/>
+          </a:prstGeom>
+          <a:noFill/>
+          <a:ln/>
+        </p:spPr>
+        <p:txBody>
+          <a:bodyPr wrap="square" lIns="0" tIns="0" rIns="0" bIns="0" rtlCol="0" anchor="ctr"/>
+          <a:lstStyle/>
+          <a:p>
+            <a:pPr indent="0" marL="0">
+              <a:buNone/>
+            </a:pPr>
+            <a:r>
+              <a:rPr lang="en-US" sz="1300" b="1" spc="100" kern="0" dirty="0">
+                <a:solidFill>
+                  <a:srgbClr val="4A6B5D"/>
+                </a:solidFill>
+                <a:latin typeface="Arial" pitchFamily="34" charset="0"/>
+                <a:ea typeface="Arial" pitchFamily="34" charset="-122"/>
+                <a:cs typeface="Arial" pitchFamily="34" charset="-120"/>
+              </a:rPr>
+              <a:t>AO1</a:t>
+            </a:r>
+            <a:endParaRPr lang="en-US" sz="1300" dirty="0"/>
+          </a:p>
+        </p:txBody>
+      </p:sp>
+      <p:sp>
+        <p:nvSpPr>
+          <p:cNvPr id="16" name="Text 14"/>
+          <p:cNvSpPr/>
+          <p:nvPr/>
+        </p:nvSpPr>
+        <p:spPr>
+          <a:xfrm>
+            <a:off x="2377440" y="2834640"/>
+            <a:ext cx="7315200" cy="548640"/>
+          </a:xfrm>
+          <a:prstGeom prst="rect">
+            <a:avLst/>
+          </a:prstGeom>
+          <a:noFill/>
+          <a:ln/>
+        </p:spPr>
+        <p:txBody>
+          <a:bodyPr wrap="square" lIns="0" tIns="0" rIns="0" bIns="0" rtlCol="0" anchor="ctr"/>
+          <a:lstStyle/>
+          <a:p>
+            <a:pPr indent="0" marL="0">
+              <a:buNone/>
+            </a:pPr>
+            <a:r>
+              <a:rPr lang="en-US" sz="1600" dirty="0">
+                <a:solidFill>
+                  <a:srgbClr val="24313F"/>
+                </a:solidFill>
+                <a:latin typeface="Georgia" pitchFamily="34" charset="0"/>
+                <a:ea typeface="Georgia" pitchFamily="34" charset="-122"/>
+                <a:cs typeface="Georgia" pitchFamily="34" charset="-120"/>
+              </a:rPr>
+              <a:t>Contexts and Critical Debates</a:t>
+            </a:r>
+            <a:endParaRPr lang="en-US" sz="1600" dirty="0"/>
+          </a:p>
+        </p:txBody>
+      </p:sp>
+      <p:sp>
+        <p:nvSpPr>
+          <p:cNvPr id="17" name="Text 15"/>
+          <p:cNvSpPr/>
+          <p:nvPr/>
+        </p:nvSpPr>
+        <p:spPr>
+          <a:xfrm>
+            <a:off x="9875520" y="2834640"/>
+            <a:ext cx="1463040" cy="548640"/>
+          </a:xfrm>
+          <a:prstGeom prst="rect">
+            <a:avLst/>
+          </a:prstGeom>
+          <a:noFill/>
+          <a:ln/>
+        </p:spPr>
+        <p:txBody>
+          <a:bodyPr wrap="square" lIns="0" tIns="0" rIns="0" bIns="0" rtlCol="0" anchor="ctr"/>
+          <a:lstStyle/>
+          <a:p>
+            <a:pPr algn="r" indent="0" marL="0">
+              <a:buNone/>
+            </a:pPr>
+            <a:r>
+              <a:rPr lang="en-US" sz="1300" b="1" dirty="0">
+                <a:solidFill>
+                  <a:srgbClr val="A3C1AD"/>
+                </a:solidFill>
+                <a:latin typeface="Arial" pitchFamily="34" charset="0"/>
+                <a:ea typeface="Arial" pitchFamily="34" charset="-122"/>
+                <a:cs typeface="Arial" pitchFamily="34" charset="-120"/>
+              </a:rPr>
+              <a:t>/5</a:t>
+            </a:r>
+            <a:endParaRPr lang="en-US" sz="1300" dirty="0"/>
+          </a:p>
+        </p:txBody>
+      </p:sp>
+      <p:sp>
+        <p:nvSpPr>
+          <p:cNvPr id="18" name="Shape 16"/>
+          <p:cNvSpPr/>
+          <p:nvPr/>
+        </p:nvSpPr>
+        <p:spPr>
+          <a:xfrm>
+            <a:off x="822960" y="3383280"/>
+            <a:ext cx="10543032" cy="0"/>
+          </a:xfrm>
+          <a:prstGeom prst="line">
+            <a:avLst/>
+          </a:prstGeom>
+          <a:noFill/>
+          <a:ln w="9525">
+            <a:solidFill>
+              <a:srgbClr val="D9D4C4"/>
+            </a:solidFill>
+            <a:prstDash val="solid"/>
+          </a:ln>
+        </p:spPr>
+      </p:sp>
+      <p:sp>
+        <p:nvSpPr>
+          <p:cNvPr id="19" name="Text 17"/>
+          <p:cNvSpPr/>
+          <p:nvPr/>
+        </p:nvSpPr>
+        <p:spPr>
+          <a:xfrm>
+            <a:off x="822960" y="3383280"/>
+            <a:ext cx="1463040" cy="548640"/>
+          </a:xfrm>
+          <a:prstGeom prst="rect">
+            <a:avLst/>
+          </a:prstGeom>
+          <a:noFill/>
+          <a:ln/>
+        </p:spPr>
+        <p:txBody>
+          <a:bodyPr wrap="square" lIns="0" tIns="0" rIns="0" bIns="0" rtlCol="0" anchor="ctr"/>
+          <a:lstStyle/>
+          <a:p>
+            <a:pPr indent="0" marL="0">
+              <a:buNone/>
+            </a:pPr>
+            <a:r>
+              <a:rPr lang="en-US" sz="1300" b="1" spc="100" kern="0" dirty="0">
+                <a:solidFill>
+                  <a:srgbClr val="4A6B5D"/>
+                </a:solidFill>
+                <a:latin typeface="Arial" pitchFamily="34" charset="0"/>
+                <a:ea typeface="Arial" pitchFamily="34" charset="-122"/>
+                <a:cs typeface="Arial" pitchFamily="34" charset="-120"/>
+              </a:rPr>
+              <a:t>AO1</a:t>
+            </a:r>
+            <a:endParaRPr lang="en-US" sz="1300" dirty="0"/>
+          </a:p>
+        </p:txBody>
+      </p:sp>
+      <p:sp>
+        <p:nvSpPr>
+          <p:cNvPr id="20" name="Text 18"/>
+          <p:cNvSpPr/>
+          <p:nvPr/>
+        </p:nvSpPr>
+        <p:spPr>
+          <a:xfrm>
+            <a:off x="2377440" y="3383280"/>
+            <a:ext cx="7315200" cy="548640"/>
+          </a:xfrm>
+          <a:prstGeom prst="rect">
+            <a:avLst/>
+          </a:prstGeom>
+          <a:noFill/>
+          <a:ln/>
+        </p:spPr>
+        <p:txBody>
+          <a:bodyPr wrap="square" lIns="0" tIns="0" rIns="0" bIns="0" rtlCol="0" anchor="ctr"/>
+          <a:lstStyle/>
+          <a:p>
+            <a:pPr indent="0" marL="0">
+              <a:buNone/>
+            </a:pPr>
+            <a:r>
+              <a:rPr lang="en-US" sz="1600" dirty="0">
+                <a:solidFill>
+                  <a:srgbClr val="24313F"/>
+                </a:solidFill>
+                <a:latin typeface="Georgia" pitchFamily="34" charset="0"/>
+                <a:ea typeface="Georgia" pitchFamily="34" charset="-122"/>
+                <a:cs typeface="Georgia" pitchFamily="34" charset="-120"/>
+              </a:rPr>
+              <a:t>Use of Terminology</a:t>
+            </a:r>
+            <a:endParaRPr lang="en-US" sz="1600" dirty="0"/>
+          </a:p>
+        </p:txBody>
+      </p:sp>
+      <p:sp>
+        <p:nvSpPr>
+          <p:cNvPr id="21" name="Text 19"/>
+          <p:cNvSpPr/>
+          <p:nvPr/>
+        </p:nvSpPr>
+        <p:spPr>
+          <a:xfrm>
+            <a:off x="9875520" y="3383280"/>
+            <a:ext cx="1463040" cy="548640"/>
+          </a:xfrm>
+          <a:prstGeom prst="rect">
+            <a:avLst/>
+          </a:prstGeom>
+          <a:noFill/>
+          <a:ln/>
+        </p:spPr>
+        <p:txBody>
+          <a:bodyPr wrap="square" lIns="0" tIns="0" rIns="0" bIns="0" rtlCol="0" anchor="ctr"/>
+          <a:lstStyle/>
+          <a:p>
+            <a:pPr algn="r" indent="0" marL="0">
+              <a:buNone/>
+            </a:pPr>
+            <a:r>
+              <a:rPr lang="en-US" sz="1300" b="1" dirty="0">
+                <a:solidFill>
+                  <a:srgbClr val="A3C1AD"/>
+                </a:solidFill>
+                <a:latin typeface="Arial" pitchFamily="34" charset="0"/>
+                <a:ea typeface="Arial" pitchFamily="34" charset="-122"/>
+                <a:cs typeface="Arial" pitchFamily="34" charset="-120"/>
+              </a:rPr>
+              <a:t>/5</a:t>
+            </a:r>
+            <a:endParaRPr lang="en-US" sz="1300" dirty="0"/>
+          </a:p>
+        </p:txBody>
+      </p:sp>
+      <p:sp>
+        <p:nvSpPr>
+          <p:cNvPr id="22" name="Shape 20"/>
+          <p:cNvSpPr/>
+          <p:nvPr/>
+        </p:nvSpPr>
+        <p:spPr>
+          <a:xfrm>
+            <a:off x="822960" y="3931920"/>
+            <a:ext cx="10543032" cy="0"/>
+          </a:xfrm>
+          <a:prstGeom prst="line">
+            <a:avLst/>
+          </a:prstGeom>
+          <a:noFill/>
+          <a:ln w="9525">
+            <a:solidFill>
+              <a:srgbClr val="D9D4C4"/>
+            </a:solidFill>
+            <a:prstDash val="solid"/>
+          </a:ln>
+        </p:spPr>
+      </p:sp>
+      <p:sp>
+        <p:nvSpPr>
+          <p:cNvPr id="23" name="Text 21"/>
+          <p:cNvSpPr/>
+          <p:nvPr/>
+        </p:nvSpPr>
+        <p:spPr>
+          <a:xfrm>
+            <a:off x="822960" y="3931920"/>
+            <a:ext cx="1463040" cy="548640"/>
+          </a:xfrm>
+          <a:prstGeom prst="rect">
+            <a:avLst/>
+          </a:prstGeom>
+          <a:noFill/>
+          <a:ln/>
+        </p:spPr>
+        <p:txBody>
+          <a:bodyPr wrap="square" lIns="0" tIns="0" rIns="0" bIns="0" rtlCol="0" anchor="ctr"/>
+          <a:lstStyle/>
+          <a:p>
+            <a:pPr indent="0" marL="0">
+              <a:buNone/>
+            </a:pPr>
+            <a:r>
+              <a:rPr lang="en-US" sz="1300" b="1" spc="100" kern="0" dirty="0">
+                <a:solidFill>
+                  <a:srgbClr val="4A6B5D"/>
+                </a:solidFill>
+                <a:latin typeface="Arial" pitchFamily="34" charset="0"/>
+                <a:ea typeface="Arial" pitchFamily="34" charset="-122"/>
+                <a:cs typeface="Arial" pitchFamily="34" charset="-120"/>
+              </a:rPr>
+              <a:t>AO2</a:t>
+            </a:r>
+            <a:endParaRPr lang="en-US" sz="1300" dirty="0"/>
+          </a:p>
+        </p:txBody>
+      </p:sp>
+      <p:sp>
+        <p:nvSpPr>
+          <p:cNvPr id="24" name="Text 22"/>
+          <p:cNvSpPr/>
+          <p:nvPr/>
+        </p:nvSpPr>
+        <p:spPr>
+          <a:xfrm>
+            <a:off x="2377440" y="3931920"/>
+            <a:ext cx="7315200" cy="548640"/>
+          </a:xfrm>
+          <a:prstGeom prst="rect">
+            <a:avLst/>
+          </a:prstGeom>
+          <a:noFill/>
+          <a:ln/>
+        </p:spPr>
+        <p:txBody>
+          <a:bodyPr wrap="square" lIns="0" tIns="0" rIns="0" bIns="0" rtlCol="0" anchor="ctr"/>
+          <a:lstStyle/>
+          <a:p>
+            <a:pPr indent="0" marL="0">
+              <a:buNone/>
+            </a:pPr>
+            <a:r>
+              <a:rPr lang="en-US" sz="1600" dirty="0">
+                <a:solidFill>
+                  <a:srgbClr val="24313F"/>
+                </a:solidFill>
+                <a:latin typeface="Georgia" pitchFamily="34" charset="0"/>
+                <a:ea typeface="Georgia" pitchFamily="34" charset="-122"/>
+                <a:cs typeface="Georgia" pitchFamily="34" charset="-120"/>
+              </a:rPr>
+              <a:t>Analysis of how meaning is created</a:t>
+            </a:r>
+            <a:endParaRPr lang="en-US" sz="1600" dirty="0"/>
+          </a:p>
+        </p:txBody>
+      </p:sp>
+      <p:sp>
+        <p:nvSpPr>
+          <p:cNvPr id="25" name="Text 23"/>
+          <p:cNvSpPr/>
+          <p:nvPr/>
+        </p:nvSpPr>
+        <p:spPr>
+          <a:xfrm>
+            <a:off x="9875520" y="3931920"/>
+            <a:ext cx="1463040" cy="548640"/>
+          </a:xfrm>
+          <a:prstGeom prst="rect">
+            <a:avLst/>
+          </a:prstGeom>
+          <a:noFill/>
+          <a:ln/>
+        </p:spPr>
+        <p:txBody>
+          <a:bodyPr wrap="square" lIns="0" tIns="0" rIns="0" bIns="0" rtlCol="0" anchor="ctr"/>
+          <a:lstStyle/>
+          <a:p>
+            <a:pPr algn="r" indent="0" marL="0">
+              <a:buNone/>
+            </a:pPr>
+            <a:r>
+              <a:rPr lang="en-US" sz="1300" b="1" dirty="0">
+                <a:solidFill>
+                  <a:srgbClr val="A3C1AD"/>
+                </a:solidFill>
+                <a:latin typeface="Arial" pitchFamily="34" charset="0"/>
+                <a:ea typeface="Arial" pitchFamily="34" charset="-122"/>
+                <a:cs typeface="Arial" pitchFamily="34" charset="-120"/>
+              </a:rPr>
+              <a:t>/5</a:t>
+            </a:r>
+            <a:endParaRPr lang="en-US" sz="1300" dirty="0"/>
+          </a:p>
+        </p:txBody>
+      </p:sp>
+      <p:sp>
+        <p:nvSpPr>
+          <p:cNvPr id="26" name="Shape 24"/>
+          <p:cNvSpPr/>
+          <p:nvPr/>
+        </p:nvSpPr>
+        <p:spPr>
+          <a:xfrm>
+            <a:off x="822960" y="4480560"/>
+            <a:ext cx="10543032" cy="0"/>
+          </a:xfrm>
+          <a:prstGeom prst="line">
+            <a:avLst/>
+          </a:prstGeom>
+          <a:noFill/>
+          <a:ln w="9525">
+            <a:solidFill>
+              <a:srgbClr val="D9D4C4"/>
+            </a:solidFill>
+            <a:prstDash val="solid"/>
+          </a:ln>
+        </p:spPr>
+      </p:sp>
+      <p:sp>
+        <p:nvSpPr>
+          <p:cNvPr id="27" name="Text 25"/>
+          <p:cNvSpPr/>
+          <p:nvPr/>
+        </p:nvSpPr>
+        <p:spPr>
+          <a:xfrm>
+            <a:off x="822960" y="4480560"/>
+            <a:ext cx="1463040" cy="548640"/>
+          </a:xfrm>
+          <a:prstGeom prst="rect">
+            <a:avLst/>
+          </a:prstGeom>
+          <a:noFill/>
+          <a:ln/>
+        </p:spPr>
+        <p:txBody>
+          <a:bodyPr wrap="square" lIns="0" tIns="0" rIns="0" bIns="0" rtlCol="0" anchor="ctr"/>
+          <a:lstStyle/>
+          <a:p>
+            <a:pPr indent="0" marL="0">
+              <a:buNone/>
+            </a:pPr>
+            <a:r>
+              <a:rPr lang="en-US" sz="1300" b="1" spc="100" kern="0" dirty="0">
+                <a:solidFill>
+                  <a:srgbClr val="4A6B5D"/>
+                </a:solidFill>
+                <a:latin typeface="Arial" pitchFamily="34" charset="0"/>
+                <a:ea typeface="Arial" pitchFamily="34" charset="-122"/>
+                <a:cs typeface="Arial" pitchFamily="34" charset="-120"/>
+              </a:rPr>
+              <a:t>AO2</a:t>
+            </a:r>
+            <a:endParaRPr lang="en-US" sz="1300" dirty="0"/>
+          </a:p>
+        </p:txBody>
+      </p:sp>
+      <p:sp>
+        <p:nvSpPr>
+          <p:cNvPr id="28" name="Text 26"/>
+          <p:cNvSpPr/>
+          <p:nvPr/>
+        </p:nvSpPr>
+        <p:spPr>
+          <a:xfrm>
+            <a:off x="2377440" y="4480560"/>
+            <a:ext cx="7315200" cy="548640"/>
+          </a:xfrm>
+          <a:prstGeom prst="rect">
+            <a:avLst/>
+          </a:prstGeom>
+          <a:noFill/>
+          <a:ln/>
+        </p:spPr>
+        <p:txBody>
+          <a:bodyPr wrap="square" lIns="0" tIns="0" rIns="0" bIns="0" rtlCol="0" anchor="ctr"/>
+          <a:lstStyle/>
+          <a:p>
+            <a:pPr indent="0" marL="0">
+              <a:buNone/>
+            </a:pPr>
+            <a:r>
+              <a:rPr lang="en-US" sz="1600" dirty="0">
+                <a:solidFill>
+                  <a:srgbClr val="24313F"/>
+                </a:solidFill>
+                <a:latin typeface="Georgia" pitchFamily="34" charset="0"/>
+                <a:ea typeface="Georgia" pitchFamily="34" charset="-122"/>
+                <a:cs typeface="Georgia" pitchFamily="34" charset="-120"/>
+              </a:rPr>
+              <a:t>Use of Examples</a:t>
+            </a:r>
+            <a:endParaRPr lang="en-US" sz="1600" dirty="0"/>
+          </a:p>
+        </p:txBody>
+      </p:sp>
+      <p:sp>
+        <p:nvSpPr>
+          <p:cNvPr id="29" name="Text 27"/>
+          <p:cNvSpPr/>
+          <p:nvPr/>
+        </p:nvSpPr>
+        <p:spPr>
+          <a:xfrm>
+            <a:off x="9875520" y="4480560"/>
+            <a:ext cx="1463040" cy="548640"/>
+          </a:xfrm>
+          <a:prstGeom prst="rect">
+            <a:avLst/>
+          </a:prstGeom>
+          <a:noFill/>
+          <a:ln/>
+        </p:spPr>
+        <p:txBody>
+          <a:bodyPr wrap="square" lIns="0" tIns="0" rIns="0" bIns="0" rtlCol="0" anchor="ctr"/>
+          <a:lstStyle/>
+          <a:p>
+            <a:pPr algn="r" indent="0" marL="0">
+              <a:buNone/>
+            </a:pPr>
+            <a:r>
+              <a:rPr lang="en-US" sz="1300" b="1" dirty="0">
+                <a:solidFill>
+                  <a:srgbClr val="A3C1AD"/>
+                </a:solidFill>
+                <a:latin typeface="Arial" pitchFamily="34" charset="0"/>
+                <a:ea typeface="Arial" pitchFamily="34" charset="-122"/>
+                <a:cs typeface="Arial" pitchFamily="34" charset="-120"/>
+              </a:rPr>
+              <a:t>/5</a:t>
+            </a:r>
+            <a:endParaRPr lang="en-US" sz="1300" dirty="0"/>
+          </a:p>
+        </p:txBody>
+      </p:sp>
+      <p:sp>
+        <p:nvSpPr>
+          <p:cNvPr id="30" name="Shape 28"/>
+          <p:cNvSpPr/>
+          <p:nvPr/>
+        </p:nvSpPr>
+        <p:spPr>
+          <a:xfrm>
+            <a:off x="822960" y="5029200"/>
+            <a:ext cx="10543032" cy="0"/>
+          </a:xfrm>
+          <a:prstGeom prst="line">
+            <a:avLst/>
+          </a:prstGeom>
+          <a:noFill/>
+          <a:ln w="9525">
+            <a:solidFill>
+              <a:srgbClr val="D9D4C4"/>
+            </a:solidFill>
+            <a:prstDash val="solid"/>
+          </a:ln>
+        </p:spPr>
+      </p:sp>
+      <p:sp>
+        <p:nvSpPr>
+          <p:cNvPr id="31" name="Text 29"/>
+          <p:cNvSpPr/>
+          <p:nvPr/>
+        </p:nvSpPr>
+        <p:spPr>
+          <a:xfrm>
+            <a:off x="822960" y="5212080"/>
+            <a:ext cx="10543032" cy="365760"/>
+          </a:xfrm>
+          <a:prstGeom prst="rect">
+            <a:avLst/>
+          </a:prstGeom>
+          <a:noFill/>
+          <a:ln/>
+        </p:spPr>
+        <p:txBody>
+          <a:bodyPr wrap="square" lIns="0" tIns="0" rIns="0" bIns="0" rtlCol="0" anchor="ctr"/>
+          <a:lstStyle/>
+          <a:p>
+            <a:pPr indent="0" marL="0">
+              <a:buNone/>
+            </a:pPr>
+            <a:r>
+              <a:rPr lang="en-US" sz="1200" i="1" dirty="0">
+                <a:solidFill>
+                  <a:srgbClr val="7A7F72"/>
+                </a:solidFill>
+                <a:latin typeface="Arial" pitchFamily="34" charset="0"/>
+                <a:ea typeface="Arial" pitchFamily="34" charset="-122"/>
+                <a:cs typeface="Arial" pitchFamily="34" charset="-120"/>
+              </a:rPr>
+              <a:t>Band words: 5 Sophisticated  ·  4 Thorough  ·  3 Clear  ·  2 Limited  ·  1 Basic. So A1 is AO1 60 / AO2 40.</a:t>
+            </a:r>
+            <a:endParaRPr lang="en-US" sz="1200" dirty="0"/>
+          </a:p>
+        </p:txBody>
+      </p:sp>
+      <p:sp>
+        <p:nvSpPr>
+          <p:cNvPr id="32" name="Shape 30"/>
+          <p:cNvSpPr/>
+          <p:nvPr/>
+        </p:nvSpPr>
+        <p:spPr>
+          <a:xfrm>
+            <a:off x="822960" y="6382512"/>
+            <a:ext cx="10543032" cy="0"/>
+          </a:xfrm>
+          <a:prstGeom prst="line">
+            <a:avLst/>
+          </a:prstGeom>
+          <a:noFill/>
+          <a:ln w="9525">
+            <a:solidFill>
+              <a:srgbClr val="D9D4C4"/>
+            </a:solidFill>
+            <a:prstDash val="solid"/>
+          </a:ln>
+        </p:spPr>
+      </p:sp>
+      <p:sp>
+        <p:nvSpPr>
+          <p:cNvPr id="33" name="Text 31"/>
+          <p:cNvSpPr/>
+          <p:nvPr/>
+        </p:nvSpPr>
+        <p:spPr>
+          <a:xfrm>
+            <a:off x="822960" y="6419088"/>
+            <a:ext cx="7315200" cy="274320"/>
+          </a:xfrm>
+          <a:prstGeom prst="rect">
+            <a:avLst/>
+          </a:prstGeom>
+          <a:noFill/>
+          <a:ln/>
+        </p:spPr>
+        <p:txBody>
+          <a:bodyPr wrap="square" lIns="0" tIns="0" rIns="0" bIns="0" rtlCol="0" anchor="ctr"/>
+          <a:lstStyle/>
+          <a:p>
+            <a:pPr indent="0" marL="0">
+              <a:buNone/>
+            </a:pPr>
+            <a:r>
+              <a:rPr lang="en-US" sz="900" spc="150" kern="0" dirty="0">
+                <a:solidFill>
+                  <a:srgbClr val="7A7F72"/>
+                </a:solidFill>
+                <a:latin typeface="Arial" pitchFamily="34" charset="0"/>
+                <a:ea typeface="Arial" pitchFamily="34" charset="-122"/>
+                <a:cs typeface="Arial" pitchFamily="34" charset="-120"/>
+              </a:rPr>
+              <a:t>MEDIA STUDIES 9607 · SEMESTER I</a:t>
+            </a:r>
+            <a:endParaRPr lang="en-US" sz="900" dirty="0"/>
+          </a:p>
+        </p:txBody>
+      </p:sp>
+      <p:sp>
+        <p:nvSpPr>
+          <p:cNvPr id="34" name="Text 32"/>
+          <p:cNvSpPr/>
+          <p:nvPr/>
+        </p:nvSpPr>
+        <p:spPr>
+          <a:xfrm>
+            <a:off x="10268712" y="6355080"/>
+            <a:ext cx="1097280" cy="365760"/>
+          </a:xfrm>
+          <a:prstGeom prst="rect">
+            <a:avLst/>
+          </a:prstGeom>
+          <a:noFill/>
+          <a:ln/>
+        </p:spPr>
+        <p:txBody>
+          <a:bodyPr wrap="square" lIns="0" tIns="0" rIns="0" bIns="0" rtlCol="0" anchor="ctr"/>
+          <a:lstStyle/>
+          <a:p>
+            <a:pPr algn="r" indent="0" marL="0">
+              <a:buNone/>
+            </a:pPr>
+            <a:r>
+              <a:rPr lang="en-US" sz="1600" dirty="0">
+                <a:solidFill>
+                  <a:srgbClr val="A3C1AD"/>
+                </a:solidFill>
+                <a:latin typeface="Georgia" pitchFamily="34" charset="0"/>
+                <a:ea typeface="Georgia" pitchFamily="34" charset="-122"/>
+                <a:cs typeface="Georgia" pitchFamily="34" charset="-120"/>
+              </a:rPr>
+              <a:t>08</a:t>
+            </a:r>
+            <a:endParaRPr lang="en-US" sz="1600" dirty="0"/>
+          </a:p>
+        </p:txBody>
+      </p:sp>
+    </p:spTree>
+  </p:cSld>
+  <p:clrMapOvr>
+    <a:masterClrMapping/>
+  </p:clrMapOvr>
+</p:sld>
+</file>
+
+<file path=ppt/slides/slide11.xml><?xml version="1.0" encoding="utf-8"?>
+<p:sld xmlns:a="http://schemas.openxmlformats.org/drawingml/2006/main" xmlns:r="http://schemas.openxmlformats.org/officeDocument/2006/relationships" xmlns:p="http://schemas.openxmlformats.org/presentationml/2006/main">
+  <p:cSld name="Slide 11">
+    <p:bg>
+      <p:bgPr>
+        <a:solidFill>
           <a:srgbClr val="E8EFE7"/>
         </a:solidFill>
       </p:bgPr>
@@ -2135,34 +3399,34 @@
         </p:nvSpPr>
         <p:spPr>
           <a:xfrm>
-            <a:off x="502920" y="548640"/>
-            <a:ext cx="1828800" cy="1828800"/>
-          </a:xfrm>
-          <a:prstGeom prst="rect">
-            <a:avLst/>
-          </a:prstGeom>
-          <a:noFill/>
-          <a:ln/>
-        </p:spPr>
-        <p:txBody>
-          <a:bodyPr wrap="square" lIns="0" tIns="0" rIns="0" bIns="0" rtlCol="0" anchor="t"/>
-          <a:lstStyle/>
-          <a:p>
-            <a:pPr indent="0" marL="0">
-              <a:buNone/>
-            </a:pPr>
-            <a:r>
-              <a:rPr lang="en-US" sz="20000" dirty="0">
-                <a:solidFill>
-                  <a:srgbClr val="A3C1AD"/>
-                </a:solidFill>
-                <a:latin typeface="Georgia" pitchFamily="34" charset="0"/>
-                <a:ea typeface="Georgia" pitchFamily="34" charset="-122"/>
-                <a:cs typeface="Georgia" pitchFamily="34" charset="-120"/>
-              </a:rPr>
-              <a:t>“</a:t>
-            </a:r>
-            <a:endParaRPr lang="en-US" sz="20000" dirty="0"/>
+            <a:off x="822960" y="1554480"/>
+            <a:ext cx="8229600" cy="274320"/>
+          </a:xfrm>
+          <a:prstGeom prst="rect">
+            <a:avLst/>
+          </a:prstGeom>
+          <a:noFill/>
+          <a:ln/>
+        </p:spPr>
+        <p:txBody>
+          <a:bodyPr wrap="square" lIns="0" tIns="0" rIns="0" bIns="0" rtlCol="0" anchor="ctr"/>
+          <a:lstStyle/>
+          <a:p>
+            <a:pPr algn="l" indent="0" marL="0">
+              <a:buNone/>
+            </a:pPr>
+            <a:r>
+              <a:rPr lang="en-US" sz="1100" b="1" spc="250" kern="0" dirty="0">
+                <a:solidFill>
+                  <a:srgbClr val="4A6B5D"/>
+                </a:solidFill>
+                <a:latin typeface="Arial" pitchFamily="34" charset="0"/>
+                <a:ea typeface="Arial" pitchFamily="34" charset="-122"/>
+                <a:cs typeface="Arial" pitchFamily="34" charset="-120"/>
+              </a:rPr>
+              <a:t>WEDNESDAY, FULL CONDITIONS</a:t>
+            </a:r>
+            <a:endParaRPr lang="en-US" sz="1100" dirty="0"/>
           </a:p>
         </p:txBody>
       </p:sp>
@@ -2174,7 +3438,7 @@
         </p:nvSpPr>
         <p:spPr>
           <a:xfrm>
-            <a:off x="822960" y="1920240"/>
+            <a:off x="822960" y="2103120"/>
             <a:ext cx="10424160" cy="2194560"/>
           </a:xfrm>
           <a:prstGeom prst="rect">
@@ -2284,7 +3548,7 @@
                 <a:ea typeface="Arial" pitchFamily="34" charset="-122"/>
                 <a:cs typeface="Arial" pitchFamily="34" charset="-120"/>
               </a:rPr>
-              <a:t>How the extract constructs meaning through camera, sound, mise-en-scene, editing. Everything since Week 1 is in play.</a:t>
+              <a:t>After the Paper 2 stem: how the extract constructs meaning through camera, sound, mise-en-scene, editing. Everything since Week 1 is in play.</a:t>
             </a:r>
             <a:endParaRPr lang="en-US" sz="1400" dirty="0"/>
           </a:p>
@@ -2298,9 +3562,9 @@
 </p:sld>
 </file>
 
-<file path=ppt/slides/slide11.xml><?xml version="1.0" encoding="utf-8"?>
+<file path=ppt/slides/slide12.xml><?xml version="1.0" encoding="utf-8"?>
 <p:sld xmlns:a="http://schemas.openxmlformats.org/drawingml/2006/main" xmlns:r="http://schemas.openxmlformats.org/officeDocument/2006/relationships" xmlns:p="http://schemas.openxmlformats.org/presentationml/2006/main">
-  <p:cSld name="Slide 11">
+  <p:cSld name="Slide 12">
     <p:bg>
       <p:bgPr>
         <a:solidFill>
@@ -2560,7 +3824,7 @@
                 <a:ea typeface="Arial" pitchFamily="34" charset="-122"/>
                 <a:cs typeface="Arial" pitchFamily="34" charset="-120"/>
               </a:rPr>
-              <a:t>Also today: A2 announced, due Monday 26 October, blog posts 1 to 7 to the mid-point standard.</a:t>
+              <a:t>Personal code checklists, built at L02, are returned at the door on the way in.</a:t>
             </a:r>
             <a:endParaRPr lang="en-US" sz="1300" dirty="0"/>
           </a:p>
@@ -2661,7 +3925,7 @@
                 <a:ea typeface="Georgia" pitchFamily="34" charset="-122"/>
                 <a:cs typeface="Georgia" pitchFamily="34" charset="-120"/>
               </a:rPr>
-              <a:t>07</a:t>
+              <a:t>09</a:t>
             </a:r>
             <a:endParaRPr lang="en-US" sz="1600" dirty="0"/>
           </a:p>
@@ -2675,9 +3939,9 @@
 </p:sld>
 </file>
 
-<file path=ppt/slides/slide12.xml><?xml version="1.0" encoding="utf-8"?>
+<file path=ppt/slides/slide13.xml><?xml version="1.0" encoding="utf-8"?>
 <p:sld xmlns:a="http://schemas.openxmlformats.org/drawingml/2006/main" xmlns:r="http://schemas.openxmlformats.org/officeDocument/2006/relationships" xmlns:p="http://schemas.openxmlformats.org/presentationml/2006/main">
-  <p:cSld name="Slide 12">
+  <p:cSld name="Slide 13">
     <p:bg>
       <p:bgPr>
         <a:solidFill>
@@ -2940,7 +4204,7 @@
                 <a:ea typeface="Georgia" pitchFamily="34" charset="-122"/>
                 <a:cs typeface="Georgia" pitchFamily="34" charset="-120"/>
               </a:rPr>
-              <a:t>08</a:t>
+              <a:t>10</a:t>
             </a:r>
             <a:endParaRPr lang="en-US" sz="1600" dirty="0"/>
           </a:p>
@@ -3302,8 +4566,8 @@
         </p:nvSpPr>
         <p:spPr>
           <a:xfrm>
-            <a:off x="822960" y="1051560"/>
-            <a:ext cx="10543032" cy="731520"/>
+            <a:off x="822960" y="914400"/>
+            <a:ext cx="10543032" cy="548640"/>
           </a:xfrm>
           <a:prstGeom prst="rect">
             <a:avLst/>
@@ -3319,7 +4583,7 @@
               <a:buNone/>
             </a:pPr>
             <a:r>
-              <a:rPr lang="en-US" sz="3400" dirty="0">
+              <a:rPr lang="en-US" sz="3000" dirty="0">
                 <a:solidFill>
                   <a:srgbClr val="24313F"/>
                 </a:solidFill>
@@ -3329,106 +4593,27 @@
               </a:rPr>
               <a:t>The whole lexicon, at last testable</a:t>
             </a:r>
-            <a:endParaRPr lang="en-US" sz="3400" dirty="0"/>
-          </a:p>
-        </p:txBody>
-      </p:sp>
-      <p:sp>
-        <p:nvSpPr>
-          <p:cNvPr id="6" name="Text 4"/>
-          <p:cNvSpPr/>
-          <p:nvPr/>
-        </p:nvSpPr>
-        <p:spPr>
-          <a:xfrm>
-            <a:off x="822960" y="1828800"/>
-            <a:ext cx="10241280" cy="1280160"/>
-          </a:xfrm>
-          <a:prstGeom prst="rect">
-            <a:avLst/>
-          </a:prstGeom>
-          <a:noFill/>
-          <a:ln/>
-        </p:spPr>
-        <p:txBody>
-          <a:bodyPr wrap="square" lIns="0" tIns="0" rIns="0" bIns="0" rtlCol="0" anchor="t"/>
-          <a:lstStyle/>
-          <a:p>
-            <a:pPr indent="0" marL="0">
-              <a:lnSpc>
-                <a:spcPts val="2600"/>
-              </a:lnSpc>
-              <a:buNone/>
-            </a:pPr>
-            <a:r>
-              <a:rPr lang="en-US" sz="1850" dirty="0">
-                <a:solidFill>
-                  <a:srgbClr val="24313F"/>
-                </a:solidFill>
-                <a:latin typeface="Georgia" pitchFamily="34" charset="0"/>
-                <a:ea typeface="Georgia" pitchFamily="34" charset="-122"/>
-                <a:cs typeface="Georgia" pitchFamily="34" charset="-120"/>
-              </a:rPr>
-              <a:t>This quiz used to sit in week three and cover semiotics alone. It now sits two days before A1 and draws on all four technical elements plus the semiotic base, with at least four items on sound and four on editing, because those are the families scripts drop.</a:t>
-            </a:r>
-            <a:endParaRPr lang="en-US" sz="1850" dirty="0"/>
-          </a:p>
-        </p:txBody>
-      </p:sp>
-      <p:sp>
-        <p:nvSpPr>
-          <p:cNvPr id="7" name="Text 5"/>
-          <p:cNvSpPr/>
-          <p:nvPr/>
-        </p:nvSpPr>
-        <p:spPr>
-          <a:xfrm>
-            <a:off x="822960" y="3383280"/>
-            <a:ext cx="3209544" cy="457200"/>
-          </a:xfrm>
-          <a:prstGeom prst="rect">
-            <a:avLst/>
-          </a:prstGeom>
-          <a:noFill/>
-          <a:ln/>
-        </p:spPr>
-        <p:txBody>
-          <a:bodyPr wrap="square" lIns="0" tIns="0" rIns="0" bIns="0" rtlCol="0" anchor="ctr"/>
-          <a:lstStyle/>
-          <a:p>
-            <a:pPr indent="0" marL="0">
-              <a:buNone/>
-            </a:pPr>
-            <a:r>
-              <a:rPr lang="en-US" sz="2100" dirty="0">
-                <a:solidFill>
-                  <a:srgbClr val="4A6B5D"/>
-                </a:solidFill>
-                <a:latin typeface="Georgia" pitchFamily="34" charset="0"/>
-                <a:ea typeface="Georgia" pitchFamily="34" charset="-122"/>
-                <a:cs typeface="Georgia" pitchFamily="34" charset="-120"/>
-              </a:rPr>
-              <a:t>Define the term</a:t>
-            </a:r>
-            <a:endParaRPr lang="en-US" sz="2100" dirty="0"/>
-          </a:p>
-        </p:txBody>
-      </p:sp>
-      <p:sp>
-        <p:nvSpPr>
-          <p:cNvPr id="8" name="Shape 6"/>
-          <p:cNvSpPr/>
-          <p:nvPr/>
-        </p:nvSpPr>
-        <p:spPr>
-          <a:xfrm>
-            <a:off x="822960" y="3895344"/>
-            <a:ext cx="3209544" cy="0"/>
-          </a:xfrm>
-          <a:prstGeom prst="line">
-            <a:avLst/>
-          </a:prstGeom>
-          <a:noFill/>
+            <a:endParaRPr lang="en-US" sz="3000" dirty="0"/>
+          </a:p>
+        </p:txBody>
+      </p:sp>
+      <p:sp>
+        <p:nvSpPr>
+          <p:cNvPr id="6" name="Shape 4"/>
+          <p:cNvSpPr/>
+          <p:nvPr/>
+        </p:nvSpPr>
+        <p:spPr>
+          <a:xfrm>
+            <a:off x="822960" y="1554480"/>
+            <a:ext cx="2361438" cy="1645920"/>
+          </a:xfrm>
+          <a:prstGeom prst="rect">
+            <a:avLst/>
+          </a:prstGeom>
+          <a:solidFill>
+            <a:srgbClr val="FAF8F1"/>
+          </a:solidFill>
           <a:ln w="9525">
             <a:solidFill>
               <a:srgbClr val="D9D4C4"/>
@@ -3437,102 +4622,86 @@
           </a:ln>
         </p:spPr>
       </p:sp>
-      <p:sp>
-        <p:nvSpPr>
-          <p:cNvPr id="9" name="Text 7"/>
-          <p:cNvSpPr/>
-          <p:nvPr/>
-        </p:nvSpPr>
-        <p:spPr>
-          <a:xfrm>
-            <a:off x="822960" y="4069080"/>
-            <a:ext cx="3209544" cy="1097280"/>
-          </a:xfrm>
-          <a:prstGeom prst="rect">
-            <a:avLst/>
-          </a:prstGeom>
-          <a:noFill/>
-          <a:ln/>
-        </p:spPr>
-        <p:txBody>
-          <a:bodyPr wrap="square" lIns="0" tIns="0" rIns="0" bIns="0" rtlCol="0" anchor="t"/>
-          <a:lstStyle/>
-          <a:p>
-            <a:pPr indent="0" marL="0">
-              <a:lnSpc>
-                <a:spcPts val="2100"/>
-              </a:lnSpc>
-              <a:buNone/>
-            </a:pPr>
-            <a:r>
-              <a:rPr lang="en-US" sz="1550" dirty="0">
-                <a:solidFill>
-                  <a:srgbClr val="24313F"/>
-                </a:solidFill>
-                <a:latin typeface="Georgia" pitchFamily="34" charset="0"/>
-                <a:ea typeface="Georgia" pitchFamily="34" charset="-122"/>
-                <a:cs typeface="Georgia" pitchFamily="34" charset="-120"/>
-              </a:rPr>
-              <a:t>shot bridge, canted, high key, ellipsis, sound perspective</a:t>
-            </a:r>
-            <a:endParaRPr lang="en-US" sz="1550" dirty="0"/>
-          </a:p>
-        </p:txBody>
-      </p:sp>
-      <p:sp>
-        <p:nvSpPr>
-          <p:cNvPr id="10" name="Text 8"/>
-          <p:cNvSpPr/>
-          <p:nvPr/>
-        </p:nvSpPr>
-        <p:spPr>
-          <a:xfrm>
-            <a:off x="4489704" y="3383280"/>
-            <a:ext cx="3209544" cy="457200"/>
-          </a:xfrm>
-          <a:prstGeom prst="rect">
-            <a:avLst/>
-          </a:prstGeom>
-          <a:noFill/>
-          <a:ln/>
-        </p:spPr>
-        <p:txBody>
-          <a:bodyPr wrap="square" lIns="0" tIns="0" rIns="0" bIns="0" rtlCol="0" anchor="ctr"/>
-          <a:lstStyle/>
-          <a:p>
-            <a:pPr indent="0" marL="0">
-              <a:buNone/>
-            </a:pPr>
-            <a:r>
-              <a:rPr lang="en-US" sz="2100" dirty="0">
+      <p:pic>
+        <p:nvPicPr>
+          <p:cNvPr id="7" name="Image 0" descr="/Users/dogan/Documents/Vaults/Courses/wiki/classes/media-studies/decks/_build/img/adolescence-jamie-cu.jpg">    </p:cNvPr>
+          <p:cNvPicPr>
+            <a:picLocks noChangeAspect="1"/>
+          </p:cNvPicPr>
+          <p:nvPr/>
+        </p:nvPicPr>
+        <p:blipFill>
+          <a:blip r:embed="rId1"/>
+          <a:stretch>
+            <a:fillRect/>
+          </a:stretch>
+        </p:blipFill>
+        <p:spPr>
+          <a:xfrm>
+            <a:off x="877824" y="1815451"/>
+            <a:ext cx="2251710" cy="1123979"/>
+          </a:xfrm>
+          <a:prstGeom prst="rect">
+            <a:avLst/>
+          </a:prstGeom>
+        </p:spPr>
+      </p:pic>
+      <p:sp>
+        <p:nvSpPr>
+          <p:cNvPr id="8" name="Text 5"/>
+          <p:cNvSpPr/>
+          <p:nvPr/>
+        </p:nvSpPr>
+        <p:spPr>
+          <a:xfrm>
+            <a:off x="822960" y="3218688"/>
+            <a:ext cx="2361438" cy="292608"/>
+          </a:xfrm>
+          <a:prstGeom prst="rect">
+            <a:avLst/>
+          </a:prstGeom>
+          <a:noFill/>
+          <a:ln/>
+        </p:spPr>
+        <p:txBody>
+          <a:bodyPr wrap="square" lIns="0" tIns="0" rIns="0" bIns="0" rtlCol="0" anchor="ctr"/>
+          <a:lstStyle/>
+          <a:p>
+            <a:pPr algn="ctr" indent="0" marL="0">
+              <a:buNone/>
+            </a:pPr>
+            <a:r>
+              <a:rPr lang="en-US" sz="1100" b="1" spc="100" kern="0" dirty="0">
                 <a:solidFill>
                   <a:srgbClr val="4A6B5D"/>
                 </a:solidFill>
-                <a:latin typeface="Georgia" pitchFamily="34" charset="0"/>
-                <a:ea typeface="Georgia" pitchFamily="34" charset="-122"/>
-                <a:cs typeface="Georgia" pitchFamily="34" charset="-120"/>
-              </a:rPr>
-              <a:t>Label the example</a:t>
-            </a:r>
-            <a:endParaRPr lang="en-US" sz="2100" dirty="0"/>
-          </a:p>
-        </p:txBody>
-      </p:sp>
-      <p:sp>
-        <p:nvSpPr>
-          <p:cNvPr id="11" name="Shape 9"/>
-          <p:cNvSpPr/>
-          <p:nvPr/>
-        </p:nvSpPr>
-        <p:spPr>
-          <a:xfrm>
-            <a:off x="4489704" y="3895344"/>
-            <a:ext cx="3209544" cy="0"/>
-          </a:xfrm>
-          <a:prstGeom prst="line">
-            <a:avLst/>
-          </a:prstGeom>
-          <a:noFill/>
+                <a:latin typeface="Arial" pitchFamily="34" charset="0"/>
+                <a:ea typeface="Arial" pitchFamily="34" charset="-122"/>
+                <a:cs typeface="Arial" pitchFamily="34" charset="-120"/>
+              </a:rPr>
+              <a:t>name the focus</a:t>
+            </a:r>
+            <a:endParaRPr lang="en-US" sz="1100" dirty="0"/>
+          </a:p>
+        </p:txBody>
+      </p:sp>
+      <p:sp>
+        <p:nvSpPr>
+          <p:cNvPr id="9" name="Shape 6"/>
+          <p:cNvSpPr/>
+          <p:nvPr/>
+        </p:nvSpPr>
+        <p:spPr>
+          <a:xfrm>
+            <a:off x="3550158" y="1554480"/>
+            <a:ext cx="2361438" cy="1645920"/>
+          </a:xfrm>
+          <a:prstGeom prst="rect">
+            <a:avLst/>
+          </a:prstGeom>
+          <a:solidFill>
+            <a:srgbClr val="FAF8F1"/>
+          </a:solidFill>
           <a:ln w="9525">
             <a:solidFill>
               <a:srgbClr val="D9D4C4"/>
@@ -3541,102 +4710,86 @@
           </a:ln>
         </p:spPr>
       </p:sp>
-      <p:sp>
-        <p:nvSpPr>
-          <p:cNvPr id="12" name="Text 10"/>
-          <p:cNvSpPr/>
-          <p:nvPr/>
-        </p:nvSpPr>
-        <p:spPr>
-          <a:xfrm>
-            <a:off x="4489704" y="4069080"/>
-            <a:ext cx="3209544" cy="1097280"/>
-          </a:xfrm>
-          <a:prstGeom prst="rect">
-            <a:avLst/>
-          </a:prstGeom>
-          <a:noFill/>
-          <a:ln/>
-        </p:spPr>
-        <p:txBody>
-          <a:bodyPr wrap="square" lIns="0" tIns="0" rIns="0" bIns="0" rtlCol="0" anchor="t"/>
-          <a:lstStyle/>
-          <a:p>
-            <a:pPr indent="0" marL="0">
-              <a:lnSpc>
-                <a:spcPts val="2100"/>
-              </a:lnSpc>
-              <a:buNone/>
-            </a:pPr>
-            <a:r>
-              <a:rPr lang="en-US" sz="1550" dirty="0">
-                <a:solidFill>
-                  <a:srgbClr val="24313F"/>
-                </a:solidFill>
-                <a:latin typeface="Georgia" pitchFamily="34" charset="0"/>
-                <a:ea typeface="Georgia" pitchFamily="34" charset="-122"/>
-                <a:cs typeface="Georgia" pitchFamily="34" charset="-120"/>
-              </a:rPr>
-              <a:t>a named move, from a still or a short clip</a:t>
-            </a:r>
-            <a:endParaRPr lang="en-US" sz="1550" dirty="0"/>
-          </a:p>
-        </p:txBody>
-      </p:sp>
-      <p:sp>
-        <p:nvSpPr>
-          <p:cNvPr id="13" name="Text 11"/>
-          <p:cNvSpPr/>
-          <p:nvPr/>
-        </p:nvSpPr>
-        <p:spPr>
-          <a:xfrm>
-            <a:off x="8156448" y="3383280"/>
-            <a:ext cx="3209544" cy="457200"/>
-          </a:xfrm>
-          <a:prstGeom prst="rect">
-            <a:avLst/>
-          </a:prstGeom>
-          <a:noFill/>
-          <a:ln/>
-        </p:spPr>
-        <p:txBody>
-          <a:bodyPr wrap="square" lIns="0" tIns="0" rIns="0" bIns="0" rtlCol="0" anchor="ctr"/>
-          <a:lstStyle/>
-          <a:p>
-            <a:pPr indent="0" marL="0">
-              <a:buNone/>
-            </a:pPr>
-            <a:r>
-              <a:rPr lang="en-US" sz="2100" dirty="0">
+      <p:pic>
+        <p:nvPicPr>
+          <p:cNvPr id="10" name="Image 1" descr="/Users/dogan/Documents/Vaults/Courses/wiki/classes/media-studies/decks/_build/img/adolescence-father-ots.jpg">    </p:cNvPr>
+          <p:cNvPicPr>
+            <a:picLocks noChangeAspect="1"/>
+          </p:cNvPicPr>
+          <p:nvPr/>
+        </p:nvPicPr>
+        <p:blipFill>
+          <a:blip r:embed="rId2"/>
+          <a:stretch>
+            <a:fillRect/>
+          </a:stretch>
+        </p:blipFill>
+        <p:spPr>
+          <a:xfrm>
+            <a:off x="3605022" y="1814227"/>
+            <a:ext cx="2251710" cy="1126426"/>
+          </a:xfrm>
+          <a:prstGeom prst="rect">
+            <a:avLst/>
+          </a:prstGeom>
+        </p:spPr>
+      </p:pic>
+      <p:sp>
+        <p:nvSpPr>
+          <p:cNvPr id="11" name="Text 7"/>
+          <p:cNvSpPr/>
+          <p:nvPr/>
+        </p:nvSpPr>
+        <p:spPr>
+          <a:xfrm>
+            <a:off x="3550158" y="3218688"/>
+            <a:ext cx="2361438" cy="292608"/>
+          </a:xfrm>
+          <a:prstGeom prst="rect">
+            <a:avLst/>
+          </a:prstGeom>
+          <a:noFill/>
+          <a:ln/>
+        </p:spPr>
+        <p:txBody>
+          <a:bodyPr wrap="square" lIns="0" tIns="0" rIns="0" bIns="0" rtlCol="0" anchor="ctr"/>
+          <a:lstStyle/>
+          <a:p>
+            <a:pPr algn="ctr" indent="0" marL="0">
+              <a:buNone/>
+            </a:pPr>
+            <a:r>
+              <a:rPr lang="en-US" sz="1100" b="1" spc="100" kern="0" dirty="0">
                 <a:solidFill>
                   <a:srgbClr val="4A6B5D"/>
                 </a:solidFill>
-                <a:latin typeface="Georgia" pitchFamily="34" charset="0"/>
-                <a:ea typeface="Georgia" pitchFamily="34" charset="-122"/>
-                <a:cs typeface="Georgia" pitchFamily="34" charset="-120"/>
-              </a:rPr>
-              <a:t>Then self-mark</a:t>
-            </a:r>
-            <a:endParaRPr lang="en-US" sz="2100" dirty="0"/>
-          </a:p>
-        </p:txBody>
-      </p:sp>
-      <p:sp>
-        <p:nvSpPr>
-          <p:cNvPr id="14" name="Shape 12"/>
-          <p:cNvSpPr/>
-          <p:nvPr/>
-        </p:nvSpPr>
-        <p:spPr>
-          <a:xfrm>
-            <a:off x="8156448" y="3895344"/>
-            <a:ext cx="3209544" cy="0"/>
-          </a:xfrm>
-          <a:prstGeom prst="line">
-            <a:avLst/>
-          </a:prstGeom>
-          <a:noFill/>
+                <a:latin typeface="Arial" pitchFamily="34" charset="0"/>
+                <a:ea typeface="Arial" pitchFamily="34" charset="-122"/>
+                <a:cs typeface="Arial" pitchFamily="34" charset="-120"/>
+              </a:rPr>
+              <a:t>name the shot</a:t>
+            </a:r>
+            <a:endParaRPr lang="en-US" sz="1100" dirty="0"/>
+          </a:p>
+        </p:txBody>
+      </p:sp>
+      <p:sp>
+        <p:nvSpPr>
+          <p:cNvPr id="12" name="Shape 8"/>
+          <p:cNvSpPr/>
+          <p:nvPr/>
+        </p:nvSpPr>
+        <p:spPr>
+          <a:xfrm>
+            <a:off x="6277356" y="1554480"/>
+            <a:ext cx="2361438" cy="1645920"/>
+          </a:xfrm>
+          <a:prstGeom prst="rect">
+            <a:avLst/>
+          </a:prstGeom>
+          <a:solidFill>
+            <a:srgbClr val="FAF8F1"/>
+          </a:solidFill>
           <a:ln w="9525">
             <a:solidFill>
               <a:srgbClr val="D9D4C4"/>
@@ -3645,16 +4798,167 @@
           </a:ln>
         </p:spPr>
       </p:sp>
-      <p:sp>
-        <p:nvSpPr>
-          <p:cNvPr id="15" name="Text 13"/>
-          <p:cNvSpPr/>
-          <p:nvPr/>
-        </p:nvSpPr>
-        <p:spPr>
-          <a:xfrm>
-            <a:off x="8156448" y="4069080"/>
-            <a:ext cx="3209544" cy="1097280"/>
+      <p:pic>
+        <p:nvPicPr>
+          <p:cNvPr id="13" name="Image 2" descr="/Users/dogan/Documents/Vaults/Courses/wiki/classes/media-studies/decks/_build/img/toystory-staffmeeting.jpg">    </p:cNvPr>
+          <p:cNvPicPr>
+            <a:picLocks noChangeAspect="1"/>
+          </p:cNvPicPr>
+          <p:nvPr/>
+        </p:nvPicPr>
+        <p:blipFill>
+          <a:blip r:embed="rId3"/>
+          <a:stretch>
+            <a:fillRect/>
+          </a:stretch>
+        </p:blipFill>
+        <p:spPr>
+          <a:xfrm>
+            <a:off x="6332220" y="1649856"/>
+            <a:ext cx="2251710" cy="1455168"/>
+          </a:xfrm>
+          <a:prstGeom prst="rect">
+            <a:avLst/>
+          </a:prstGeom>
+        </p:spPr>
+      </p:pic>
+      <p:sp>
+        <p:nvSpPr>
+          <p:cNvPr id="14" name="Text 9"/>
+          <p:cNvSpPr/>
+          <p:nvPr/>
+        </p:nvSpPr>
+        <p:spPr>
+          <a:xfrm>
+            <a:off x="6277356" y="3218688"/>
+            <a:ext cx="2361438" cy="292608"/>
+          </a:xfrm>
+          <a:prstGeom prst="rect">
+            <a:avLst/>
+          </a:prstGeom>
+          <a:noFill/>
+          <a:ln/>
+        </p:spPr>
+        <p:txBody>
+          <a:bodyPr wrap="square" lIns="0" tIns="0" rIns="0" bIns="0" rtlCol="0" anchor="ctr"/>
+          <a:lstStyle/>
+          <a:p>
+            <a:pPr algn="ctr" indent="0" marL="0">
+              <a:buNone/>
+            </a:pPr>
+            <a:r>
+              <a:rPr lang="en-US" sz="1100" b="1" spc="100" kern="0" dirty="0">
+                <a:solidFill>
+                  <a:srgbClr val="4A6B5D"/>
+                </a:solidFill>
+                <a:latin typeface="Arial" pitchFamily="34" charset="0"/>
+                <a:ea typeface="Arial" pitchFamily="34" charset="-122"/>
+                <a:cs typeface="Arial" pitchFamily="34" charset="-120"/>
+              </a:rPr>
+              <a:t>name the lighting</a:t>
+            </a:r>
+            <a:endParaRPr lang="en-US" sz="1100" dirty="0"/>
+          </a:p>
+        </p:txBody>
+      </p:sp>
+      <p:sp>
+        <p:nvSpPr>
+          <p:cNvPr id="15" name="Shape 10"/>
+          <p:cNvSpPr/>
+          <p:nvPr/>
+        </p:nvSpPr>
+        <p:spPr>
+          <a:xfrm>
+            <a:off x="9004554" y="1554480"/>
+            <a:ext cx="2361438" cy="1645920"/>
+          </a:xfrm>
+          <a:prstGeom prst="rect">
+            <a:avLst/>
+          </a:prstGeom>
+          <a:solidFill>
+            <a:srgbClr val="FAF8F1"/>
+          </a:solidFill>
+          <a:ln w="9525">
+            <a:solidFill>
+              <a:srgbClr val="D9D4C4"/>
+            </a:solidFill>
+            <a:prstDash val="solid"/>
+          </a:ln>
+        </p:spPr>
+      </p:sp>
+      <p:pic>
+        <p:nvPicPr>
+          <p:cNvPr id="16" name="Image 3" descr="/Users/dogan/Documents/Vaults/Courses/wiki/classes/media-studies/decks/_build/img/thirdman-canted.jpg">    </p:cNvPr>
+          <p:cNvPicPr>
+            <a:picLocks noChangeAspect="1"/>
+          </p:cNvPicPr>
+          <p:nvPr/>
+        </p:nvPicPr>
+        <p:blipFill>
+          <a:blip r:embed="rId4"/>
+          <a:stretch>
+            <a:fillRect/>
+          </a:stretch>
+        </p:blipFill>
+        <p:spPr>
+          <a:xfrm>
+            <a:off x="9174861" y="1609344"/>
+            <a:ext cx="2020824" cy="1536192"/>
+          </a:xfrm>
+          <a:prstGeom prst="rect">
+            <a:avLst/>
+          </a:prstGeom>
+        </p:spPr>
+      </p:pic>
+      <p:sp>
+        <p:nvSpPr>
+          <p:cNvPr id="17" name="Text 11"/>
+          <p:cNvSpPr/>
+          <p:nvPr/>
+        </p:nvSpPr>
+        <p:spPr>
+          <a:xfrm>
+            <a:off x="9004554" y="3218688"/>
+            <a:ext cx="2361438" cy="292608"/>
+          </a:xfrm>
+          <a:prstGeom prst="rect">
+            <a:avLst/>
+          </a:prstGeom>
+          <a:noFill/>
+          <a:ln/>
+        </p:spPr>
+        <p:txBody>
+          <a:bodyPr wrap="square" lIns="0" tIns="0" rIns="0" bIns="0" rtlCol="0" anchor="ctr"/>
+          <a:lstStyle/>
+          <a:p>
+            <a:pPr algn="ctr" indent="0" marL="0">
+              <a:buNone/>
+            </a:pPr>
+            <a:r>
+              <a:rPr lang="en-US" sz="1100" b="1" spc="100" kern="0" dirty="0">
+                <a:solidFill>
+                  <a:srgbClr val="4A6B5D"/>
+                </a:solidFill>
+                <a:latin typeface="Arial" pitchFamily="34" charset="0"/>
+                <a:ea typeface="Arial" pitchFamily="34" charset="-122"/>
+                <a:cs typeface="Arial" pitchFamily="34" charset="-120"/>
+              </a:rPr>
+              <a:t>name the angle</a:t>
+            </a:r>
+            <a:endParaRPr lang="en-US" sz="1100" dirty="0"/>
+          </a:p>
+        </p:txBody>
+      </p:sp>
+      <p:sp>
+        <p:nvSpPr>
+          <p:cNvPr id="18" name="Text 12"/>
+          <p:cNvSpPr/>
+          <p:nvPr/>
+        </p:nvSpPr>
+        <p:spPr>
+          <a:xfrm>
+            <a:off x="822960" y="3703320"/>
+            <a:ext cx="10241280" cy="777240"/>
           </a:xfrm>
           <a:prstGeom prst="rect">
             <a:avLst/>
@@ -3681,21 +4985,264 @@
                 <a:ea typeface="Georgia" pitchFamily="34" charset="-122"/>
                 <a:cs typeface="Georgia" pitchFamily="34" charset="-120"/>
               </a:rPr>
+              <a:t>The quiz's own format, warmed up: shallow focus, over-the-shoulder, high key, canted. Then thirty items across all four elements, at least four each on sound and editing, the families scripts drop.</a:t>
+            </a:r>
+            <a:endParaRPr lang="en-US" sz="1550" dirty="0"/>
+          </a:p>
+        </p:txBody>
+      </p:sp>
+      <p:sp>
+        <p:nvSpPr>
+          <p:cNvPr id="19" name="Text 13"/>
+          <p:cNvSpPr/>
+          <p:nvPr/>
+        </p:nvSpPr>
+        <p:spPr>
+          <a:xfrm>
+            <a:off x="822960" y="4617720"/>
+            <a:ext cx="3209544" cy="365760"/>
+          </a:xfrm>
+          <a:prstGeom prst="rect">
+            <a:avLst/>
+          </a:prstGeom>
+          <a:noFill/>
+          <a:ln/>
+        </p:spPr>
+        <p:txBody>
+          <a:bodyPr wrap="square" lIns="0" tIns="0" rIns="0" bIns="0" rtlCol="0" anchor="ctr"/>
+          <a:lstStyle/>
+          <a:p>
+            <a:pPr indent="0" marL="0">
+              <a:buNone/>
+            </a:pPr>
+            <a:r>
+              <a:rPr lang="en-US" sz="1700" dirty="0">
+                <a:solidFill>
+                  <a:srgbClr val="4A6B5D"/>
+                </a:solidFill>
+                <a:latin typeface="Georgia" pitchFamily="34" charset="0"/>
+                <a:ea typeface="Georgia" pitchFamily="34" charset="-122"/>
+                <a:cs typeface="Georgia" pitchFamily="34" charset="-120"/>
+              </a:rPr>
+              <a:t>Define the term</a:t>
+            </a:r>
+            <a:endParaRPr lang="en-US" sz="1700" dirty="0"/>
+          </a:p>
+        </p:txBody>
+      </p:sp>
+      <p:sp>
+        <p:nvSpPr>
+          <p:cNvPr id="20" name="Text 14"/>
+          <p:cNvSpPr/>
+          <p:nvPr/>
+        </p:nvSpPr>
+        <p:spPr>
+          <a:xfrm>
+            <a:off x="822960" y="5010912"/>
+            <a:ext cx="3209544" cy="685800"/>
+          </a:xfrm>
+          <a:prstGeom prst="rect">
+            <a:avLst/>
+          </a:prstGeom>
+          <a:noFill/>
+          <a:ln/>
+        </p:spPr>
+        <p:txBody>
+          <a:bodyPr wrap="square" lIns="0" tIns="0" rIns="0" bIns="0" rtlCol="0" anchor="t"/>
+          <a:lstStyle/>
+          <a:p>
+            <a:pPr indent="0" marL="0">
+              <a:lnSpc>
+                <a:spcPts val="1600"/>
+              </a:lnSpc>
+              <a:buNone/>
+            </a:pPr>
+            <a:r>
+              <a:rPr lang="en-US" sz="1250" dirty="0">
+                <a:solidFill>
+                  <a:srgbClr val="24313F"/>
+                </a:solidFill>
+                <a:latin typeface="Georgia" pitchFamily="34" charset="0"/>
+                <a:ea typeface="Georgia" pitchFamily="34" charset="-122"/>
+                <a:cs typeface="Georgia" pitchFamily="34" charset="-120"/>
+              </a:rPr>
+              <a:t>shot bridge, canted, high key, ellipsis, sound perspective</a:t>
+            </a:r>
+            <a:endParaRPr lang="en-US" sz="1250" dirty="0"/>
+          </a:p>
+        </p:txBody>
+      </p:sp>
+      <p:sp>
+        <p:nvSpPr>
+          <p:cNvPr id="21" name="Text 15"/>
+          <p:cNvSpPr/>
+          <p:nvPr/>
+        </p:nvSpPr>
+        <p:spPr>
+          <a:xfrm>
+            <a:off x="4489704" y="4617720"/>
+            <a:ext cx="3209544" cy="365760"/>
+          </a:xfrm>
+          <a:prstGeom prst="rect">
+            <a:avLst/>
+          </a:prstGeom>
+          <a:noFill/>
+          <a:ln/>
+        </p:spPr>
+        <p:txBody>
+          <a:bodyPr wrap="square" lIns="0" tIns="0" rIns="0" bIns="0" rtlCol="0" anchor="ctr"/>
+          <a:lstStyle/>
+          <a:p>
+            <a:pPr indent="0" marL="0">
+              <a:buNone/>
+            </a:pPr>
+            <a:r>
+              <a:rPr lang="en-US" sz="1700" dirty="0">
+                <a:solidFill>
+                  <a:srgbClr val="4A6B5D"/>
+                </a:solidFill>
+                <a:latin typeface="Georgia" pitchFamily="34" charset="0"/>
+                <a:ea typeface="Georgia" pitchFamily="34" charset="-122"/>
+                <a:cs typeface="Georgia" pitchFamily="34" charset="-120"/>
+              </a:rPr>
+              <a:t>Label the example</a:t>
+            </a:r>
+            <a:endParaRPr lang="en-US" sz="1700" dirty="0"/>
+          </a:p>
+        </p:txBody>
+      </p:sp>
+      <p:sp>
+        <p:nvSpPr>
+          <p:cNvPr id="22" name="Text 16"/>
+          <p:cNvSpPr/>
+          <p:nvPr/>
+        </p:nvSpPr>
+        <p:spPr>
+          <a:xfrm>
+            <a:off x="4489704" y="5010912"/>
+            <a:ext cx="3209544" cy="685800"/>
+          </a:xfrm>
+          <a:prstGeom prst="rect">
+            <a:avLst/>
+          </a:prstGeom>
+          <a:noFill/>
+          <a:ln/>
+        </p:spPr>
+        <p:txBody>
+          <a:bodyPr wrap="square" lIns="0" tIns="0" rIns="0" bIns="0" rtlCol="0" anchor="t"/>
+          <a:lstStyle/>
+          <a:p>
+            <a:pPr indent="0" marL="0">
+              <a:lnSpc>
+                <a:spcPts val="1600"/>
+              </a:lnSpc>
+              <a:buNone/>
+            </a:pPr>
+            <a:r>
+              <a:rPr lang="en-US" sz="1250" dirty="0">
+                <a:solidFill>
+                  <a:srgbClr val="24313F"/>
+                </a:solidFill>
+                <a:latin typeface="Georgia" pitchFamily="34" charset="0"/>
+                <a:ea typeface="Georgia" pitchFamily="34" charset="-122"/>
+                <a:cs typeface="Georgia" pitchFamily="34" charset="-120"/>
+              </a:rPr>
+              <a:t>a named move, from a still or a short clip</a:t>
+            </a:r>
+            <a:endParaRPr lang="en-US" sz="1250" dirty="0"/>
+          </a:p>
+        </p:txBody>
+      </p:sp>
+      <p:sp>
+        <p:nvSpPr>
+          <p:cNvPr id="23" name="Text 17"/>
+          <p:cNvSpPr/>
+          <p:nvPr/>
+        </p:nvSpPr>
+        <p:spPr>
+          <a:xfrm>
+            <a:off x="8156448" y="4617720"/>
+            <a:ext cx="3209544" cy="365760"/>
+          </a:xfrm>
+          <a:prstGeom prst="rect">
+            <a:avLst/>
+          </a:prstGeom>
+          <a:noFill/>
+          <a:ln/>
+        </p:spPr>
+        <p:txBody>
+          <a:bodyPr wrap="square" lIns="0" tIns="0" rIns="0" bIns="0" rtlCol="0" anchor="ctr"/>
+          <a:lstStyle/>
+          <a:p>
+            <a:pPr indent="0" marL="0">
+              <a:buNone/>
+            </a:pPr>
+            <a:r>
+              <a:rPr lang="en-US" sz="1700" dirty="0">
+                <a:solidFill>
+                  <a:srgbClr val="4A6B5D"/>
+                </a:solidFill>
+                <a:latin typeface="Georgia" pitchFamily="34" charset="0"/>
+                <a:ea typeface="Georgia" pitchFamily="34" charset="-122"/>
+                <a:cs typeface="Georgia" pitchFamily="34" charset="-120"/>
+              </a:rPr>
+              <a:t>Then self-mark</a:t>
+            </a:r>
+            <a:endParaRPr lang="en-US" sz="1700" dirty="0"/>
+          </a:p>
+        </p:txBody>
+      </p:sp>
+      <p:sp>
+        <p:nvSpPr>
+          <p:cNvPr id="24" name="Text 18"/>
+          <p:cNvSpPr/>
+          <p:nvPr/>
+        </p:nvSpPr>
+        <p:spPr>
+          <a:xfrm>
+            <a:off x="8156448" y="5010912"/>
+            <a:ext cx="3209544" cy="685800"/>
+          </a:xfrm>
+          <a:prstGeom prst="rect">
+            <a:avLst/>
+          </a:prstGeom>
+          <a:noFill/>
+          <a:ln/>
+        </p:spPr>
+        <p:txBody>
+          <a:bodyPr wrap="square" lIns="0" tIns="0" rIns="0" bIns="0" rtlCol="0" anchor="t"/>
+          <a:lstStyle/>
+          <a:p>
+            <a:pPr indent="0" marL="0">
+              <a:lnSpc>
+                <a:spcPts val="1600"/>
+              </a:lnSpc>
+              <a:buNone/>
+            </a:pPr>
+            <a:r>
+              <a:rPr lang="en-US" sz="1250" dirty="0">
+                <a:solidFill>
+                  <a:srgbClr val="24313F"/>
+                </a:solidFill>
+                <a:latin typeface="Georgia" pitchFamily="34" charset="0"/>
+                <a:ea typeface="Georgia" pitchFamily="34" charset="-122"/>
+                <a:cs typeface="Georgia" pitchFamily="34" charset="-120"/>
+              </a:rPr>
               <a:t>immediately, against the definitions on screen</a:t>
             </a:r>
-            <a:endParaRPr lang="en-US" sz="1550" dirty="0"/>
-          </a:p>
-        </p:txBody>
-      </p:sp>
-      <p:sp>
-        <p:nvSpPr>
-          <p:cNvPr id="16" name="Shape 14"/>
-          <p:cNvSpPr/>
-          <p:nvPr/>
-        </p:nvSpPr>
-        <p:spPr>
-          <a:xfrm>
-            <a:off x="822960" y="5349240"/>
+            <a:endParaRPr lang="en-US" sz="1250" dirty="0"/>
+          </a:p>
+        </p:txBody>
+      </p:sp>
+      <p:sp>
+        <p:nvSpPr>
+          <p:cNvPr id="25" name="Shape 19"/>
+          <p:cNvSpPr/>
+          <p:nvPr/>
+        </p:nvSpPr>
+        <p:spPr>
+          <a:xfrm>
+            <a:off x="822960" y="5760720"/>
             <a:ext cx="914400" cy="0"/>
           </a:xfrm>
           <a:prstGeom prst="line">
@@ -3712,14 +5259,14 @@
       </p:sp>
       <p:sp>
         <p:nvSpPr>
-          <p:cNvPr id="17" name="Text 15"/>
-          <p:cNvSpPr/>
-          <p:nvPr/>
-        </p:nvSpPr>
-        <p:spPr>
-          <a:xfrm>
-            <a:off x="822960" y="5532120"/>
-            <a:ext cx="10424160" cy="365760"/>
+          <p:cNvPr id="26" name="Text 20"/>
+          <p:cNvSpPr/>
+          <p:nvPr/>
+        </p:nvSpPr>
+        <p:spPr>
+          <a:xfrm>
+            <a:off x="822960" y="5897880"/>
+            <a:ext cx="10424160" cy="411480"/>
           </a:xfrm>
           <a:prstGeom prst="rect">
             <a:avLst/>
@@ -3735,7 +5282,7 @@
               <a:buNone/>
             </a:pPr>
             <a:r>
-              <a:rPr lang="en-US" sz="1250" i="1" dirty="0">
+              <a:rPr lang="en-US" sz="1200" i="1" dirty="0">
                 <a:solidFill>
                   <a:srgbClr val="7A7F72"/>
                 </a:solidFill>
@@ -3743,15 +5290,15 @@
                 <a:ea typeface="Arial" pitchFamily="34" charset="-122"/>
                 <a:cs typeface="Arial" pitchFamily="34" charset="-120"/>
               </a:rPr>
-              <a:t>The self-marking does more teaching than the quiz. Whatever you miss here is your revision list for Wednesday.</a:t>
-            </a:r>
-            <a:endParaRPr lang="en-US" sz="1250" dirty="0"/>
-          </a:p>
-        </p:txBody>
-      </p:sp>
-      <p:sp>
-        <p:nvSpPr>
-          <p:cNvPr id="18" name="Shape 16"/>
+              <a:t>Whatever you miss here is your revision list for Wednesday. Also Monday: A2 announced, due Monday 26 October, blog posts 1 to 7 to the mid-point standard.</a:t>
+            </a:r>
+            <a:endParaRPr lang="en-US" sz="1200" dirty="0"/>
+          </a:p>
+        </p:txBody>
+      </p:sp>
+      <p:sp>
+        <p:nvSpPr>
+          <p:cNvPr id="27" name="Shape 21"/>
           <p:cNvSpPr/>
           <p:nvPr/>
         </p:nvSpPr>
@@ -3774,7 +5321,7 @@
       </p:sp>
       <p:sp>
         <p:nvSpPr>
-          <p:cNvPr id="19" name="Text 17"/>
+          <p:cNvPr id="28" name="Text 22"/>
           <p:cNvSpPr/>
           <p:nvPr/>
         </p:nvSpPr>
@@ -3813,7 +5360,7 @@
       </p:sp>
       <p:sp>
         <p:nvSpPr>
-          <p:cNvPr id="20" name="Text 18"/>
+          <p:cNvPr id="29" name="Text 23"/>
           <p:cNvSpPr/>
           <p:nvPr/>
         </p:nvSpPr>
@@ -3954,7 +5501,7 @@
                 <a:ea typeface="Arial" pitchFamily="34" charset="-122"/>
                 <a:cs typeface="Arial" pitchFamily="34" charset="-120"/>
               </a:rPr>
-              <a:t>SAME ORDER, EVERY EXTRACT, EVERY TIME</a:t>
+              <a:t>SAME ORDER AS THE LOCK, AND FOREVER</a:t>
             </a:r>
             <a:endParaRPr lang="en-US" sz="1100" dirty="0"/>
           </a:p>
@@ -4030,7 +5577,7 @@
         </p:nvSpPr>
         <p:spPr>
           <a:xfrm>
-            <a:off x="822960" y="1783080"/>
+            <a:off x="822960" y="1828800"/>
             <a:ext cx="457200" cy="457200"/>
           </a:xfrm>
           <a:prstGeom prst="ellipse">
@@ -4071,7 +5618,7 @@
         </p:nvSpPr>
         <p:spPr>
           <a:xfrm>
-            <a:off x="1508760" y="1783080"/>
+            <a:off x="1508760" y="1828800"/>
             <a:ext cx="3291840" cy="457200"/>
           </a:xfrm>
           <a:prstGeom prst="rect">
@@ -4110,7 +5657,7 @@
         </p:nvSpPr>
         <p:spPr>
           <a:xfrm>
-            <a:off x="4846320" y="1783080"/>
+            <a:off x="4846320" y="1828800"/>
             <a:ext cx="6400800" cy="457200"/>
           </a:xfrm>
           <a:prstGeom prst="rect">
@@ -4149,8 +5696,8 @@
         </p:nvSpPr>
         <p:spPr>
           <a:xfrm>
-            <a:off x="1051560" y="2240280"/>
-            <a:ext cx="0" cy="109728"/>
+            <a:off x="1051560" y="2286000"/>
+            <a:ext cx="0" cy="164592"/>
           </a:xfrm>
           <a:prstGeom prst="line">
             <a:avLst/>
@@ -4172,7 +5719,7 @@
         </p:nvSpPr>
         <p:spPr>
           <a:xfrm>
-            <a:off x="822960" y="2350008"/>
+            <a:off x="822960" y="2468880"/>
             <a:ext cx="457200" cy="457200"/>
           </a:xfrm>
           <a:prstGeom prst="ellipse">
@@ -4213,7 +5760,7 @@
         </p:nvSpPr>
         <p:spPr>
           <a:xfrm>
-            <a:off x="1508760" y="2350008"/>
+            <a:off x="1508760" y="2468880"/>
             <a:ext cx="3291840" cy="457200"/>
           </a:xfrm>
           <a:prstGeom prst="rect">
@@ -4252,7 +5799,7 @@
         </p:nvSpPr>
         <p:spPr>
           <a:xfrm>
-            <a:off x="4846320" y="2350008"/>
+            <a:off x="4846320" y="2468880"/>
             <a:ext cx="6400800" cy="457200"/>
           </a:xfrm>
           <a:prstGeom prst="rect">
@@ -4291,8 +5838,8 @@
         </p:nvSpPr>
         <p:spPr>
           <a:xfrm>
-            <a:off x="1051560" y="2807208"/>
-            <a:ext cx="0" cy="109728"/>
+            <a:off x="1051560" y="2926080"/>
+            <a:ext cx="0" cy="164592"/>
           </a:xfrm>
           <a:prstGeom prst="line">
             <a:avLst/>
@@ -4314,7 +5861,7 @@
         </p:nvSpPr>
         <p:spPr>
           <a:xfrm>
-            <a:off x="822960" y="2916936"/>
+            <a:off x="822960" y="3108960"/>
             <a:ext cx="457200" cy="457200"/>
           </a:xfrm>
           <a:prstGeom prst="ellipse">
@@ -4355,7 +5902,7 @@
         </p:nvSpPr>
         <p:spPr>
           <a:xfrm>
-            <a:off x="1508760" y="2916936"/>
+            <a:off x="1508760" y="3108960"/>
             <a:ext cx="3291840" cy="457200"/>
           </a:xfrm>
           <a:prstGeom prst="rect">
@@ -4394,7 +5941,7 @@
         </p:nvSpPr>
         <p:spPr>
           <a:xfrm>
-            <a:off x="4846320" y="2916936"/>
+            <a:off x="4846320" y="3108960"/>
             <a:ext cx="6400800" cy="457200"/>
           </a:xfrm>
           <a:prstGeom prst="rect">
@@ -4433,8 +5980,8 @@
         </p:nvSpPr>
         <p:spPr>
           <a:xfrm>
-            <a:off x="1051560" y="3374136"/>
-            <a:ext cx="0" cy="109728"/>
+            <a:off x="1051560" y="3566160"/>
+            <a:ext cx="0" cy="164592"/>
           </a:xfrm>
           <a:prstGeom prst="line">
             <a:avLst/>
@@ -4456,7 +6003,7 @@
         </p:nvSpPr>
         <p:spPr>
           <a:xfrm>
-            <a:off x="822960" y="3483864"/>
+            <a:off x="822960" y="3749040"/>
             <a:ext cx="457200" cy="457200"/>
           </a:xfrm>
           <a:prstGeom prst="ellipse">
@@ -4497,7 +6044,7 @@
         </p:nvSpPr>
         <p:spPr>
           <a:xfrm>
-            <a:off x="1508760" y="3483864"/>
+            <a:off x="1508760" y="3749040"/>
             <a:ext cx="3291840" cy="457200"/>
           </a:xfrm>
           <a:prstGeom prst="rect">
@@ -4536,7 +6083,7 @@
         </p:nvSpPr>
         <p:spPr>
           <a:xfrm>
-            <a:off x="4846320" y="3483864"/>
+            <a:off x="4846320" y="3749040"/>
             <a:ext cx="6400800" cy="457200"/>
           </a:xfrm>
           <a:prstGeom prst="rect">
@@ -4575,8 +6122,8 @@
         </p:nvSpPr>
         <p:spPr>
           <a:xfrm>
-            <a:off x="1051560" y="3941064"/>
-            <a:ext cx="0" cy="109728"/>
+            <a:off x="1051560" y="4206240"/>
+            <a:ext cx="0" cy="164592"/>
           </a:xfrm>
           <a:prstGeom prst="line">
             <a:avLst/>
@@ -4598,7 +6145,7 @@
         </p:nvSpPr>
         <p:spPr>
           <a:xfrm>
-            <a:off x="822960" y="4050792"/>
+            <a:off x="822960" y="4389120"/>
             <a:ext cx="457200" cy="457200"/>
           </a:xfrm>
           <a:prstGeom prst="ellipse">
@@ -4639,7 +6186,7 @@
         </p:nvSpPr>
         <p:spPr>
           <a:xfrm>
-            <a:off x="1508760" y="4050792"/>
+            <a:off x="1508760" y="4389120"/>
             <a:ext cx="3291840" cy="457200"/>
           </a:xfrm>
           <a:prstGeom prst="rect">
@@ -4678,7 +6225,7 @@
         </p:nvSpPr>
         <p:spPr>
           <a:xfrm>
-            <a:off x="4846320" y="4050792"/>
+            <a:off x="4846320" y="4389120"/>
             <a:ext cx="6400800" cy="457200"/>
           </a:xfrm>
           <a:prstGeom prst="rect">
@@ -4717,8 +6264,8 @@
         </p:nvSpPr>
         <p:spPr>
           <a:xfrm>
-            <a:off x="1051560" y="4507992"/>
-            <a:ext cx="0" cy="109728"/>
+            <a:off x="1051560" y="4846320"/>
+            <a:ext cx="0" cy="164592"/>
           </a:xfrm>
           <a:prstGeom prst="line">
             <a:avLst/>
@@ -4740,7 +6287,7 @@
         </p:nvSpPr>
         <p:spPr>
           <a:xfrm>
-            <a:off x="822960" y="4617720"/>
+            <a:off x="822960" y="5029200"/>
             <a:ext cx="457200" cy="457200"/>
           </a:xfrm>
           <a:prstGeom prst="ellipse">
@@ -4781,7 +6328,7 @@
         </p:nvSpPr>
         <p:spPr>
           <a:xfrm>
-            <a:off x="1508760" y="4617720"/>
+            <a:off x="1508760" y="5029200"/>
             <a:ext cx="3291840" cy="457200"/>
           </a:xfrm>
           <a:prstGeom prst="rect">
@@ -4820,7 +6367,7 @@
         </p:nvSpPr>
         <p:spPr>
           <a:xfrm>
-            <a:off x="4846320" y="4617720"/>
+            <a:off x="4846320" y="5029200"/>
             <a:ext cx="6400800" cy="457200"/>
           </a:xfrm>
           <a:prstGeom prst="rect">
@@ -4853,149 +6400,7 @@
       </p:sp>
       <p:sp>
         <p:nvSpPr>
-          <p:cNvPr id="29" name="Shape 27"/>
-          <p:cNvSpPr/>
-          <p:nvPr/>
-        </p:nvSpPr>
-        <p:spPr>
-          <a:xfrm>
-            <a:off x="1051560" y="5074920"/>
-            <a:ext cx="0" cy="109728"/>
-          </a:xfrm>
-          <a:prstGeom prst="line">
-            <a:avLst/>
-          </a:prstGeom>
-          <a:noFill/>
-          <a:ln w="19050">
-            <a:solidFill>
-              <a:srgbClr val="8AA394"/>
-            </a:solidFill>
-            <a:prstDash val="solid"/>
-          </a:ln>
-        </p:spPr>
-      </p:sp>
-      <p:sp>
-        <p:nvSpPr>
-          <p:cNvPr id="30" name="Text 28"/>
-          <p:cNvSpPr/>
-          <p:nvPr/>
-        </p:nvSpPr>
-        <p:spPr>
-          <a:xfrm>
-            <a:off x="822960" y="5184648"/>
-            <a:ext cx="457200" cy="457200"/>
-          </a:xfrm>
-          <a:prstGeom prst="ellipse">
-            <a:avLst/>
-          </a:prstGeom>
-          <a:solidFill>
-            <a:srgbClr val="A3C1AD"/>
-          </a:solidFill>
-          <a:ln/>
-        </p:spPr>
-        <p:txBody>
-          <a:bodyPr wrap="square" lIns="0" tIns="0" rIns="0" bIns="0" rtlCol="0" anchor="ctr"/>
-          <a:lstStyle/>
-          <a:p>
-            <a:pPr algn="ctr" indent="0" marL="0">
-              <a:buNone/>
-            </a:pPr>
-            <a:r>
-              <a:rPr lang="en-US" sz="1700" dirty="0">
-                <a:solidFill>
-                  <a:srgbClr val="FAF8F1"/>
-                </a:solidFill>
-                <a:latin typeface="Georgia" pitchFamily="34" charset="0"/>
-                <a:ea typeface="Georgia" pitchFamily="34" charset="-122"/>
-                <a:cs typeface="Georgia" pitchFamily="34" charset="-120"/>
-              </a:rPr>
-              <a:t>7</a:t>
-            </a:r>
-            <a:endParaRPr lang="en-US" sz="1700" dirty="0"/>
-          </a:p>
-        </p:txBody>
-      </p:sp>
-      <p:sp>
-        <p:nvSpPr>
-          <p:cNvPr id="31" name="Text 29"/>
-          <p:cNvSpPr/>
-          <p:nvPr/>
-        </p:nvSpPr>
-        <p:spPr>
-          <a:xfrm>
-            <a:off x="1508760" y="5184648"/>
-            <a:ext cx="3291840" cy="457200"/>
-          </a:xfrm>
-          <a:prstGeom prst="rect">
-            <a:avLst/>
-          </a:prstGeom>
-          <a:noFill/>
-          <a:ln/>
-        </p:spPr>
-        <p:txBody>
-          <a:bodyPr wrap="square" lIns="0" tIns="0" rIns="0" bIns="0" rtlCol="0" anchor="ctr"/>
-          <a:lstStyle/>
-          <a:p>
-            <a:pPr indent="0" marL="0">
-              <a:buNone/>
-            </a:pPr>
-            <a:r>
-              <a:rPr lang="en-US" sz="1900" dirty="0">
-                <a:solidFill>
-                  <a:srgbClr val="4A6B5D"/>
-                </a:solidFill>
-                <a:latin typeface="Georgia" pitchFamily="34" charset="0"/>
-                <a:ea typeface="Georgia" pitchFamily="34" charset="-122"/>
-                <a:cs typeface="Georgia" pitchFamily="34" charset="-120"/>
-              </a:rPr>
-              <a:t>Narrative codes</a:t>
-            </a:r>
-            <a:endParaRPr lang="en-US" sz="1900" dirty="0"/>
-          </a:p>
-        </p:txBody>
-      </p:sp>
-      <p:sp>
-        <p:nvSpPr>
-          <p:cNvPr id="32" name="Text 30"/>
-          <p:cNvSpPr/>
-          <p:nvPr/>
-        </p:nvSpPr>
-        <p:spPr>
-          <a:xfrm>
-            <a:off x="4846320" y="5184648"/>
-            <a:ext cx="6400800" cy="457200"/>
-          </a:xfrm>
-          <a:prstGeom prst="rect">
-            <a:avLst/>
-          </a:prstGeom>
-          <a:noFill/>
-          <a:ln/>
-        </p:spPr>
-        <p:txBody>
-          <a:bodyPr wrap="square" lIns="0" tIns="0" rIns="0" bIns="0" rtlCol="0" anchor="ctr"/>
-          <a:lstStyle/>
-          <a:p>
-            <a:pPr indent="0" marL="0">
-              <a:buNone/>
-            </a:pPr>
-            <a:r>
-              <a:rPr lang="en-US" sz="1500" dirty="0">
-                <a:solidFill>
-                  <a:srgbClr val="24313F"/>
-                </a:solidFill>
-                <a:latin typeface="Georgia" pitchFamily="34" charset="0"/>
-                <a:ea typeface="Georgia" pitchFamily="34" charset="-122"/>
-                <a:cs typeface="Georgia" pitchFamily="34" charset="-120"/>
-              </a:rPr>
-              <a:t>enigma, action, structure</a:t>
-            </a:r>
-            <a:endParaRPr lang="en-US" sz="1500" dirty="0"/>
-          </a:p>
-        </p:txBody>
-      </p:sp>
-      <p:sp>
-        <p:nvSpPr>
-          <p:cNvPr id="33" name="Text 31"/>
+          <p:cNvPr id="29" name="Text 27"/>
           <p:cNvSpPr/>
           <p:nvPr/>
         </p:nvSpPr>
@@ -5034,7 +6439,7 @@
       </p:sp>
       <p:sp>
         <p:nvSpPr>
-          <p:cNvPr id="34" name="Shape 32"/>
+          <p:cNvPr id="30" name="Shape 28"/>
           <p:cNvSpPr/>
           <p:nvPr/>
         </p:nvSpPr>
@@ -5057,7 +6462,7 @@
       </p:sp>
       <p:sp>
         <p:nvSpPr>
-          <p:cNvPr id="35" name="Text 33"/>
+          <p:cNvPr id="31" name="Text 29"/>
           <p:cNvSpPr/>
           <p:nvPr/>
         </p:nvSpPr>
@@ -5096,7 +6501,7 @@
       </p:sp>
       <p:sp>
         <p:nvSpPr>
-          <p:cNvPr id="36" name="Text 34"/>
+          <p:cNvPr id="32" name="Text 30"/>
           <p:cNvSpPr/>
           <p:nvPr/>
         </p:nvSpPr>
@@ -5144,6 +6549,13 @@
 <file path=ppt/slides/slide5.xml><?xml version="1.0" encoding="utf-8"?>
 <p:sld xmlns:a="http://schemas.openxmlformats.org/drawingml/2006/main" xmlns:r="http://schemas.openxmlformats.org/officeDocument/2006/relationships" xmlns:p="http://schemas.openxmlformats.org/presentationml/2006/main">
   <p:cSld name="Slide 5">
+    <p:bg>
+      <p:bgPr>
+        <a:solidFill>
+          <a:srgbClr val="FAF8F1"/>
+        </a:solidFill>
+      </p:bgPr>
+    </p:bg>
     <p:spTree>
       <p:nvGrpSpPr>
         <p:cNvPr id="1" name=""/>
@@ -5158,9 +6570,135 @@
           <a:chExt cx="0" cy="0"/>
         </a:xfrm>
       </p:grpSpPr>
+      <p:sp>
+        <p:nvSpPr>
+          <p:cNvPr id="2" name="Text 0"/>
+          <p:cNvSpPr/>
+          <p:nvPr/>
+        </p:nvSpPr>
+        <p:spPr>
+          <a:xfrm>
+            <a:off x="822960" y="457200"/>
+            <a:ext cx="6400800" cy="274320"/>
+          </a:xfrm>
+          <a:prstGeom prst="rect">
+            <a:avLst/>
+          </a:prstGeom>
+          <a:noFill/>
+          <a:ln/>
+        </p:spPr>
+        <p:txBody>
+          <a:bodyPr wrap="square" lIns="0" tIns="0" rIns="0" bIns="0" rtlCol="0" anchor="ctr"/>
+          <a:lstStyle/>
+          <a:p>
+            <a:pPr algn="l" indent="0" marL="0">
+              <a:buNone/>
+            </a:pPr>
+            <a:r>
+              <a:rPr lang="en-US" sz="1100" b="1" spc="250" kern="0" dirty="0">
+                <a:solidFill>
+                  <a:srgbClr val="4A6B5D"/>
+                </a:solidFill>
+                <a:latin typeface="Arial" pitchFamily="34" charset="0"/>
+                <a:ea typeface="Arial" pitchFamily="34" charset="-122"/>
+                <a:cs typeface="Arial" pitchFamily="34" charset="-120"/>
+              </a:rPr>
+              <a:t>THE DISCIPLINE, APPLIED</a:t>
+            </a:r>
+            <a:endParaRPr lang="en-US" sz="1100" dirty="0"/>
+          </a:p>
+        </p:txBody>
+      </p:sp>
+      <p:sp>
+        <p:nvSpPr>
+          <p:cNvPr id="3" name="Text 1"/>
+          <p:cNvSpPr/>
+          <p:nvPr/>
+        </p:nvSpPr>
+        <p:spPr>
+          <a:xfrm>
+            <a:off x="6793992" y="457200"/>
+            <a:ext cx="4572000" cy="274320"/>
+          </a:xfrm>
+          <a:prstGeom prst="rect">
+            <a:avLst/>
+          </a:prstGeom>
+          <a:noFill/>
+          <a:ln/>
+        </p:spPr>
+        <p:txBody>
+          <a:bodyPr wrap="square" lIns="0" tIns="0" rIns="0" bIns="0" rtlCol="0" anchor="ctr"/>
+          <a:lstStyle/>
+          <a:p>
+            <a:pPr algn="r" indent="0" marL="0">
+              <a:buNone/>
+            </a:pPr>
+            <a:r>
+              <a:rPr lang="en-US" sz="1100" b="1" spc="250" kern="0" dirty="0">
+                <a:solidFill>
+                  <a:srgbClr val="7A7F72"/>
+                </a:solidFill>
+                <a:latin typeface="Arial" pitchFamily="34" charset="0"/>
+                <a:ea typeface="Arial" pitchFamily="34" charset="-122"/>
+                <a:cs typeface="Arial" pitchFamily="34" charset="-120"/>
+              </a:rPr>
+              <a:t>ONE DENSE FRAME, READ IN ORDER</a:t>
+            </a:r>
+            <a:endParaRPr lang="en-US" sz="1100" dirty="0"/>
+          </a:p>
+        </p:txBody>
+      </p:sp>
+      <p:sp>
+        <p:nvSpPr>
+          <p:cNvPr id="4" name="Shape 2"/>
+          <p:cNvSpPr/>
+          <p:nvPr/>
+        </p:nvSpPr>
+        <p:spPr>
+          <a:xfrm>
+            <a:off x="822960" y="786384"/>
+            <a:ext cx="10543032" cy="0"/>
+          </a:xfrm>
+          <a:prstGeom prst="line">
+            <a:avLst/>
+          </a:prstGeom>
+          <a:noFill/>
+          <a:ln w="9525">
+            <a:solidFill>
+              <a:srgbClr val="D9D4C4"/>
+            </a:solidFill>
+            <a:prstDash val="solid"/>
+          </a:ln>
+        </p:spPr>
+      </p:sp>
+      <p:sp>
+        <p:nvSpPr>
+          <p:cNvPr id="5" name="Shape 3"/>
+          <p:cNvSpPr/>
+          <p:nvPr/>
+        </p:nvSpPr>
+        <p:spPr>
+          <a:xfrm>
+            <a:off x="822960" y="1097280"/>
+            <a:ext cx="6309360" cy="3977640"/>
+          </a:xfrm>
+          <a:prstGeom prst="rect">
+            <a:avLst/>
+          </a:prstGeom>
+          <a:solidFill>
+            <a:srgbClr val="FAF8F1"/>
+          </a:solidFill>
+          <a:ln w="9525">
+            <a:solidFill>
+              <a:srgbClr val="D9D4C4"/>
+            </a:solidFill>
+            <a:prstDash val="solid"/>
+          </a:ln>
+        </p:spPr>
+      </p:sp>
       <p:pic>
         <p:nvPicPr>
-          <p:cNvPr id="2" name="Image 0" descr="/Users/dogan/Documents/Vaults/Courses/wiki/classes/media-studies/decks/_build/img/crops/johnston-literature_a1777.jpg">    </p:cNvPr>
+          <p:cNvPr id="6" name="Image 0" descr="/Users/dogan/Documents/Vaults/Courses/wiki/classes/media-studies/decks/_build/img/adolescence-interview.jpg">    </p:cNvPr>
           <p:cNvPicPr>
             <a:picLocks noChangeAspect="1"/>
           </p:cNvPicPr>
@@ -5174,8 +6712,8 @@
         </p:blipFill>
         <p:spPr>
           <a:xfrm>
-            <a:off x="0" y="0"/>
-            <a:ext cx="12188952" cy="6858000"/>
+            <a:off x="950976" y="1564175"/>
+            <a:ext cx="6053328" cy="3043850"/>
           </a:xfrm>
           <a:prstGeom prst="rect">
             <a:avLst/>
@@ -5184,58 +6722,77 @@
       </p:pic>
       <p:sp>
         <p:nvSpPr>
-          <p:cNvPr id="3" name="Shape 0"/>
-          <p:cNvSpPr/>
-          <p:nvPr/>
-        </p:nvSpPr>
-        <p:spPr>
-          <a:xfrm>
-            <a:off x="502920" y="502920"/>
-            <a:ext cx="5120640" cy="502920"/>
-          </a:xfrm>
-          <a:prstGeom prst="rect">
-            <a:avLst/>
-          </a:prstGeom>
-          <a:solidFill>
-            <a:srgbClr val="FAF8F1"/>
-          </a:solidFill>
-          <a:ln/>
-        </p:spPr>
-      </p:sp>
-      <p:sp>
-        <p:nvSpPr>
-          <p:cNvPr id="4" name="Text 1"/>
-          <p:cNvSpPr/>
-          <p:nvPr/>
-        </p:nvSpPr>
-        <p:spPr>
-          <a:xfrm>
-            <a:off x="704088" y="521208"/>
-            <a:ext cx="4846320" cy="274320"/>
-          </a:xfrm>
-          <a:prstGeom prst="rect">
-            <a:avLst/>
-          </a:prstGeom>
-          <a:noFill/>
-          <a:ln/>
-        </p:spPr>
-        <p:txBody>
-          <a:bodyPr wrap="square" lIns="0" tIns="0" rIns="0" bIns="0" rtlCol="0" anchor="ctr"/>
-          <a:lstStyle/>
-          <a:p>
-            <a:pPr algn="l" indent="0" marL="0">
-              <a:buNone/>
-            </a:pPr>
-            <a:r>
-              <a:rPr lang="en-US" sz="1100" b="1" spc="250" kern="0" dirty="0">
-                <a:solidFill>
-                  <a:srgbClr val="4A6B5D"/>
+          <p:cNvPr id="7" name="Text 4"/>
+          <p:cNvSpPr/>
+          <p:nvPr/>
+        </p:nvSpPr>
+        <p:spPr>
+          <a:xfrm>
+            <a:off x="822960" y="5120640"/>
+            <a:ext cx="6309360" cy="274320"/>
+          </a:xfrm>
+          <a:prstGeom prst="rect">
+            <a:avLst/>
+          </a:prstGeom>
+          <a:noFill/>
+          <a:ln/>
+        </p:spPr>
+        <p:txBody>
+          <a:bodyPr wrap="square" lIns="0" tIns="0" rIns="0" bIns="0" rtlCol="0" anchor="ctr"/>
+          <a:lstStyle/>
+          <a:p>
+            <a:pPr algn="ctr" indent="0" marL="0">
+              <a:buNone/>
+            </a:pPr>
+            <a:r>
+              <a:rPr lang="en-US" sz="950" dirty="0">
+                <a:solidFill>
+                  <a:srgbClr val="7A7F72"/>
                 </a:solidFill>
                 <a:latin typeface="Arial" pitchFamily="34" charset="0"/>
                 <a:ea typeface="Arial" pitchFamily="34" charset="-122"/>
                 <a:cs typeface="Arial" pitchFamily="34" charset="-120"/>
               </a:rPr>
-              <a:t>THE DISCIPLINE IS THE SKILL</a:t>
+              <a:t>Adolescence (Netflix, 2025): the interview room</a:t>
+            </a:r>
+            <a:endParaRPr lang="en-US" sz="950" dirty="0"/>
+          </a:p>
+        </p:txBody>
+      </p:sp>
+      <p:sp>
+        <p:nvSpPr>
+          <p:cNvPr id="8" name="Text 5"/>
+          <p:cNvSpPr/>
+          <p:nvPr/>
+        </p:nvSpPr>
+        <p:spPr>
+          <a:xfrm>
+            <a:off x="7452360" y="1188720"/>
+            <a:ext cx="1600200" cy="685800"/>
+          </a:xfrm>
+          <a:prstGeom prst="rect">
+            <a:avLst/>
+          </a:prstGeom>
+          <a:noFill/>
+          <a:ln/>
+        </p:spPr>
+        <p:txBody>
+          <a:bodyPr wrap="square" lIns="0" tIns="0" rIns="0" bIns="0" rtlCol="0" anchor="t"/>
+          <a:lstStyle/>
+          <a:p>
+            <a:pPr indent="0" marL="0">
+              <a:buNone/>
+            </a:pPr>
+            <a:r>
+              <a:rPr lang="en-US" sz="1100" b="1" spc="50" kern="0" dirty="0">
+                <a:solidFill>
+                  <a:srgbClr val="4A6B5D"/>
+                </a:solidFill>
+                <a:latin typeface="Arial" pitchFamily="34" charset="0"/>
+                <a:ea typeface="Arial" pitchFamily="34" charset="-122"/>
+                <a:cs typeface="Arial" pitchFamily="34" charset="-120"/>
+              </a:rPr>
+              <a:t>1 Framing</a:t>
             </a:r>
             <a:endParaRPr lang="en-US" sz="1100" dirty="0"/>
           </a:p>
@@ -5243,40 +6800,467 @@
       </p:sp>
       <p:sp>
         <p:nvSpPr>
-          <p:cNvPr id="5" name="Shape 2"/>
-          <p:cNvSpPr/>
-          <p:nvPr/>
-        </p:nvSpPr>
-        <p:spPr>
-          <a:xfrm>
-            <a:off x="457200" y="5230368"/>
-            <a:ext cx="8778240" cy="1243584"/>
-          </a:xfrm>
-          <a:prstGeom prst="rect">
-            <a:avLst/>
-          </a:prstGeom>
-          <a:solidFill>
-            <a:srgbClr val="FAF8F1"/>
-          </a:solidFill>
-          <a:ln/>
-        </p:spPr>
-      </p:sp>
-      <p:sp>
-        <p:nvSpPr>
-          <p:cNvPr id="6" name="Shape 3"/>
-          <p:cNvSpPr/>
-          <p:nvPr/>
-        </p:nvSpPr>
-        <p:spPr>
-          <a:xfrm>
-            <a:off x="676656" y="5468112"/>
-            <a:ext cx="731520" cy="0"/>
+          <p:cNvPr id="9" name="Text 6"/>
+          <p:cNvSpPr/>
+          <p:nvPr/>
+        </p:nvSpPr>
+        <p:spPr>
+          <a:xfrm>
+            <a:off x="9052560" y="1188720"/>
+            <a:ext cx="2331720" cy="685800"/>
+          </a:xfrm>
+          <a:prstGeom prst="rect">
+            <a:avLst/>
+          </a:prstGeom>
+          <a:noFill/>
+          <a:ln/>
+        </p:spPr>
+        <p:txBody>
+          <a:bodyPr wrap="square" lIns="0" tIns="0" rIns="0" bIns="0" rtlCol="0" anchor="t"/>
+          <a:lstStyle/>
+          <a:p>
+            <a:pPr indent="0" marL="0">
+              <a:lnSpc>
+                <a:spcPts val="1500"/>
+              </a:lnSpc>
+              <a:buNone/>
+            </a:pPr>
+            <a:r>
+              <a:rPr lang="en-US" sz="1200" dirty="0">
+                <a:solidFill>
+                  <a:srgbClr val="24313F"/>
+                </a:solidFill>
+                <a:latin typeface="Georgia" pitchFamily="34" charset="0"/>
+                <a:ea typeface="Georgia" pitchFamily="34" charset="-122"/>
+                <a:cs typeface="Georgia" pitchFamily="34" charset="-120"/>
+              </a:rPr>
+              <a:t>three figures, a table, an empty corner</a:t>
+            </a:r>
+            <a:endParaRPr lang="en-US" sz="1200" dirty="0"/>
+          </a:p>
+        </p:txBody>
+      </p:sp>
+      <p:sp>
+        <p:nvSpPr>
+          <p:cNvPr id="10" name="Text 7"/>
+          <p:cNvSpPr/>
+          <p:nvPr/>
+        </p:nvSpPr>
+        <p:spPr>
+          <a:xfrm>
+            <a:off x="7452360" y="1938528"/>
+            <a:ext cx="1600200" cy="685800"/>
+          </a:xfrm>
+          <a:prstGeom prst="rect">
+            <a:avLst/>
+          </a:prstGeom>
+          <a:noFill/>
+          <a:ln/>
+        </p:spPr>
+        <p:txBody>
+          <a:bodyPr wrap="square" lIns="0" tIns="0" rIns="0" bIns="0" rtlCol="0" anchor="t"/>
+          <a:lstStyle/>
+          <a:p>
+            <a:pPr indent="0" marL="0">
+              <a:buNone/>
+            </a:pPr>
+            <a:r>
+              <a:rPr lang="en-US" sz="1100" b="1" spc="50" kern="0" dirty="0">
+                <a:solidFill>
+                  <a:srgbClr val="4A6B5D"/>
+                </a:solidFill>
+                <a:latin typeface="Arial" pitchFamily="34" charset="0"/>
+                <a:ea typeface="Arial" pitchFamily="34" charset="-122"/>
+                <a:cs typeface="Arial" pitchFamily="34" charset="-120"/>
+              </a:rPr>
+              <a:t>2 Camera</a:t>
+            </a:r>
+            <a:endParaRPr lang="en-US" sz="1100" dirty="0"/>
+          </a:p>
+        </p:txBody>
+      </p:sp>
+      <p:sp>
+        <p:nvSpPr>
+          <p:cNvPr id="11" name="Text 8"/>
+          <p:cNvSpPr/>
+          <p:nvPr/>
+        </p:nvSpPr>
+        <p:spPr>
+          <a:xfrm>
+            <a:off x="9052560" y="1938528"/>
+            <a:ext cx="2331720" cy="685800"/>
+          </a:xfrm>
+          <a:prstGeom prst="rect">
+            <a:avLst/>
+          </a:prstGeom>
+          <a:noFill/>
+          <a:ln/>
+        </p:spPr>
+        <p:txBody>
+          <a:bodyPr wrap="square" lIns="0" tIns="0" rIns="0" bIns="0" rtlCol="0" anchor="t"/>
+          <a:lstStyle/>
+          <a:p>
+            <a:pPr indent="0" marL="0">
+              <a:lnSpc>
+                <a:spcPts val="1500"/>
+              </a:lnSpc>
+              <a:buNone/>
+            </a:pPr>
+            <a:r>
+              <a:rPr lang="en-US" sz="1200" dirty="0">
+                <a:solidFill>
+                  <a:srgbClr val="24313F"/>
+                </a:solidFill>
+                <a:latin typeface="Georgia" pitchFamily="34" charset="0"/>
+                <a:ea typeface="Georgia" pitchFamily="34" charset="-122"/>
+                <a:cs typeface="Georgia" pitchFamily="34" charset="-120"/>
+              </a:rPr>
+              <a:t>wide, eye level, static: procedure</a:t>
+            </a:r>
+            <a:endParaRPr lang="en-US" sz="1200" dirty="0"/>
+          </a:p>
+        </p:txBody>
+      </p:sp>
+      <p:sp>
+        <p:nvSpPr>
+          <p:cNvPr id="12" name="Text 9"/>
+          <p:cNvSpPr/>
+          <p:nvPr/>
+        </p:nvSpPr>
+        <p:spPr>
+          <a:xfrm>
+            <a:off x="7452360" y="2688336"/>
+            <a:ext cx="1600200" cy="685800"/>
+          </a:xfrm>
+          <a:prstGeom prst="rect">
+            <a:avLst/>
+          </a:prstGeom>
+          <a:noFill/>
+          <a:ln/>
+        </p:spPr>
+        <p:txBody>
+          <a:bodyPr wrap="square" lIns="0" tIns="0" rIns="0" bIns="0" rtlCol="0" anchor="t"/>
+          <a:lstStyle/>
+          <a:p>
+            <a:pPr indent="0" marL="0">
+              <a:buNone/>
+            </a:pPr>
+            <a:r>
+              <a:rPr lang="en-US" sz="1100" b="1" spc="50" kern="0" dirty="0">
+                <a:solidFill>
+                  <a:srgbClr val="4A6B5D"/>
+                </a:solidFill>
+                <a:latin typeface="Arial" pitchFamily="34" charset="0"/>
+                <a:ea typeface="Arial" pitchFamily="34" charset="-122"/>
+                <a:cs typeface="Arial" pitchFamily="34" charset="-120"/>
+              </a:rPr>
+              <a:t>3 Light</a:t>
+            </a:r>
+            <a:endParaRPr lang="en-US" sz="1100" dirty="0"/>
+          </a:p>
+        </p:txBody>
+      </p:sp>
+      <p:sp>
+        <p:nvSpPr>
+          <p:cNvPr id="13" name="Text 10"/>
+          <p:cNvSpPr/>
+          <p:nvPr/>
+        </p:nvSpPr>
+        <p:spPr>
+          <a:xfrm>
+            <a:off x="9052560" y="2688336"/>
+            <a:ext cx="2331720" cy="685800"/>
+          </a:xfrm>
+          <a:prstGeom prst="rect">
+            <a:avLst/>
+          </a:prstGeom>
+          <a:noFill/>
+          <a:ln/>
+        </p:spPr>
+        <p:txBody>
+          <a:bodyPr wrap="square" lIns="0" tIns="0" rIns="0" bIns="0" rtlCol="0" anchor="t"/>
+          <a:lstStyle/>
+          <a:p>
+            <a:pPr indent="0" marL="0">
+              <a:lnSpc>
+                <a:spcPts val="1500"/>
+              </a:lnSpc>
+              <a:buNone/>
+            </a:pPr>
+            <a:r>
+              <a:rPr lang="en-US" sz="1200" dirty="0">
+                <a:solidFill>
+                  <a:srgbClr val="24313F"/>
+                </a:solidFill>
+                <a:latin typeface="Georgia" pitchFamily="34" charset="0"/>
+                <a:ea typeface="Georgia" pitchFamily="34" charset="-122"/>
+                <a:cs typeface="Georgia" pitchFamily="34" charset="-120"/>
+              </a:rPr>
+              <a:t>cold, even, institutional</a:t>
+            </a:r>
+            <a:endParaRPr lang="en-US" sz="1200" dirty="0"/>
+          </a:p>
+        </p:txBody>
+      </p:sp>
+      <p:sp>
+        <p:nvSpPr>
+          <p:cNvPr id="14" name="Text 11"/>
+          <p:cNvSpPr/>
+          <p:nvPr/>
+        </p:nvSpPr>
+        <p:spPr>
+          <a:xfrm>
+            <a:off x="7452360" y="3438144"/>
+            <a:ext cx="1600200" cy="685800"/>
+          </a:xfrm>
+          <a:prstGeom prst="rect">
+            <a:avLst/>
+          </a:prstGeom>
+          <a:noFill/>
+          <a:ln/>
+        </p:spPr>
+        <p:txBody>
+          <a:bodyPr wrap="square" lIns="0" tIns="0" rIns="0" bIns="0" rtlCol="0" anchor="t"/>
+          <a:lstStyle/>
+          <a:p>
+            <a:pPr indent="0" marL="0">
+              <a:buNone/>
+            </a:pPr>
+            <a:r>
+              <a:rPr lang="en-US" sz="1100" b="1" spc="50" kern="0" dirty="0">
+                <a:solidFill>
+                  <a:srgbClr val="4A6B5D"/>
+                </a:solidFill>
+                <a:latin typeface="Arial" pitchFamily="34" charset="0"/>
+                <a:ea typeface="Arial" pitchFamily="34" charset="-122"/>
+                <a:cs typeface="Arial" pitchFamily="34" charset="-120"/>
+              </a:rPr>
+              <a:t>4 Mise-en-scene</a:t>
+            </a:r>
+            <a:endParaRPr lang="en-US" sz="1100" dirty="0"/>
+          </a:p>
+        </p:txBody>
+      </p:sp>
+      <p:sp>
+        <p:nvSpPr>
+          <p:cNvPr id="15" name="Text 12"/>
+          <p:cNvSpPr/>
+          <p:nvPr/>
+        </p:nvSpPr>
+        <p:spPr>
+          <a:xfrm>
+            <a:off x="9052560" y="3438144"/>
+            <a:ext cx="2331720" cy="685800"/>
+          </a:xfrm>
+          <a:prstGeom prst="rect">
+            <a:avLst/>
+          </a:prstGeom>
+          <a:noFill/>
+          <a:ln/>
+        </p:spPr>
+        <p:txBody>
+          <a:bodyPr wrap="square" lIns="0" tIns="0" rIns="0" bIns="0" rtlCol="0" anchor="t"/>
+          <a:lstStyle/>
+          <a:p>
+            <a:pPr indent="0" marL="0">
+              <a:lnSpc>
+                <a:spcPts val="1500"/>
+              </a:lnSpc>
+              <a:buNone/>
+            </a:pPr>
+            <a:r>
+              <a:rPr lang="en-US" sz="1200" dirty="0">
+                <a:solidFill>
+                  <a:srgbClr val="24313F"/>
+                </a:solidFill>
+                <a:latin typeface="Georgia" pitchFamily="34" charset="0"/>
+                <a:ea typeface="Georgia" pitchFamily="34" charset="-122"/>
+                <a:cs typeface="Georgia" pitchFamily="34" charset="-120"/>
+              </a:rPr>
+              <a:t>the notice, the forms, the sweatshirt</a:t>
+            </a:r>
+            <a:endParaRPr lang="en-US" sz="1200" dirty="0"/>
+          </a:p>
+        </p:txBody>
+      </p:sp>
+      <p:sp>
+        <p:nvSpPr>
+          <p:cNvPr id="16" name="Text 13"/>
+          <p:cNvSpPr/>
+          <p:nvPr/>
+        </p:nvSpPr>
+        <p:spPr>
+          <a:xfrm>
+            <a:off x="7452360" y="4187952"/>
+            <a:ext cx="1600200" cy="685800"/>
+          </a:xfrm>
+          <a:prstGeom prst="rect">
+            <a:avLst/>
+          </a:prstGeom>
+          <a:noFill/>
+          <a:ln/>
+        </p:spPr>
+        <p:txBody>
+          <a:bodyPr wrap="square" lIns="0" tIns="0" rIns="0" bIns="0" rtlCol="0" anchor="t"/>
+          <a:lstStyle/>
+          <a:p>
+            <a:pPr indent="0" marL="0">
+              <a:buNone/>
+            </a:pPr>
+            <a:r>
+              <a:rPr lang="en-US" sz="1100" b="1" spc="50" kern="0" dirty="0">
+                <a:solidFill>
+                  <a:srgbClr val="4A6B5D"/>
+                </a:solidFill>
+                <a:latin typeface="Arial" pitchFamily="34" charset="0"/>
+                <a:ea typeface="Arial" pitchFamily="34" charset="-122"/>
+                <a:cs typeface="Arial" pitchFamily="34" charset="-120"/>
+              </a:rPr>
+              <a:t>5 Sound</a:t>
+            </a:r>
+            <a:endParaRPr lang="en-US" sz="1100" dirty="0"/>
+          </a:p>
+        </p:txBody>
+      </p:sp>
+      <p:sp>
+        <p:nvSpPr>
+          <p:cNvPr id="17" name="Text 14"/>
+          <p:cNvSpPr/>
+          <p:nvPr/>
+        </p:nvSpPr>
+        <p:spPr>
+          <a:xfrm>
+            <a:off x="9052560" y="4187952"/>
+            <a:ext cx="2331720" cy="685800"/>
+          </a:xfrm>
+          <a:prstGeom prst="rect">
+            <a:avLst/>
+          </a:prstGeom>
+          <a:noFill/>
+          <a:ln/>
+        </p:spPr>
+        <p:txBody>
+          <a:bodyPr wrap="square" lIns="0" tIns="0" rIns="0" bIns="0" rtlCol="0" anchor="t"/>
+          <a:lstStyle/>
+          <a:p>
+            <a:pPr indent="0" marL="0">
+              <a:lnSpc>
+                <a:spcPts val="1500"/>
+              </a:lnSpc>
+              <a:buNone/>
+            </a:pPr>
+            <a:r>
+              <a:rPr lang="en-US" sz="1200" dirty="0">
+                <a:solidFill>
+                  <a:srgbClr val="24313F"/>
+                </a:solidFill>
+                <a:latin typeface="Georgia" pitchFamily="34" charset="0"/>
+                <a:ea typeface="Georgia" pitchFamily="34" charset="-122"/>
+                <a:cs typeface="Georgia" pitchFamily="34" charset="-120"/>
+              </a:rPr>
+              <a:t>a still cannot show it: name that too</a:t>
+            </a:r>
+            <a:endParaRPr lang="en-US" sz="1200" dirty="0"/>
+          </a:p>
+        </p:txBody>
+      </p:sp>
+      <p:sp>
+        <p:nvSpPr>
+          <p:cNvPr id="18" name="Text 15"/>
+          <p:cNvSpPr/>
+          <p:nvPr/>
+        </p:nvSpPr>
+        <p:spPr>
+          <a:xfrm>
+            <a:off x="7452360" y="4937760"/>
+            <a:ext cx="1600200" cy="685800"/>
+          </a:xfrm>
+          <a:prstGeom prst="rect">
+            <a:avLst/>
+          </a:prstGeom>
+          <a:noFill/>
+          <a:ln/>
+        </p:spPr>
+        <p:txBody>
+          <a:bodyPr wrap="square" lIns="0" tIns="0" rIns="0" bIns="0" rtlCol="0" anchor="t"/>
+          <a:lstStyle/>
+          <a:p>
+            <a:pPr indent="0" marL="0">
+              <a:buNone/>
+            </a:pPr>
+            <a:r>
+              <a:rPr lang="en-US" sz="1100" b="1" spc="50" kern="0" dirty="0">
+                <a:solidFill>
+                  <a:srgbClr val="4A6B5D"/>
+                </a:solidFill>
+                <a:latin typeface="Arial" pitchFamily="34" charset="0"/>
+                <a:ea typeface="Arial" pitchFamily="34" charset="-122"/>
+                <a:cs typeface="Arial" pitchFamily="34" charset="-120"/>
+              </a:rPr>
+              <a:t>6 Edit</a:t>
+            </a:r>
+            <a:endParaRPr lang="en-US" sz="1100" dirty="0"/>
+          </a:p>
+        </p:txBody>
+      </p:sp>
+      <p:sp>
+        <p:nvSpPr>
+          <p:cNvPr id="19" name="Text 16"/>
+          <p:cNvSpPr/>
+          <p:nvPr/>
+        </p:nvSpPr>
+        <p:spPr>
+          <a:xfrm>
+            <a:off x="9052560" y="4937760"/>
+            <a:ext cx="2331720" cy="685800"/>
+          </a:xfrm>
+          <a:prstGeom prst="rect">
+            <a:avLst/>
+          </a:prstGeom>
+          <a:noFill/>
+          <a:ln/>
+        </p:spPr>
+        <p:txBody>
+          <a:bodyPr wrap="square" lIns="0" tIns="0" rIns="0" bIns="0" rtlCol="0" anchor="t"/>
+          <a:lstStyle/>
+          <a:p>
+            <a:pPr indent="0" marL="0">
+              <a:lnSpc>
+                <a:spcPts val="1500"/>
+              </a:lnSpc>
+              <a:buNone/>
+            </a:pPr>
+            <a:r>
+              <a:rPr lang="en-US" sz="1200" dirty="0">
+                <a:solidFill>
+                  <a:srgbClr val="24313F"/>
+                </a:solidFill>
+                <a:latin typeface="Georgia" pitchFamily="34" charset="0"/>
+                <a:ea typeface="Georgia" pitchFamily="34" charset="-122"/>
+                <a:cs typeface="Georgia" pitchFamily="34" charset="-120"/>
+              </a:rPr>
+              <a:t>one take; the reframings do the cutting</a:t>
+            </a:r>
+            <a:endParaRPr lang="en-US" sz="1200" dirty="0"/>
+          </a:p>
+        </p:txBody>
+      </p:sp>
+      <p:sp>
+        <p:nvSpPr>
+          <p:cNvPr id="20" name="Shape 17"/>
+          <p:cNvSpPr/>
+          <p:nvPr/>
+        </p:nvSpPr>
+        <p:spPr>
+          <a:xfrm>
+            <a:off x="822960" y="5623560"/>
+            <a:ext cx="914400" cy="0"/>
           </a:xfrm>
           <a:prstGeom prst="line">
             <a:avLst/>
           </a:prstGeom>
           <a:noFill/>
-          <a:ln w="28575">
+          <a:ln w="31750">
             <a:solidFill>
               <a:srgbClr val="8C3A38"/>
             </a:solidFill>
@@ -5286,56 +7270,76 @@
       </p:sp>
       <p:sp>
         <p:nvSpPr>
-          <p:cNvPr id="7" name="Text 4"/>
-          <p:cNvSpPr/>
-          <p:nvPr/>
-        </p:nvSpPr>
-        <p:spPr>
-          <a:xfrm>
-            <a:off x="676656" y="5541264"/>
-            <a:ext cx="8339328" cy="585216"/>
-          </a:xfrm>
-          <a:prstGeom prst="rect">
-            <a:avLst/>
-          </a:prstGeom>
-          <a:noFill/>
-          <a:ln/>
-        </p:spPr>
-        <p:txBody>
-          <a:bodyPr wrap="square" lIns="0" tIns="0" rIns="0" bIns="0" rtlCol="0" anchor="t"/>
+          <p:cNvPr id="21" name="Text 18"/>
+          <p:cNvSpPr/>
+          <p:nvPr/>
+        </p:nvSpPr>
+        <p:spPr>
+          <a:xfrm>
+            <a:off x="822960" y="5760720"/>
+            <a:ext cx="10543032" cy="411480"/>
+          </a:xfrm>
+          <a:prstGeom prst="rect">
+            <a:avLst/>
+          </a:prstGeom>
+          <a:noFill/>
+          <a:ln/>
+        </p:spPr>
+        <p:txBody>
+          <a:bodyPr wrap="square" lIns="0" tIns="0" rIns="0" bIns="0" rtlCol="0" anchor="ctr"/>
           <a:lstStyle/>
           <a:p>
             <a:pPr indent="0" marL="0">
-              <a:lnSpc>
-                <a:spcPts val="2200"/>
-              </a:lnSpc>
-              <a:buNone/>
-            </a:pPr>
-            <a:r>
-              <a:rPr lang="en-US" sz="1800" dirty="0">
-                <a:solidFill>
-                  <a:srgbClr val="24313F"/>
+              <a:buNone/>
+            </a:pPr>
+            <a:r>
+              <a:rPr lang="en-US" sz="1350" i="1" dirty="0">
+                <a:solidFill>
+                  <a:srgbClr val="4A6B5D"/>
                 </a:solidFill>
                 <a:latin typeface="Georgia" pitchFamily="34" charset="0"/>
                 <a:ea typeface="Georgia" pitchFamily="34" charset="-122"/>
                 <a:cs typeface="Georgia" pitchFamily="34" charset="-120"/>
               </a:rPr>
-              <a:t>Systematic reading is a habit you build, not a talent: the same order, every text, every time.</a:t>
-            </a:r>
-            <a:endParaRPr lang="en-US" sz="1800" dirty="0"/>
-          </a:p>
-        </p:txBody>
-      </p:sp>
-      <p:sp>
-        <p:nvSpPr>
-          <p:cNvPr id="8" name="Text 5"/>
-          <p:cNvSpPr/>
-          <p:nvPr/>
-        </p:nvSpPr>
-        <p:spPr>
-          <a:xfrm>
-            <a:off x="676656" y="6181344"/>
-            <a:ext cx="8339328" cy="256032"/>
+              <a:t>Systematic reading is a habit, not a talent: the same order, every text, every time, until no code family is left unvisited.</a:t>
+            </a:r>
+            <a:endParaRPr lang="en-US" sz="1350" dirty="0"/>
+          </a:p>
+        </p:txBody>
+      </p:sp>
+      <p:sp>
+        <p:nvSpPr>
+          <p:cNvPr id="22" name="Shape 19"/>
+          <p:cNvSpPr/>
+          <p:nvPr/>
+        </p:nvSpPr>
+        <p:spPr>
+          <a:xfrm>
+            <a:off x="822960" y="6382512"/>
+            <a:ext cx="10543032" cy="0"/>
+          </a:xfrm>
+          <a:prstGeom prst="line">
+            <a:avLst/>
+          </a:prstGeom>
+          <a:noFill/>
+          <a:ln w="9525">
+            <a:solidFill>
+              <a:srgbClr val="D9D4C4"/>
+            </a:solidFill>
+            <a:prstDash val="solid"/>
+          </a:ln>
+        </p:spPr>
+      </p:sp>
+      <p:sp>
+        <p:nvSpPr>
+          <p:cNvPr id="23" name="Text 20"/>
+          <p:cNvSpPr/>
+          <p:nvPr/>
+        </p:nvSpPr>
+        <p:spPr>
+          <a:xfrm>
+            <a:off x="822960" y="6419088"/>
+            <a:ext cx="7315200" cy="274320"/>
           </a:xfrm>
           <a:prstGeom prst="rect">
             <a:avLst/>
@@ -5351,7 +7355,7 @@
               <a:buNone/>
             </a:pPr>
             <a:r>
-              <a:rPr lang="en-US" sz="950" spc="50" kern="0" dirty="0">
+              <a:rPr lang="en-US" sz="900" spc="150" kern="0" dirty="0">
                 <a:solidFill>
                   <a:srgbClr val="7A7F72"/>
                 </a:solidFill>
@@ -5359,9 +7363,48 @@
                 <a:ea typeface="Arial" pitchFamily="34" charset="-122"/>
                 <a:cs typeface="Arial" pitchFamily="34" charset="-120"/>
               </a:rPr>
-              <a:t>Frances Benjamin Johnston, an English Literature class, Hampton, c. 1899</a:t>
-            </a:r>
-            <a:endParaRPr lang="en-US" sz="950" dirty="0"/>
+              <a:t>MEDIA STUDIES 9607 · SEMESTER I</a:t>
+            </a:r>
+            <a:endParaRPr lang="en-US" sz="900" dirty="0"/>
+          </a:p>
+        </p:txBody>
+      </p:sp>
+      <p:sp>
+        <p:nvSpPr>
+          <p:cNvPr id="24" name="Text 21"/>
+          <p:cNvSpPr/>
+          <p:nvPr/>
+        </p:nvSpPr>
+        <p:spPr>
+          <a:xfrm>
+            <a:off x="10268712" y="6355080"/>
+            <a:ext cx="1097280" cy="365760"/>
+          </a:xfrm>
+          <a:prstGeom prst="rect">
+            <a:avLst/>
+          </a:prstGeom>
+          <a:noFill/>
+          <a:ln/>
+        </p:spPr>
+        <p:txBody>
+          <a:bodyPr wrap="square" lIns="0" tIns="0" rIns="0" bIns="0" rtlCol="0" anchor="ctr"/>
+          <a:lstStyle/>
+          <a:p>
+            <a:pPr algn="r" indent="0" marL="0">
+              <a:buNone/>
+            </a:pPr>
+            <a:r>
+              <a:rPr lang="en-US" sz="1600" dirty="0">
+                <a:solidFill>
+                  <a:srgbClr val="A3C1AD"/>
+                </a:solidFill>
+                <a:latin typeface="Georgia" pitchFamily="34" charset="0"/>
+                <a:ea typeface="Georgia" pitchFamily="34" charset="-122"/>
+                <a:cs typeface="Georgia" pitchFamily="34" charset="-120"/>
+              </a:rPr>
+              <a:t>03</a:t>
+            </a:r>
+            <a:endParaRPr lang="en-US" sz="1600" dirty="0"/>
           </a:p>
         </p:txBody>
       </p:sp>
@@ -6185,7 +8228,7 @@
                 <a:ea typeface="Georgia" pitchFamily="34" charset="-122"/>
                 <a:cs typeface="Georgia" pitchFamily="34" charset="-120"/>
               </a:rPr>
-              <a:t>03</a:t>
+              <a:t>04</a:t>
             </a:r>
             <a:endParaRPr lang="en-US" sz="1600" dirty="0"/>
           </a:p>
@@ -6332,24 +8375,27 @@
         </p:nvSpPr>
         <p:spPr>
           <a:xfrm>
-            <a:off x="822960" y="1051560"/>
-            <a:ext cx="10543032" cy="822960"/>
-          </a:xfrm>
-          <a:prstGeom prst="rect">
-            <a:avLst/>
-          </a:prstGeom>
-          <a:noFill/>
-          <a:ln/>
-        </p:spPr>
-        <p:txBody>
-          <a:bodyPr wrap="square" lIns="0" tIns="0" rIns="0" bIns="0" rtlCol="0" anchor="ctr"/>
+            <a:off x="822960" y="1005840"/>
+            <a:ext cx="6309360" cy="1280160"/>
+          </a:xfrm>
+          <a:prstGeom prst="rect">
+            <a:avLst/>
+          </a:prstGeom>
+          <a:noFill/>
+          <a:ln/>
+        </p:spPr>
+        <p:txBody>
+          <a:bodyPr wrap="square" lIns="0" tIns="0" rIns="0" bIns="0" rtlCol="0" anchor="t"/>
           <a:lstStyle/>
           <a:p>
             <a:pPr indent="0" marL="0">
-              <a:buNone/>
-            </a:pPr>
-            <a:r>
-              <a:rPr lang="en-US" sz="3400" dirty="0">
+              <a:lnSpc>
+                <a:spcPts val="3400"/>
+              </a:lnSpc>
+              <a:buNone/>
+            </a:pPr>
+            <a:r>
+              <a:rPr lang="en-US" sz="2800" dirty="0">
                 <a:solidFill>
                   <a:srgbClr val="24313F"/>
                 </a:solidFill>
@@ -6357,9 +8403,29 @@
                 <a:ea typeface="Georgia" pitchFamily="34" charset="-122"/>
                 <a:cs typeface="Georgia" pitchFamily="34" charset="-120"/>
               </a:rPr>
-              <a:t>If your two sentences could swap places</a:t>
-            </a:r>
-            <a:endParaRPr lang="en-US" sz="3400" dirty="0"/>
+              <a:t>If your two sentences</a:t>
+            </a:r>
+            <a:endParaRPr lang="en-US" sz="2800" dirty="0"/>
+          </a:p>
+          <a:p>
+            <a:pPr indent="0" marL="0">
+              <a:lnSpc>
+                <a:spcPts val="3400"/>
+              </a:lnSpc>
+              <a:buNone/>
+            </a:pPr>
+            <a:r>
+              <a:rPr lang="en-US" sz="2800" dirty="0">
+                <a:solidFill>
+                  <a:srgbClr val="24313F"/>
+                </a:solidFill>
+                <a:latin typeface="Georgia" pitchFamily="34" charset="0"/>
+                <a:ea typeface="Georgia" pitchFamily="34" charset="-122"/>
+                <a:cs typeface="Georgia" pitchFamily="34" charset="-120"/>
+              </a:rPr>
+              <a:t>could swap places</a:t>
+            </a:r>
+            <a:endParaRPr lang="en-US" sz="2800" dirty="0"/>
           </a:p>
         </p:txBody>
       </p:sp>
@@ -6371,8 +8437,8 @@
         </p:nvSpPr>
         <p:spPr>
           <a:xfrm>
-            <a:off x="822960" y="2103120"/>
-            <a:ext cx="10543032" cy="1371600"/>
+            <a:off x="822960" y="2468880"/>
+            <a:ext cx="6309360" cy="1234440"/>
           </a:xfrm>
           <a:prstGeom prst="rect">
             <a:avLst/>
@@ -6391,8 +8457,8 @@
         </p:nvSpPr>
         <p:spPr>
           <a:xfrm>
-            <a:off x="1143000" y="2240280"/>
-            <a:ext cx="9902952" cy="1097280"/>
+            <a:off x="1051560" y="2560320"/>
+            <a:ext cx="5852160" cy="1005840"/>
           </a:xfrm>
           <a:prstGeom prst="rect">
             <a:avLst/>
@@ -6406,12 +8472,12 @@
           <a:p>
             <a:pPr indent="0" marL="0">
               <a:lnSpc>
-                <a:spcPts val="2800"/>
+                <a:spcPts val="2200"/>
               </a:lnSpc>
               <a:buNone/>
             </a:pPr>
             <a:r>
-              <a:rPr lang="en-US" sz="2100" i="1" dirty="0">
+              <a:rPr lang="en-US" sz="1650" i="1" dirty="0">
                 <a:solidFill>
                   <a:srgbClr val="7A7F72"/>
                 </a:solidFill>
@@ -6421,7 +8487,7 @@
               </a:rPr>
               <a:t>The low angle makes him look powerful, which shows he has power in the scene.</a:t>
             </a:r>
-            <a:endParaRPr lang="en-US" sz="2100" dirty="0"/>
+            <a:endParaRPr lang="en-US" sz="1650" dirty="0"/>
           </a:p>
         </p:txBody>
       </p:sp>
@@ -6433,24 +8499,27 @@
         </p:nvSpPr>
         <p:spPr>
           <a:xfrm>
-            <a:off x="822960" y="3611880"/>
-            <a:ext cx="10424160" cy="457200"/>
-          </a:xfrm>
-          <a:prstGeom prst="rect">
-            <a:avLst/>
-          </a:prstGeom>
-          <a:noFill/>
-          <a:ln/>
-        </p:spPr>
-        <p:txBody>
-          <a:bodyPr wrap="square" lIns="0" tIns="0" rIns="0" bIns="0" rtlCol="0" anchor="ctr"/>
+            <a:off x="822960" y="3840480"/>
+            <a:ext cx="6309360" cy="502920"/>
+          </a:xfrm>
+          <a:prstGeom prst="rect">
+            <a:avLst/>
+          </a:prstGeom>
+          <a:noFill/>
+          <a:ln/>
+        </p:spPr>
+        <p:txBody>
+          <a:bodyPr wrap="square" lIns="0" tIns="0" rIns="0" bIns="0" rtlCol="0" anchor="t"/>
           <a:lstStyle/>
           <a:p>
             <a:pPr indent="0" marL="0">
-              <a:buNone/>
-            </a:pPr>
-            <a:r>
-              <a:rPr lang="en-US" sz="1250" i="1" dirty="0">
+              <a:lnSpc>
+                <a:spcPts val="1500"/>
+              </a:lnSpc>
+              <a:buNone/>
+            </a:pPr>
+            <a:r>
+              <a:rPr lang="en-US" sz="1150" i="1" dirty="0">
                 <a:solidFill>
                   <a:srgbClr val="7A7F72"/>
                 </a:solidFill>
@@ -6460,7 +8529,7 @@
               </a:rPr>
               <a:t>One move, written twice. Nothing after the comma is new, and mid-band scripts are full of it.</a:t>
             </a:r>
-            <a:endParaRPr lang="en-US" sz="1250" dirty="0"/>
+            <a:endParaRPr lang="en-US" sz="1150" dirty="0"/>
           </a:p>
         </p:txBody>
       </p:sp>
@@ -6472,7 +8541,7 @@
         </p:nvSpPr>
         <p:spPr>
           <a:xfrm>
-            <a:off x="822960" y="4251960"/>
+            <a:off x="822960" y="4526280"/>
             <a:ext cx="914400" cy="0"/>
           </a:xfrm>
           <a:prstGeom prst="line">
@@ -6495,8 +8564,8 @@
         </p:nvSpPr>
         <p:spPr>
           <a:xfrm>
-            <a:off x="822960" y="4434840"/>
-            <a:ext cx="10424160" cy="1554480"/>
+            <a:off x="822960" y="4709160"/>
+            <a:ext cx="6309360" cy="1188720"/>
           </a:xfrm>
           <a:prstGeom prst="rect">
             <a:avLst/>
@@ -6510,12 +8579,12 @@
           <a:p>
             <a:pPr indent="0" marL="0">
               <a:lnSpc>
-                <a:spcPts val="2500"/>
+                <a:spcPts val="2100"/>
               </a:lnSpc>
               <a:buNone/>
             </a:pPr>
             <a:r>
-              <a:rPr lang="en-US" sz="1800" dirty="0">
+              <a:rPr lang="en-US" sz="1550" dirty="0">
                 <a:solidFill>
                   <a:srgbClr val="24313F"/>
                 </a:solidFill>
@@ -6523,15 +8592,81 @@
                 <a:ea typeface="Georgia" pitchFamily="34" charset="-122"/>
                 <a:cs typeface="Georgia" pitchFamily="34" charset="-120"/>
               </a:rPr>
-              <a:t>Effect is what it does to the viewer. Meaning is what it therefore says about the person, place or event being represented. The viewer is placed beneath him, so institutional power is constructed as a physical fact of the room rather than something argued for.</a:t>
-            </a:r>
-            <a:endParaRPr lang="en-US" sz="1800" dirty="0"/>
-          </a:p>
-        </p:txBody>
-      </p:sp>
-      <p:sp>
-        <p:nvSpPr>
-          <p:cNvPr id="11" name="Shape 9"/>
+              <a:t>Effect is what it does to the viewer. Meaning is what it therefore says about the person, place or event being represented.</a:t>
+            </a:r>
+            <a:endParaRPr lang="en-US" sz="1550" dirty="0"/>
+          </a:p>
+        </p:txBody>
+      </p:sp>
+      <p:pic>
+        <p:nvPicPr>
+          <p:cNvPr id="11" name="Image 0" descr="/Users/dogan/Documents/Vaults/Courses/wiki/classes/media-studies/decks/_build/img/crops/kane-rally_a935.jpg">    </p:cNvPr>
+          <p:cNvPicPr>
+            <a:picLocks noChangeAspect="1"/>
+          </p:cNvPicPr>
+          <p:nvPr/>
+        </p:nvPicPr>
+        <p:blipFill>
+          <a:blip r:embed="rId1"/>
+          <a:stretch>
+            <a:fillRect/>
+          </a:stretch>
+        </p:blipFill>
+        <p:spPr>
+          <a:xfrm>
+            <a:off x="7452360" y="1097280"/>
+            <a:ext cx="3931920" cy="4206240"/>
+          </a:xfrm>
+          <a:prstGeom prst="rect">
+            <a:avLst/>
+          </a:prstGeom>
+        </p:spPr>
+      </p:pic>
+      <p:sp>
+        <p:nvSpPr>
+          <p:cNvPr id="12" name="Text 9"/>
+          <p:cNvSpPr/>
+          <p:nvPr/>
+        </p:nvSpPr>
+        <p:spPr>
+          <a:xfrm>
+            <a:off x="7452360" y="5349240"/>
+            <a:ext cx="3931920" cy="457200"/>
+          </a:xfrm>
+          <a:prstGeom prst="rect">
+            <a:avLst/>
+          </a:prstGeom>
+          <a:noFill/>
+          <a:ln/>
+        </p:spPr>
+        <p:txBody>
+          <a:bodyPr wrap="square" lIns="0" tIns="0" rIns="0" bIns="0" rtlCol="0" anchor="t"/>
+          <a:lstStyle/>
+          <a:p>
+            <a:pPr algn="ctr" indent="0" marL="0">
+              <a:lnSpc>
+                <a:spcPts val="1300"/>
+              </a:lnSpc>
+              <a:buNone/>
+            </a:pPr>
+            <a:r>
+              <a:rPr lang="en-US" sz="1000" dirty="0">
+                <a:solidFill>
+                  <a:srgbClr val="7A7F72"/>
+                </a:solidFill>
+                <a:latin typeface="Arial" pitchFamily="34" charset="0"/>
+                <a:ea typeface="Arial" pitchFamily="34" charset="-122"/>
+                <a:cs typeface="Arial" pitchFamily="34" charset="-120"/>
+              </a:rPr>
+              <a:t>Citizen Kane (1941): the low angle the sentences argue about</a:t>
+            </a:r>
+            <a:endParaRPr lang="en-US" sz="1000" dirty="0"/>
+          </a:p>
+        </p:txBody>
+      </p:sp>
+      <p:sp>
+        <p:nvSpPr>
+          <p:cNvPr id="13" name="Shape 10"/>
           <p:cNvSpPr/>
           <p:nvPr/>
         </p:nvSpPr>
@@ -6554,7 +8689,7 @@
       </p:sp>
       <p:sp>
         <p:nvSpPr>
-          <p:cNvPr id="12" name="Text 10"/>
+          <p:cNvPr id="14" name="Text 11"/>
           <p:cNvSpPr/>
           <p:nvPr/>
         </p:nvSpPr>
@@ -6593,7 +8728,7 @@
       </p:sp>
       <p:sp>
         <p:nvSpPr>
-          <p:cNvPr id="13" name="Text 11"/>
+          <p:cNvPr id="15" name="Text 12"/>
           <p:cNvSpPr/>
           <p:nvPr/>
         </p:nvSpPr>
@@ -6624,7 +8759,7 @@
                 <a:ea typeface="Georgia" pitchFamily="34" charset="-122"/>
                 <a:cs typeface="Georgia" pitchFamily="34" charset="-120"/>
               </a:rPr>
-              <a:t>04</a:t>
+              <a:t>05</a:t>
             </a:r>
             <a:endParaRPr lang="en-US" sz="1600" dirty="0"/>
           </a:p>
@@ -6695,7 +8830,7 @@
                 <a:ea typeface="Arial" pitchFamily="34" charset="-122"/>
                 <a:cs typeface="Arial" pitchFamily="34" charset="-120"/>
               </a:rPr>
-              <a:t>THE SCREENING PROTOCOL</a:t>
+              <a:t>THE WORKED EXAMPLE</a:t>
             </a:r>
             <a:endParaRPr lang="en-US" sz="1100" dirty="0"/>
           </a:p>
@@ -6734,7 +8869,7 @@
                 <a:ea typeface="Arial" pitchFamily="34" charset="-122"/>
                 <a:cs typeface="Arial" pitchFamily="34" charset="-120"/>
               </a:rPr>
-              <a:t>THE EXAM'S OWN RUBRIC</a:t>
+              <a:t>PEEM, ALL FOUR MOVES, ONE PARAGRAPH</a:t>
             </a:r>
             <a:endParaRPr lang="en-US" sz="1100" dirty="0"/>
           </a:p>
@@ -6771,7 +8906,7 @@
         </p:nvSpPr>
         <p:spPr>
           <a:xfrm>
-            <a:off x="822960" y="932688"/>
+            <a:off x="822960" y="960120"/>
             <a:ext cx="10543032" cy="640080"/>
           </a:xfrm>
           <a:prstGeom prst="rect">
@@ -6796,7 +8931,7 @@
                 <a:ea typeface="Georgia" pitchFamily="34" charset="-122"/>
                 <a:cs typeface="Georgia" pitchFamily="34" charset="-120"/>
               </a:rPr>
-              <a:t>Four viewings, one extract</a:t>
+              <a:t>What good looks like</a:t>
             </a:r>
             <a:endParaRPr lang="en-US" sz="3200" dirty="0"/>
           </a:p>
@@ -6810,19 +8945,16 @@
         </p:nvSpPr>
         <p:spPr>
           <a:xfrm>
-            <a:off x="2140839" y="3200400"/>
-            <a:ext cx="7907274" cy="0"/>
-          </a:xfrm>
-          <a:prstGeom prst="line">
-            <a:avLst/>
-          </a:prstGeom>
-          <a:noFill/>
-          <a:ln w="19050">
-            <a:solidFill>
-              <a:srgbClr val="8AA394"/>
-            </a:solidFill>
-            <a:prstDash val="solid"/>
-          </a:ln>
+            <a:off x="822960" y="1828800"/>
+            <a:ext cx="10543032" cy="2377440"/>
+          </a:xfrm>
+          <a:prstGeom prst="rect">
+            <a:avLst/>
+          </a:prstGeom>
+          <a:solidFill>
+            <a:srgbClr val="E8EFE7"/>
+          </a:solidFill>
+          <a:ln/>
         </p:spPr>
       </p:sp>
       <p:sp>
@@ -6833,36 +8965,37 @@
         </p:nvSpPr>
         <p:spPr>
           <a:xfrm>
-            <a:off x="1866519" y="2926080"/>
-            <a:ext cx="548640" cy="548640"/>
-          </a:xfrm>
-          <a:prstGeom prst="ellipse">
-            <a:avLst/>
-          </a:prstGeom>
-          <a:solidFill>
-            <a:srgbClr val="4A6B5D"/>
-          </a:solidFill>
-          <a:ln/>
-        </p:spPr>
-        <p:txBody>
-          <a:bodyPr wrap="square" lIns="0" tIns="0" rIns="0" bIns="0" rtlCol="0" anchor="ctr"/>
-          <a:lstStyle/>
-          <a:p>
-            <a:pPr algn="ctr" indent="0" marL="0">
-              <a:buNone/>
-            </a:pPr>
-            <a:r>
-              <a:rPr lang="en-US" sz="2200" dirty="0">
-                <a:solidFill>
-                  <a:srgbClr val="FAF8F1"/>
+            <a:off x="1143000" y="2011680"/>
+            <a:ext cx="9902952" cy="2011680"/>
+          </a:xfrm>
+          <a:prstGeom prst="rect">
+            <a:avLst/>
+          </a:prstGeom>
+          <a:noFill/>
+          <a:ln/>
+        </p:spPr>
+        <p:txBody>
+          <a:bodyPr wrap="square" lIns="0" tIns="0" rIns="0" bIns="0" rtlCol="0" anchor="ctr"/>
+          <a:lstStyle/>
+          <a:p>
+            <a:pPr indent="0" marL="0">
+              <a:lnSpc>
+                <a:spcPts val="2800"/>
+              </a:lnSpc>
+              <a:buNone/>
+            </a:pPr>
+            <a:r>
+              <a:rPr lang="en-US" sz="1900" dirty="0">
+                <a:solidFill>
+                  <a:srgbClr val="24313F"/>
                 </a:solidFill>
                 <a:latin typeface="Georgia" pitchFamily="34" charset="0"/>
                 <a:ea typeface="Georgia" pitchFamily="34" charset="-122"/>
                 <a:cs typeface="Georgia" pitchFamily="34" charset="-120"/>
               </a:rPr>
-              <a:t>1</a:t>
-            </a:r>
-            <a:endParaRPr lang="en-US" sz="2200" dirty="0"/>
+              <a:t>The extract repeatedly frames the detective in low-angle mid-shots [Evidence] to construct his institutional authority [Point]: the viewer is positioned beneath him, so his dominance registers as a physical fact of the room [Effect], and the police are thereby represented as a power that need not argue for itself [Meaning].</a:t>
+            </a:r>
+            <a:endParaRPr lang="en-US" sz="1900" dirty="0"/>
           </a:p>
         </p:txBody>
       </p:sp>
@@ -6874,604 +9007,43 @@
         </p:nvSpPr>
         <p:spPr>
           <a:xfrm>
-            <a:off x="932688" y="2240280"/>
-            <a:ext cx="2416302" cy="457200"/>
-          </a:xfrm>
-          <a:prstGeom prst="rect">
-            <a:avLst/>
-          </a:prstGeom>
-          <a:noFill/>
-          <a:ln/>
-        </p:spPr>
-        <p:txBody>
-          <a:bodyPr wrap="square" lIns="0" tIns="0" rIns="0" bIns="0" rtlCol="0" anchor="b"/>
-          <a:lstStyle/>
-          <a:p>
-            <a:pPr algn="ctr" indent="0" marL="0">
-              <a:buNone/>
-            </a:pPr>
-            <a:r>
-              <a:rPr lang="en-US" sz="1800" dirty="0">
-                <a:solidFill>
-                  <a:srgbClr val="24313F"/>
+            <a:off x="822960" y="4434840"/>
+            <a:ext cx="10543032" cy="640080"/>
+          </a:xfrm>
+          <a:prstGeom prst="rect">
+            <a:avLst/>
+          </a:prstGeom>
+          <a:noFill/>
+          <a:ln/>
+        </p:spPr>
+        <p:txBody>
+          <a:bodyPr wrap="square" lIns="0" tIns="0" rIns="0" bIns="0" rtlCol="0" anchor="t"/>
+          <a:lstStyle/>
+          <a:p>
+            <a:pPr indent="0" marL="0">
+              <a:lnSpc>
+                <a:spcPts val="2100"/>
+              </a:lnSpc>
+              <a:buNone/>
+            </a:pPr>
+            <a:r>
+              <a:rPr lang="en-US" sz="1550" i="1" dirty="0">
+                <a:solidFill>
+                  <a:srgbClr val="4A6B5D"/>
                 </a:solidFill>
                 <a:latin typeface="Georgia" pitchFamily="34" charset="0"/>
                 <a:ea typeface="Georgia" pitchFamily="34" charset="-122"/>
                 <a:cs typeface="Georgia" pitchFamily="34" charset="-120"/>
               </a:rPr>
-              <a:t>First</a:t>
-            </a:r>
-            <a:endParaRPr lang="en-US" sz="1800" dirty="0"/>
-          </a:p>
-        </p:txBody>
-      </p:sp>
-      <p:sp>
-        <p:nvSpPr>
-          <p:cNvPr id="9" name="Text 7"/>
-          <p:cNvSpPr/>
-          <p:nvPr/>
-        </p:nvSpPr>
-        <p:spPr>
-          <a:xfrm>
-            <a:off x="932688" y="3611880"/>
-            <a:ext cx="2416302" cy="320040"/>
-          </a:xfrm>
-          <a:prstGeom prst="rect">
-            <a:avLst/>
-          </a:prstGeom>
-          <a:noFill/>
-          <a:ln/>
-        </p:spPr>
-        <p:txBody>
-          <a:bodyPr wrap="square" lIns="0" tIns="0" rIns="0" bIns="0" rtlCol="0" anchor="ctr"/>
-          <a:lstStyle/>
-          <a:p>
-            <a:pPr algn="ctr" indent="0" marL="0">
-              <a:buNone/>
-            </a:pPr>
-            <a:r>
-              <a:rPr lang="en-US" sz="950" b="1" spc="50" kern="0" dirty="0">
-                <a:solidFill>
-                  <a:srgbClr val="4A6B5D"/>
-                </a:solidFill>
-                <a:latin typeface="Arial" pitchFamily="34" charset="0"/>
-                <a:ea typeface="Arial" pitchFamily="34" charset="-122"/>
-                <a:cs typeface="Arial" pitchFamily="34" charset="-120"/>
-              </a:rPr>
-              <a:t>JUST WATCH</a:t>
-            </a:r>
-            <a:endParaRPr lang="en-US" sz="950" dirty="0"/>
-          </a:p>
-        </p:txBody>
-      </p:sp>
-      <p:sp>
-        <p:nvSpPr>
-          <p:cNvPr id="10" name="Text 8"/>
-          <p:cNvSpPr/>
-          <p:nvPr/>
-        </p:nvSpPr>
-        <p:spPr>
-          <a:xfrm>
-            <a:off x="969264" y="3977640"/>
-            <a:ext cx="2343150" cy="1188720"/>
-          </a:xfrm>
-          <a:prstGeom prst="rect">
-            <a:avLst/>
-          </a:prstGeom>
-          <a:noFill/>
-          <a:ln/>
-        </p:spPr>
-        <p:txBody>
-          <a:bodyPr wrap="square" lIns="0" tIns="0" rIns="0" bIns="0" rtlCol="0" anchor="t"/>
-          <a:lstStyle/>
-          <a:p>
-            <a:pPr algn="ctr" indent="0" marL="0">
-              <a:lnSpc>
-                <a:spcPts val="1600"/>
-              </a:lnSpc>
-              <a:buNone/>
-            </a:pPr>
-            <a:r>
-              <a:rPr lang="en-US" sz="1250" dirty="0">
-                <a:solidFill>
-                  <a:srgbClr val="24313F"/>
-                </a:solidFill>
-                <a:latin typeface="Georgia" pitchFamily="34" charset="0"/>
-                <a:ea typeface="Georgia" pitchFamily="34" charset="-122"/>
-                <a:cs typeface="Georgia" pitchFamily="34" charset="-120"/>
-              </a:rPr>
-              <a:t>No notes. See the whole thing before you dissect it.</a:t>
-            </a:r>
-            <a:endParaRPr lang="en-US" sz="1250" dirty="0"/>
-          </a:p>
-        </p:txBody>
-      </p:sp>
-      <p:sp>
-        <p:nvSpPr>
-          <p:cNvPr id="11" name="Text 9"/>
-          <p:cNvSpPr/>
-          <p:nvPr/>
-        </p:nvSpPr>
-        <p:spPr>
-          <a:xfrm>
-            <a:off x="4502277" y="2926080"/>
-            <a:ext cx="548640" cy="548640"/>
-          </a:xfrm>
-          <a:prstGeom prst="ellipse">
-            <a:avLst/>
-          </a:prstGeom>
-          <a:solidFill>
-            <a:srgbClr val="4A6B5D"/>
-          </a:solidFill>
-          <a:ln/>
-        </p:spPr>
-        <p:txBody>
-          <a:bodyPr wrap="square" lIns="0" tIns="0" rIns="0" bIns="0" rtlCol="0" anchor="ctr"/>
-          <a:lstStyle/>
-          <a:p>
-            <a:pPr algn="ctr" indent="0" marL="0">
-              <a:buNone/>
-            </a:pPr>
-            <a:r>
-              <a:rPr lang="en-US" sz="2200" dirty="0">
-                <a:solidFill>
-                  <a:srgbClr val="FAF8F1"/>
-                </a:solidFill>
-                <a:latin typeface="Georgia" pitchFamily="34" charset="0"/>
-                <a:ea typeface="Georgia" pitchFamily="34" charset="-122"/>
-                <a:cs typeface="Georgia" pitchFamily="34" charset="-120"/>
-              </a:rPr>
-              <a:t>2</a:t>
-            </a:r>
-            <a:endParaRPr lang="en-US" sz="2200" dirty="0"/>
-          </a:p>
-        </p:txBody>
-      </p:sp>
-      <p:sp>
-        <p:nvSpPr>
-          <p:cNvPr id="12" name="Text 10"/>
-          <p:cNvSpPr/>
-          <p:nvPr/>
-        </p:nvSpPr>
-        <p:spPr>
-          <a:xfrm>
-            <a:off x="3568446" y="2240280"/>
-            <a:ext cx="2416302" cy="457200"/>
-          </a:xfrm>
-          <a:prstGeom prst="rect">
-            <a:avLst/>
-          </a:prstGeom>
-          <a:noFill/>
-          <a:ln/>
-        </p:spPr>
-        <p:txBody>
-          <a:bodyPr wrap="square" lIns="0" tIns="0" rIns="0" bIns="0" rtlCol="0" anchor="b"/>
-          <a:lstStyle/>
-          <a:p>
-            <a:pPr algn="ctr" indent="0" marL="0">
-              <a:buNone/>
-            </a:pPr>
-            <a:r>
-              <a:rPr lang="en-US" sz="1800" dirty="0">
-                <a:solidFill>
-                  <a:srgbClr val="24313F"/>
-                </a:solidFill>
-                <a:latin typeface="Georgia" pitchFamily="34" charset="0"/>
-                <a:ea typeface="Georgia" pitchFamily="34" charset="-122"/>
-                <a:cs typeface="Georgia" pitchFamily="34" charset="-120"/>
-              </a:rPr>
-              <a:t>Second</a:t>
-            </a:r>
-            <a:endParaRPr lang="en-US" sz="1800" dirty="0"/>
-          </a:p>
-        </p:txBody>
-      </p:sp>
-      <p:sp>
-        <p:nvSpPr>
-          <p:cNvPr id="13" name="Text 11"/>
-          <p:cNvSpPr/>
-          <p:nvPr/>
-        </p:nvSpPr>
-        <p:spPr>
-          <a:xfrm>
-            <a:off x="3568446" y="3611880"/>
-            <a:ext cx="2416302" cy="320040"/>
-          </a:xfrm>
-          <a:prstGeom prst="rect">
-            <a:avLst/>
-          </a:prstGeom>
-          <a:noFill/>
-          <a:ln/>
-        </p:spPr>
-        <p:txBody>
-          <a:bodyPr wrap="square" lIns="0" tIns="0" rIns="0" bIns="0" rtlCol="0" anchor="ctr"/>
-          <a:lstStyle/>
-          <a:p>
-            <a:pPr algn="ctr" indent="0" marL="0">
-              <a:buNone/>
-            </a:pPr>
-            <a:r>
-              <a:rPr lang="en-US" sz="950" b="1" spc="50" kern="0" dirty="0">
-                <a:solidFill>
-                  <a:srgbClr val="4A6B5D"/>
-                </a:solidFill>
-                <a:latin typeface="Arial" pitchFamily="34" charset="0"/>
-                <a:ea typeface="Arial" pitchFamily="34" charset="-122"/>
-                <a:cs typeface="Arial" pitchFamily="34" charset="-120"/>
-              </a:rPr>
-              <a:t>CAMERA &amp; EDITING</a:t>
-            </a:r>
-            <a:endParaRPr lang="en-US" sz="950" dirty="0"/>
-          </a:p>
-        </p:txBody>
-      </p:sp>
-      <p:sp>
-        <p:nvSpPr>
-          <p:cNvPr id="14" name="Text 12"/>
-          <p:cNvSpPr/>
-          <p:nvPr/>
-        </p:nvSpPr>
-        <p:spPr>
-          <a:xfrm>
-            <a:off x="3605022" y="3977640"/>
-            <a:ext cx="2343150" cy="1188720"/>
-          </a:xfrm>
-          <a:prstGeom prst="rect">
-            <a:avLst/>
-          </a:prstGeom>
-          <a:noFill/>
-          <a:ln/>
-        </p:spPr>
-        <p:txBody>
-          <a:bodyPr wrap="square" lIns="0" tIns="0" rIns="0" bIns="0" rtlCol="0" anchor="t"/>
-          <a:lstStyle/>
-          <a:p>
-            <a:pPr algn="ctr" indent="0" marL="0">
-              <a:lnSpc>
-                <a:spcPts val="1600"/>
-              </a:lnSpc>
-              <a:buNone/>
-            </a:pPr>
-            <a:r>
-              <a:rPr lang="en-US" sz="1250" dirty="0">
-                <a:solidFill>
-                  <a:srgbClr val="24313F"/>
-                </a:solidFill>
-                <a:latin typeface="Georgia" pitchFamily="34" charset="0"/>
-                <a:ea typeface="Georgia" pitchFamily="34" charset="-122"/>
-                <a:cs typeface="Georgia" pitchFamily="34" charset="-120"/>
-              </a:rPr>
-              <a:t>Track the technical codes: shots, angles, movement, cuts, pace.</a:t>
-            </a:r>
-            <a:endParaRPr lang="en-US" sz="1250" dirty="0"/>
-          </a:p>
-        </p:txBody>
-      </p:sp>
-      <p:sp>
-        <p:nvSpPr>
-          <p:cNvPr id="15" name="Text 13"/>
-          <p:cNvSpPr/>
-          <p:nvPr/>
-        </p:nvSpPr>
-        <p:spPr>
-          <a:xfrm>
-            <a:off x="7138035" y="2926080"/>
-            <a:ext cx="548640" cy="548640"/>
-          </a:xfrm>
-          <a:prstGeom prst="ellipse">
-            <a:avLst/>
-          </a:prstGeom>
-          <a:solidFill>
-            <a:srgbClr val="4A6B5D"/>
-          </a:solidFill>
-          <a:ln/>
-        </p:spPr>
-        <p:txBody>
-          <a:bodyPr wrap="square" lIns="0" tIns="0" rIns="0" bIns="0" rtlCol="0" anchor="ctr"/>
-          <a:lstStyle/>
-          <a:p>
-            <a:pPr algn="ctr" indent="0" marL="0">
-              <a:buNone/>
-            </a:pPr>
-            <a:r>
-              <a:rPr lang="en-US" sz="2200" dirty="0">
-                <a:solidFill>
-                  <a:srgbClr val="FAF8F1"/>
-                </a:solidFill>
-                <a:latin typeface="Georgia" pitchFamily="34" charset="0"/>
-                <a:ea typeface="Georgia" pitchFamily="34" charset="-122"/>
-                <a:cs typeface="Georgia" pitchFamily="34" charset="-120"/>
-              </a:rPr>
-              <a:t>3</a:t>
-            </a:r>
-            <a:endParaRPr lang="en-US" sz="2200" dirty="0"/>
-          </a:p>
-        </p:txBody>
-      </p:sp>
-      <p:sp>
-        <p:nvSpPr>
-          <p:cNvPr id="16" name="Text 14"/>
-          <p:cNvSpPr/>
-          <p:nvPr/>
-        </p:nvSpPr>
-        <p:spPr>
-          <a:xfrm>
-            <a:off x="6204204" y="2240280"/>
-            <a:ext cx="2416302" cy="457200"/>
-          </a:xfrm>
-          <a:prstGeom prst="rect">
-            <a:avLst/>
-          </a:prstGeom>
-          <a:noFill/>
-          <a:ln/>
-        </p:spPr>
-        <p:txBody>
-          <a:bodyPr wrap="square" lIns="0" tIns="0" rIns="0" bIns="0" rtlCol="0" anchor="b"/>
-          <a:lstStyle/>
-          <a:p>
-            <a:pPr algn="ctr" indent="0" marL="0">
-              <a:buNone/>
-            </a:pPr>
-            <a:r>
-              <a:rPr lang="en-US" sz="1800" dirty="0">
-                <a:solidFill>
-                  <a:srgbClr val="24313F"/>
-                </a:solidFill>
-                <a:latin typeface="Georgia" pitchFamily="34" charset="0"/>
-                <a:ea typeface="Georgia" pitchFamily="34" charset="-122"/>
-                <a:cs typeface="Georgia" pitchFamily="34" charset="-120"/>
-              </a:rPr>
-              <a:t>Third</a:t>
-            </a:r>
-            <a:endParaRPr lang="en-US" sz="1800" dirty="0"/>
-          </a:p>
-        </p:txBody>
-      </p:sp>
-      <p:sp>
-        <p:nvSpPr>
-          <p:cNvPr id="17" name="Text 15"/>
-          <p:cNvSpPr/>
-          <p:nvPr/>
-        </p:nvSpPr>
-        <p:spPr>
-          <a:xfrm>
-            <a:off x="6204204" y="3611880"/>
-            <a:ext cx="2416302" cy="320040"/>
-          </a:xfrm>
-          <a:prstGeom prst="rect">
-            <a:avLst/>
-          </a:prstGeom>
-          <a:noFill/>
-          <a:ln/>
-        </p:spPr>
-        <p:txBody>
-          <a:bodyPr wrap="square" lIns="0" tIns="0" rIns="0" bIns="0" rtlCol="0" anchor="ctr"/>
-          <a:lstStyle/>
-          <a:p>
-            <a:pPr algn="ctr" indent="0" marL="0">
-              <a:buNone/>
-            </a:pPr>
-            <a:r>
-              <a:rPr lang="en-US" sz="950" b="1" spc="50" kern="0" dirty="0">
-                <a:solidFill>
-                  <a:srgbClr val="4A6B5D"/>
-                </a:solidFill>
-                <a:latin typeface="Arial" pitchFamily="34" charset="0"/>
-                <a:ea typeface="Arial" pitchFamily="34" charset="-122"/>
-                <a:cs typeface="Arial" pitchFamily="34" charset="-120"/>
-              </a:rPr>
-              <a:t>SOUND &amp; MISE-EN-SCENE</a:t>
-            </a:r>
-            <a:endParaRPr lang="en-US" sz="950" dirty="0"/>
-          </a:p>
-        </p:txBody>
-      </p:sp>
-      <p:sp>
-        <p:nvSpPr>
-          <p:cNvPr id="18" name="Text 16"/>
-          <p:cNvSpPr/>
-          <p:nvPr/>
-        </p:nvSpPr>
-        <p:spPr>
-          <a:xfrm>
-            <a:off x="6240780" y="3977640"/>
-            <a:ext cx="2343150" cy="1188720"/>
-          </a:xfrm>
-          <a:prstGeom prst="rect">
-            <a:avLst/>
-          </a:prstGeom>
-          <a:noFill/>
-          <a:ln/>
-        </p:spPr>
-        <p:txBody>
-          <a:bodyPr wrap="square" lIns="0" tIns="0" rIns="0" bIns="0" rtlCol="0" anchor="t"/>
-          <a:lstStyle/>
-          <a:p>
-            <a:pPr algn="ctr" indent="0" marL="0">
-              <a:lnSpc>
-                <a:spcPts val="1600"/>
-              </a:lnSpc>
-              <a:buNone/>
-            </a:pPr>
-            <a:r>
-              <a:rPr lang="en-US" sz="1250" dirty="0">
-                <a:solidFill>
-                  <a:srgbClr val="24313F"/>
-                </a:solidFill>
-                <a:latin typeface="Georgia" pitchFamily="34" charset="0"/>
-                <a:ea typeface="Georgia" pitchFamily="34" charset="-122"/>
-                <a:cs typeface="Georgia" pitchFamily="34" charset="-120"/>
-              </a:rPr>
-              <a:t>Music, silence, diegetic sound; setting, props, dress, gesture.</a:t>
-            </a:r>
-            <a:endParaRPr lang="en-US" sz="1250" dirty="0"/>
-          </a:p>
-        </p:txBody>
-      </p:sp>
-      <p:sp>
-        <p:nvSpPr>
-          <p:cNvPr id="19" name="Text 17"/>
-          <p:cNvSpPr/>
-          <p:nvPr/>
-        </p:nvSpPr>
-        <p:spPr>
-          <a:xfrm>
-            <a:off x="9773793" y="2926080"/>
-            <a:ext cx="548640" cy="548640"/>
-          </a:xfrm>
-          <a:prstGeom prst="ellipse">
-            <a:avLst/>
-          </a:prstGeom>
-          <a:solidFill>
-            <a:srgbClr val="4A6B5D"/>
-          </a:solidFill>
-          <a:ln/>
-        </p:spPr>
-        <p:txBody>
-          <a:bodyPr wrap="square" lIns="0" tIns="0" rIns="0" bIns="0" rtlCol="0" anchor="ctr"/>
-          <a:lstStyle/>
-          <a:p>
-            <a:pPr algn="ctr" indent="0" marL="0">
-              <a:buNone/>
-            </a:pPr>
-            <a:r>
-              <a:rPr lang="en-US" sz="2200" dirty="0">
-                <a:solidFill>
-                  <a:srgbClr val="FAF8F1"/>
-                </a:solidFill>
-                <a:latin typeface="Georgia" pitchFamily="34" charset="0"/>
-                <a:ea typeface="Georgia" pitchFamily="34" charset="-122"/>
-                <a:cs typeface="Georgia" pitchFamily="34" charset="-120"/>
-              </a:rPr>
-              <a:t>4</a:t>
-            </a:r>
-            <a:endParaRPr lang="en-US" sz="2200" dirty="0"/>
-          </a:p>
-        </p:txBody>
-      </p:sp>
-      <p:sp>
-        <p:nvSpPr>
-          <p:cNvPr id="20" name="Text 18"/>
-          <p:cNvSpPr/>
-          <p:nvPr/>
-        </p:nvSpPr>
-        <p:spPr>
-          <a:xfrm>
-            <a:off x="8839962" y="2240280"/>
-            <a:ext cx="2416302" cy="457200"/>
-          </a:xfrm>
-          <a:prstGeom prst="rect">
-            <a:avLst/>
-          </a:prstGeom>
-          <a:noFill/>
-          <a:ln/>
-        </p:spPr>
-        <p:txBody>
-          <a:bodyPr wrap="square" lIns="0" tIns="0" rIns="0" bIns="0" rtlCol="0" anchor="b"/>
-          <a:lstStyle/>
-          <a:p>
-            <a:pPr algn="ctr" indent="0" marL="0">
-              <a:buNone/>
-            </a:pPr>
-            <a:r>
-              <a:rPr lang="en-US" sz="1800" dirty="0">
-                <a:solidFill>
-                  <a:srgbClr val="24313F"/>
-                </a:solidFill>
-                <a:latin typeface="Georgia" pitchFamily="34" charset="0"/>
-                <a:ea typeface="Georgia" pitchFamily="34" charset="-122"/>
-                <a:cs typeface="Georgia" pitchFamily="34" charset="-120"/>
-              </a:rPr>
-              <a:t>Fourth</a:t>
-            </a:r>
-            <a:endParaRPr lang="en-US" sz="1800" dirty="0"/>
-          </a:p>
-        </p:txBody>
-      </p:sp>
-      <p:sp>
-        <p:nvSpPr>
-          <p:cNvPr id="21" name="Text 19"/>
-          <p:cNvSpPr/>
-          <p:nvPr/>
-        </p:nvSpPr>
-        <p:spPr>
-          <a:xfrm>
-            <a:off x="8839962" y="3611880"/>
-            <a:ext cx="2416302" cy="320040"/>
-          </a:xfrm>
-          <a:prstGeom prst="rect">
-            <a:avLst/>
-          </a:prstGeom>
-          <a:noFill/>
-          <a:ln/>
-        </p:spPr>
-        <p:txBody>
-          <a:bodyPr wrap="square" lIns="0" tIns="0" rIns="0" bIns="0" rtlCol="0" anchor="ctr"/>
-          <a:lstStyle/>
-          <a:p>
-            <a:pPr algn="ctr" indent="0" marL="0">
-              <a:buNone/>
-            </a:pPr>
-            <a:r>
-              <a:rPr lang="en-US" sz="950" b="1" spc="50" kern="0" dirty="0">
-                <a:solidFill>
-                  <a:srgbClr val="4A6B5D"/>
-                </a:solidFill>
-                <a:latin typeface="Arial" pitchFamily="34" charset="0"/>
-                <a:ea typeface="Arial" pitchFamily="34" charset="-122"/>
-                <a:cs typeface="Arial" pitchFamily="34" charset="-120"/>
-              </a:rPr>
-              <a:t>NARRATIVE &amp; MEANING</a:t>
-            </a:r>
-            <a:endParaRPr lang="en-US" sz="950" dirty="0"/>
-          </a:p>
-        </p:txBody>
-      </p:sp>
-      <p:sp>
-        <p:nvSpPr>
-          <p:cNvPr id="22" name="Text 20"/>
-          <p:cNvSpPr/>
-          <p:nvPr/>
-        </p:nvSpPr>
-        <p:spPr>
-          <a:xfrm>
-            <a:off x="8876538" y="3977640"/>
-            <a:ext cx="2343150" cy="1188720"/>
-          </a:xfrm>
-          <a:prstGeom prst="rect">
-            <a:avLst/>
-          </a:prstGeom>
-          <a:noFill/>
-          <a:ln/>
-        </p:spPr>
-        <p:txBody>
-          <a:bodyPr wrap="square" lIns="0" tIns="0" rIns="0" bIns="0" rtlCol="0" anchor="t"/>
-          <a:lstStyle/>
-          <a:p>
-            <a:pPr algn="ctr" indent="0" marL="0">
-              <a:lnSpc>
-                <a:spcPts val="1600"/>
-              </a:lnSpc>
-              <a:buNone/>
-            </a:pPr>
-            <a:r>
-              <a:rPr lang="en-US" sz="1250" dirty="0">
-                <a:solidFill>
-                  <a:srgbClr val="24313F"/>
-                </a:solidFill>
-                <a:latin typeface="Georgia" pitchFamily="34" charset="0"/>
-                <a:ea typeface="Georgia" pitchFamily="34" charset="-122"/>
-                <a:cs typeface="Georgia" pitchFamily="34" charset="-120"/>
-              </a:rPr>
-              <a:t>Structure, enigma, what the extract argues, and where it strains.</a:t>
-            </a:r>
-            <a:endParaRPr lang="en-US" sz="1250" dirty="0"/>
-          </a:p>
-        </p:txBody>
-      </p:sp>
-      <p:sp>
-        <p:nvSpPr>
-          <p:cNvPr id="23" name="Shape 21"/>
+              <a:t>Four labelled moves, one paragraph, no sentence repeatable in another's place. Write the labels in the margin of your own CS7 rewrite; the labels come off on Wednesday.</a:t>
+            </a:r>
+            <a:endParaRPr lang="en-US" sz="1550" dirty="0"/>
+          </a:p>
+        </p:txBody>
+      </p:sp>
+      <p:sp>
+        <p:nvSpPr>
+          <p:cNvPr id="9" name="Shape 7"/>
           <p:cNvSpPr/>
           <p:nvPr/>
         </p:nvSpPr>
@@ -7494,7 +9066,7 @@
       </p:sp>
       <p:sp>
         <p:nvSpPr>
-          <p:cNvPr id="24" name="Text 22"/>
+          <p:cNvPr id="10" name="Text 8"/>
           <p:cNvSpPr/>
           <p:nvPr/>
         </p:nvSpPr>
@@ -7533,7 +9105,7 @@
       </p:sp>
       <p:sp>
         <p:nvSpPr>
-          <p:cNvPr id="25" name="Text 23"/>
+          <p:cNvPr id="11" name="Text 9"/>
           <p:cNvSpPr/>
           <p:nvPr/>
         </p:nvSpPr>
@@ -7564,7 +9136,7 @@
                 <a:ea typeface="Georgia" pitchFamily="34" charset="-122"/>
                 <a:cs typeface="Georgia" pitchFamily="34" charset="-120"/>
               </a:rPr>
-              <a:t>05</a:t>
+              <a:t>06</a:t>
             </a:r>
             <a:endParaRPr lang="en-US" sz="1600" dirty="0"/>
           </a:p>
@@ -7635,7 +9207,7 @@
                 <a:ea typeface="Arial" pitchFamily="34" charset="-122"/>
                 <a:cs typeface="Arial" pitchFamily="34" charset="-120"/>
               </a:rPr>
-              <a:t>HOW A1 IS MARKED</a:t>
+              <a:t>THE SCREENING PROTOCOL</a:t>
             </a:r>
             <a:endParaRPr lang="en-US" sz="1100" dirty="0"/>
           </a:p>
@@ -7674,7 +9246,7 @@
                 <a:ea typeface="Arial" pitchFamily="34" charset="-122"/>
                 <a:cs typeface="Arial" pitchFamily="34" charset="-120"/>
               </a:rPr>
-              <a:t>THE OFFICIAL PAPER 2 RUBRIC</a:t>
+              <a:t>THE PAPER'S RULE, OUR SPLIT</a:t>
             </a:r>
             <a:endParaRPr lang="en-US" sz="1100" dirty="0"/>
           </a:p>
@@ -7728,7 +9300,7 @@
               <a:buNone/>
             </a:pPr>
             <a:r>
-              <a:rPr lang="en-US" sz="3000" dirty="0">
+              <a:rPr lang="en-US" sz="3200" dirty="0">
                 <a:solidFill>
                   <a:srgbClr val="24313F"/>
                 </a:solidFill>
@@ -7736,9 +9308,9 @@
                 <a:ea typeface="Georgia" pitchFamily="34" charset="-122"/>
                 <a:cs typeface="Georgia" pitchFamily="34" charset="-120"/>
               </a:rPr>
-              <a:t>Five criteria, best-fit, 0 to 5 each</a:t>
-            </a:r>
-            <a:endParaRPr lang="en-US" sz="3000" dirty="0"/>
+              <a:t>Four viewings, one extract</a:t>
+            </a:r>
+            <a:endParaRPr lang="en-US" sz="3200" dirty="0"/>
           </a:p>
         </p:txBody>
       </p:sp>
@@ -7750,16 +9322,16 @@
         </p:nvSpPr>
         <p:spPr>
           <a:xfrm>
-            <a:off x="822960" y="1737360"/>
-            <a:ext cx="10543032" cy="0"/>
+            <a:off x="2140839" y="3200400"/>
+            <a:ext cx="7907274" cy="0"/>
           </a:xfrm>
           <a:prstGeom prst="line">
             <a:avLst/>
           </a:prstGeom>
           <a:noFill/>
-          <a:ln w="12700">
+          <a:ln w="19050">
             <a:solidFill>
-              <a:srgbClr val="24313F"/>
+              <a:srgbClr val="8AA394"/>
             </a:solidFill>
             <a:prstDash val="solid"/>
           </a:ln>
@@ -7773,124 +9345,693 @@
         </p:nvSpPr>
         <p:spPr>
           <a:xfrm>
-            <a:off x="822960" y="1737360"/>
-            <a:ext cx="1463040" cy="548640"/>
-          </a:xfrm>
-          <a:prstGeom prst="rect">
-            <a:avLst/>
-          </a:prstGeom>
-          <a:noFill/>
-          <a:ln/>
-        </p:spPr>
-        <p:txBody>
-          <a:bodyPr wrap="square" lIns="0" tIns="0" rIns="0" bIns="0" rtlCol="0" anchor="ctr"/>
-          <a:lstStyle/>
-          <a:p>
-            <a:pPr indent="0" marL="0">
-              <a:buNone/>
-            </a:pPr>
-            <a:r>
-              <a:rPr lang="en-US" sz="1100" b="1" spc="100" kern="0" dirty="0">
-                <a:solidFill>
-                  <a:srgbClr val="7A7F72"/>
+            <a:off x="1866519" y="2926080"/>
+            <a:ext cx="548640" cy="548640"/>
+          </a:xfrm>
+          <a:prstGeom prst="ellipse">
+            <a:avLst/>
+          </a:prstGeom>
+          <a:solidFill>
+            <a:srgbClr val="4A6B5D"/>
+          </a:solidFill>
+          <a:ln/>
+        </p:spPr>
+        <p:txBody>
+          <a:bodyPr wrap="square" lIns="0" tIns="0" rIns="0" bIns="0" rtlCol="0" anchor="ctr"/>
+          <a:lstStyle/>
+          <a:p>
+            <a:pPr algn="ctr" indent="0" marL="0">
+              <a:buNone/>
+            </a:pPr>
+            <a:r>
+              <a:rPr lang="en-US" sz="2200" dirty="0">
+                <a:solidFill>
+                  <a:srgbClr val="FAF8F1"/>
+                </a:solidFill>
+                <a:latin typeface="Georgia" pitchFamily="34" charset="0"/>
+                <a:ea typeface="Georgia" pitchFamily="34" charset="-122"/>
+                <a:cs typeface="Georgia" pitchFamily="34" charset="-120"/>
+              </a:rPr>
+              <a:t>1</a:t>
+            </a:r>
+            <a:endParaRPr lang="en-US" sz="2200" dirty="0"/>
+          </a:p>
+        </p:txBody>
+      </p:sp>
+      <p:sp>
+        <p:nvSpPr>
+          <p:cNvPr id="8" name="Text 6"/>
+          <p:cNvSpPr/>
+          <p:nvPr/>
+        </p:nvSpPr>
+        <p:spPr>
+          <a:xfrm>
+            <a:off x="932688" y="2240280"/>
+            <a:ext cx="2416302" cy="457200"/>
+          </a:xfrm>
+          <a:prstGeom prst="rect">
+            <a:avLst/>
+          </a:prstGeom>
+          <a:noFill/>
+          <a:ln/>
+        </p:spPr>
+        <p:txBody>
+          <a:bodyPr wrap="square" lIns="0" tIns="0" rIns="0" bIns="0" rtlCol="0" anchor="b"/>
+          <a:lstStyle/>
+          <a:p>
+            <a:pPr algn="ctr" indent="0" marL="0">
+              <a:buNone/>
+            </a:pPr>
+            <a:r>
+              <a:rPr lang="en-US" sz="1800" dirty="0">
+                <a:solidFill>
+                  <a:srgbClr val="24313F"/>
+                </a:solidFill>
+                <a:latin typeface="Georgia" pitchFamily="34" charset="0"/>
+                <a:ea typeface="Georgia" pitchFamily="34" charset="-122"/>
+                <a:cs typeface="Georgia" pitchFamily="34" charset="-120"/>
+              </a:rPr>
+              <a:t>First</a:t>
+            </a:r>
+            <a:endParaRPr lang="en-US" sz="1800" dirty="0"/>
+          </a:p>
+        </p:txBody>
+      </p:sp>
+      <p:sp>
+        <p:nvSpPr>
+          <p:cNvPr id="9" name="Text 7"/>
+          <p:cNvSpPr/>
+          <p:nvPr/>
+        </p:nvSpPr>
+        <p:spPr>
+          <a:xfrm>
+            <a:off x="932688" y="3611880"/>
+            <a:ext cx="2416302" cy="320040"/>
+          </a:xfrm>
+          <a:prstGeom prst="rect">
+            <a:avLst/>
+          </a:prstGeom>
+          <a:noFill/>
+          <a:ln/>
+        </p:spPr>
+        <p:txBody>
+          <a:bodyPr wrap="square" lIns="0" tIns="0" rIns="0" bIns="0" rtlCol="0" anchor="ctr"/>
+          <a:lstStyle/>
+          <a:p>
+            <a:pPr algn="ctr" indent="0" marL="0">
+              <a:buNone/>
+            </a:pPr>
+            <a:r>
+              <a:rPr lang="en-US" sz="950" b="1" spc="50" kern="0" dirty="0">
+                <a:solidFill>
+                  <a:srgbClr val="4A6B5D"/>
                 </a:solidFill>
                 <a:latin typeface="Arial" pitchFamily="34" charset="0"/>
                 <a:ea typeface="Arial" pitchFamily="34" charset="-122"/>
                 <a:cs typeface="Arial" pitchFamily="34" charset="-120"/>
               </a:rPr>
-              <a:t>AO</a:t>
-            </a:r>
-            <a:endParaRPr lang="en-US" sz="1100" dirty="0"/>
-          </a:p>
-        </p:txBody>
-      </p:sp>
-      <p:sp>
-        <p:nvSpPr>
-          <p:cNvPr id="8" name="Text 6"/>
-          <p:cNvSpPr/>
-          <p:nvPr/>
-        </p:nvSpPr>
-        <p:spPr>
-          <a:xfrm>
-            <a:off x="2377440" y="1737360"/>
-            <a:ext cx="7315200" cy="548640"/>
-          </a:xfrm>
-          <a:prstGeom prst="rect">
-            <a:avLst/>
-          </a:prstGeom>
-          <a:noFill/>
-          <a:ln/>
-        </p:spPr>
-        <p:txBody>
-          <a:bodyPr wrap="square" lIns="0" tIns="0" rIns="0" bIns="0" rtlCol="0" anchor="ctr"/>
-          <a:lstStyle/>
-          <a:p>
-            <a:pPr indent="0" marL="0">
-              <a:buNone/>
-            </a:pPr>
-            <a:r>
-              <a:rPr lang="en-US" sz="1100" b="1" spc="100" kern="0" dirty="0">
-                <a:solidFill>
-                  <a:srgbClr val="7A7F72"/>
+              <a:t>JUST WATCH</a:t>
+            </a:r>
+            <a:endParaRPr lang="en-US" sz="950" dirty="0"/>
+          </a:p>
+        </p:txBody>
+      </p:sp>
+      <p:sp>
+        <p:nvSpPr>
+          <p:cNvPr id="10" name="Text 8"/>
+          <p:cNvSpPr/>
+          <p:nvPr/>
+        </p:nvSpPr>
+        <p:spPr>
+          <a:xfrm>
+            <a:off x="969264" y="3977640"/>
+            <a:ext cx="2343150" cy="1188720"/>
+          </a:xfrm>
+          <a:prstGeom prst="rect">
+            <a:avLst/>
+          </a:prstGeom>
+          <a:noFill/>
+          <a:ln/>
+        </p:spPr>
+        <p:txBody>
+          <a:bodyPr wrap="square" lIns="0" tIns="0" rIns="0" bIns="0" rtlCol="0" anchor="t"/>
+          <a:lstStyle/>
+          <a:p>
+            <a:pPr algn="ctr" indent="0" marL="0">
+              <a:lnSpc>
+                <a:spcPts val="1600"/>
+              </a:lnSpc>
+              <a:buNone/>
+            </a:pPr>
+            <a:r>
+              <a:rPr lang="en-US" sz="1250" dirty="0">
+                <a:solidFill>
+                  <a:srgbClr val="24313F"/>
+                </a:solidFill>
+                <a:latin typeface="Georgia" pitchFamily="34" charset="0"/>
+                <a:ea typeface="Georgia" pitchFamily="34" charset="-122"/>
+                <a:cs typeface="Georgia" pitchFamily="34" charset="-120"/>
+              </a:rPr>
+              <a:t>No notes: the paper's own rule. See the whole thing before you dissect it.</a:t>
+            </a:r>
+            <a:endParaRPr lang="en-US" sz="1250" dirty="0"/>
+          </a:p>
+        </p:txBody>
+      </p:sp>
+      <p:sp>
+        <p:nvSpPr>
+          <p:cNvPr id="11" name="Text 9"/>
+          <p:cNvSpPr/>
+          <p:nvPr/>
+        </p:nvSpPr>
+        <p:spPr>
+          <a:xfrm>
+            <a:off x="4502277" y="2926080"/>
+            <a:ext cx="548640" cy="548640"/>
+          </a:xfrm>
+          <a:prstGeom prst="ellipse">
+            <a:avLst/>
+          </a:prstGeom>
+          <a:solidFill>
+            <a:srgbClr val="4A6B5D"/>
+          </a:solidFill>
+          <a:ln/>
+        </p:spPr>
+        <p:txBody>
+          <a:bodyPr wrap="square" lIns="0" tIns="0" rIns="0" bIns="0" rtlCol="0" anchor="ctr"/>
+          <a:lstStyle/>
+          <a:p>
+            <a:pPr algn="ctr" indent="0" marL="0">
+              <a:buNone/>
+            </a:pPr>
+            <a:r>
+              <a:rPr lang="en-US" sz="2200" dirty="0">
+                <a:solidFill>
+                  <a:srgbClr val="FAF8F1"/>
+                </a:solidFill>
+                <a:latin typeface="Georgia" pitchFamily="34" charset="0"/>
+                <a:ea typeface="Georgia" pitchFamily="34" charset="-122"/>
+                <a:cs typeface="Georgia" pitchFamily="34" charset="-120"/>
+              </a:rPr>
+              <a:t>2</a:t>
+            </a:r>
+            <a:endParaRPr lang="en-US" sz="2200" dirty="0"/>
+          </a:p>
+        </p:txBody>
+      </p:sp>
+      <p:sp>
+        <p:nvSpPr>
+          <p:cNvPr id="12" name="Text 10"/>
+          <p:cNvSpPr/>
+          <p:nvPr/>
+        </p:nvSpPr>
+        <p:spPr>
+          <a:xfrm>
+            <a:off x="3568446" y="2240280"/>
+            <a:ext cx="2416302" cy="457200"/>
+          </a:xfrm>
+          <a:prstGeom prst="rect">
+            <a:avLst/>
+          </a:prstGeom>
+          <a:noFill/>
+          <a:ln/>
+        </p:spPr>
+        <p:txBody>
+          <a:bodyPr wrap="square" lIns="0" tIns="0" rIns="0" bIns="0" rtlCol="0" anchor="b"/>
+          <a:lstStyle/>
+          <a:p>
+            <a:pPr algn="ctr" indent="0" marL="0">
+              <a:buNone/>
+            </a:pPr>
+            <a:r>
+              <a:rPr lang="en-US" sz="1800" dirty="0">
+                <a:solidFill>
+                  <a:srgbClr val="24313F"/>
+                </a:solidFill>
+                <a:latin typeface="Georgia" pitchFamily="34" charset="0"/>
+                <a:ea typeface="Georgia" pitchFamily="34" charset="-122"/>
+                <a:cs typeface="Georgia" pitchFamily="34" charset="-120"/>
+              </a:rPr>
+              <a:t>Second</a:t>
+            </a:r>
+            <a:endParaRPr lang="en-US" sz="1800" dirty="0"/>
+          </a:p>
+        </p:txBody>
+      </p:sp>
+      <p:sp>
+        <p:nvSpPr>
+          <p:cNvPr id="13" name="Text 11"/>
+          <p:cNvSpPr/>
+          <p:nvPr/>
+        </p:nvSpPr>
+        <p:spPr>
+          <a:xfrm>
+            <a:off x="3568446" y="3611880"/>
+            <a:ext cx="2416302" cy="320040"/>
+          </a:xfrm>
+          <a:prstGeom prst="rect">
+            <a:avLst/>
+          </a:prstGeom>
+          <a:noFill/>
+          <a:ln/>
+        </p:spPr>
+        <p:txBody>
+          <a:bodyPr wrap="square" lIns="0" tIns="0" rIns="0" bIns="0" rtlCol="0" anchor="ctr"/>
+          <a:lstStyle/>
+          <a:p>
+            <a:pPr algn="ctr" indent="0" marL="0">
+              <a:buNone/>
+            </a:pPr>
+            <a:r>
+              <a:rPr lang="en-US" sz="950" b="1" spc="50" kern="0" dirty="0">
+                <a:solidFill>
+                  <a:srgbClr val="4A6B5D"/>
                 </a:solidFill>
                 <a:latin typeface="Arial" pitchFamily="34" charset="0"/>
                 <a:ea typeface="Arial" pitchFamily="34" charset="-122"/>
                 <a:cs typeface="Arial" pitchFamily="34" charset="-120"/>
               </a:rPr>
-              <a:t>Criterion</a:t>
-            </a:r>
-            <a:endParaRPr lang="en-US" sz="1100" dirty="0"/>
-          </a:p>
-        </p:txBody>
-      </p:sp>
-      <p:sp>
-        <p:nvSpPr>
-          <p:cNvPr id="9" name="Text 7"/>
-          <p:cNvSpPr/>
-          <p:nvPr/>
-        </p:nvSpPr>
-        <p:spPr>
-          <a:xfrm>
-            <a:off x="9875520" y="1737360"/>
-            <a:ext cx="1463040" cy="548640"/>
-          </a:xfrm>
-          <a:prstGeom prst="rect">
-            <a:avLst/>
-          </a:prstGeom>
-          <a:noFill/>
-          <a:ln/>
-        </p:spPr>
-        <p:txBody>
-          <a:bodyPr wrap="square" lIns="0" tIns="0" rIns="0" bIns="0" rtlCol="0" anchor="ctr"/>
-          <a:lstStyle/>
-          <a:p>
-            <a:pPr algn="r" indent="0" marL="0">
-              <a:buNone/>
-            </a:pPr>
-            <a:r>
-              <a:rPr lang="en-US" sz="1100" b="1" spc="100" kern="0" dirty="0">
-                <a:solidFill>
-                  <a:srgbClr val="7A7F72"/>
+              <a:t>CAMERA &amp; EDITING</a:t>
+            </a:r>
+            <a:endParaRPr lang="en-US" sz="950" dirty="0"/>
+          </a:p>
+        </p:txBody>
+      </p:sp>
+      <p:sp>
+        <p:nvSpPr>
+          <p:cNvPr id="14" name="Text 12"/>
+          <p:cNvSpPr/>
+          <p:nvPr/>
+        </p:nvSpPr>
+        <p:spPr>
+          <a:xfrm>
+            <a:off x="3605022" y="3977640"/>
+            <a:ext cx="2343150" cy="1188720"/>
+          </a:xfrm>
+          <a:prstGeom prst="rect">
+            <a:avLst/>
+          </a:prstGeom>
+          <a:noFill/>
+          <a:ln/>
+        </p:spPr>
+        <p:txBody>
+          <a:bodyPr wrap="square" lIns="0" tIns="0" rIns="0" bIns="0" rtlCol="0" anchor="t"/>
+          <a:lstStyle/>
+          <a:p>
+            <a:pPr algn="ctr" indent="0" marL="0">
+              <a:lnSpc>
+                <a:spcPts val="1600"/>
+              </a:lnSpc>
+              <a:buNone/>
+            </a:pPr>
+            <a:r>
+              <a:rPr lang="en-US" sz="1250" dirty="0">
+                <a:solidFill>
+                  <a:srgbClr val="24313F"/>
+                </a:solidFill>
+                <a:latin typeface="Georgia" pitchFamily="34" charset="0"/>
+                <a:ea typeface="Georgia" pitchFamily="34" charset="-122"/>
+                <a:cs typeface="Georgia" pitchFamily="34" charset="-120"/>
+              </a:rPr>
+              <a:t>Track the technical codes: shots, angles, movement, cuts, pace.</a:t>
+            </a:r>
+            <a:endParaRPr lang="en-US" sz="1250" dirty="0"/>
+          </a:p>
+        </p:txBody>
+      </p:sp>
+      <p:sp>
+        <p:nvSpPr>
+          <p:cNvPr id="15" name="Text 13"/>
+          <p:cNvSpPr/>
+          <p:nvPr/>
+        </p:nvSpPr>
+        <p:spPr>
+          <a:xfrm>
+            <a:off x="7138035" y="2926080"/>
+            <a:ext cx="548640" cy="548640"/>
+          </a:xfrm>
+          <a:prstGeom prst="ellipse">
+            <a:avLst/>
+          </a:prstGeom>
+          <a:solidFill>
+            <a:srgbClr val="4A6B5D"/>
+          </a:solidFill>
+          <a:ln/>
+        </p:spPr>
+        <p:txBody>
+          <a:bodyPr wrap="square" lIns="0" tIns="0" rIns="0" bIns="0" rtlCol="0" anchor="ctr"/>
+          <a:lstStyle/>
+          <a:p>
+            <a:pPr algn="ctr" indent="0" marL="0">
+              <a:buNone/>
+            </a:pPr>
+            <a:r>
+              <a:rPr lang="en-US" sz="2200" dirty="0">
+                <a:solidFill>
+                  <a:srgbClr val="FAF8F1"/>
+                </a:solidFill>
+                <a:latin typeface="Georgia" pitchFamily="34" charset="0"/>
+                <a:ea typeface="Georgia" pitchFamily="34" charset="-122"/>
+                <a:cs typeface="Georgia" pitchFamily="34" charset="-120"/>
+              </a:rPr>
+              <a:t>3</a:t>
+            </a:r>
+            <a:endParaRPr lang="en-US" sz="2200" dirty="0"/>
+          </a:p>
+        </p:txBody>
+      </p:sp>
+      <p:sp>
+        <p:nvSpPr>
+          <p:cNvPr id="16" name="Text 14"/>
+          <p:cNvSpPr/>
+          <p:nvPr/>
+        </p:nvSpPr>
+        <p:spPr>
+          <a:xfrm>
+            <a:off x="6204204" y="2240280"/>
+            <a:ext cx="2416302" cy="457200"/>
+          </a:xfrm>
+          <a:prstGeom prst="rect">
+            <a:avLst/>
+          </a:prstGeom>
+          <a:noFill/>
+          <a:ln/>
+        </p:spPr>
+        <p:txBody>
+          <a:bodyPr wrap="square" lIns="0" tIns="0" rIns="0" bIns="0" rtlCol="0" anchor="b"/>
+          <a:lstStyle/>
+          <a:p>
+            <a:pPr algn="ctr" indent="0" marL="0">
+              <a:buNone/>
+            </a:pPr>
+            <a:r>
+              <a:rPr lang="en-US" sz="1800" dirty="0">
+                <a:solidFill>
+                  <a:srgbClr val="24313F"/>
+                </a:solidFill>
+                <a:latin typeface="Georgia" pitchFamily="34" charset="0"/>
+                <a:ea typeface="Georgia" pitchFamily="34" charset="-122"/>
+                <a:cs typeface="Georgia" pitchFamily="34" charset="-120"/>
+              </a:rPr>
+              <a:t>Third</a:t>
+            </a:r>
+            <a:endParaRPr lang="en-US" sz="1800" dirty="0"/>
+          </a:p>
+        </p:txBody>
+      </p:sp>
+      <p:sp>
+        <p:nvSpPr>
+          <p:cNvPr id="17" name="Text 15"/>
+          <p:cNvSpPr/>
+          <p:nvPr/>
+        </p:nvSpPr>
+        <p:spPr>
+          <a:xfrm>
+            <a:off x="6204204" y="3611880"/>
+            <a:ext cx="2416302" cy="320040"/>
+          </a:xfrm>
+          <a:prstGeom prst="rect">
+            <a:avLst/>
+          </a:prstGeom>
+          <a:noFill/>
+          <a:ln/>
+        </p:spPr>
+        <p:txBody>
+          <a:bodyPr wrap="square" lIns="0" tIns="0" rIns="0" bIns="0" rtlCol="0" anchor="ctr"/>
+          <a:lstStyle/>
+          <a:p>
+            <a:pPr algn="ctr" indent="0" marL="0">
+              <a:buNone/>
+            </a:pPr>
+            <a:r>
+              <a:rPr lang="en-US" sz="950" b="1" spc="50" kern="0" dirty="0">
+                <a:solidFill>
+                  <a:srgbClr val="4A6B5D"/>
                 </a:solidFill>
                 <a:latin typeface="Arial" pitchFamily="34" charset="0"/>
                 <a:ea typeface="Arial" pitchFamily="34" charset="-122"/>
                 <a:cs typeface="Arial" pitchFamily="34" charset="-120"/>
               </a:rPr>
-              <a:t>Band</a:t>
-            </a:r>
-            <a:endParaRPr lang="en-US" sz="1100" dirty="0"/>
-          </a:p>
-        </p:txBody>
-      </p:sp>
-      <p:sp>
-        <p:nvSpPr>
-          <p:cNvPr id="10" name="Shape 8"/>
-          <p:cNvSpPr/>
-          <p:nvPr/>
-        </p:nvSpPr>
-        <p:spPr>
-          <a:xfrm>
-            <a:off x="822960" y="2286000"/>
+              <a:t>SOUND &amp; MISE-EN-SCENE</a:t>
+            </a:r>
+            <a:endParaRPr lang="en-US" sz="950" dirty="0"/>
+          </a:p>
+        </p:txBody>
+      </p:sp>
+      <p:sp>
+        <p:nvSpPr>
+          <p:cNvPr id="18" name="Text 16"/>
+          <p:cNvSpPr/>
+          <p:nvPr/>
+        </p:nvSpPr>
+        <p:spPr>
+          <a:xfrm>
+            <a:off x="6240780" y="3977640"/>
+            <a:ext cx="2343150" cy="1188720"/>
+          </a:xfrm>
+          <a:prstGeom prst="rect">
+            <a:avLst/>
+          </a:prstGeom>
+          <a:noFill/>
+          <a:ln/>
+        </p:spPr>
+        <p:txBody>
+          <a:bodyPr wrap="square" lIns="0" tIns="0" rIns="0" bIns="0" rtlCol="0" anchor="t"/>
+          <a:lstStyle/>
+          <a:p>
+            <a:pPr algn="ctr" indent="0" marL="0">
+              <a:lnSpc>
+                <a:spcPts val="1600"/>
+              </a:lnSpc>
+              <a:buNone/>
+            </a:pPr>
+            <a:r>
+              <a:rPr lang="en-US" sz="1250" dirty="0">
+                <a:solidFill>
+                  <a:srgbClr val="24313F"/>
+                </a:solidFill>
+                <a:latin typeface="Georgia" pitchFamily="34" charset="0"/>
+                <a:ea typeface="Georgia" pitchFamily="34" charset="-122"/>
+                <a:cs typeface="Georgia" pitchFamily="34" charset="-120"/>
+              </a:rPr>
+              <a:t>Music, silence, diegetic sound; setting, props, dress, gesture.</a:t>
+            </a:r>
+            <a:endParaRPr lang="en-US" sz="1250" dirty="0"/>
+          </a:p>
+        </p:txBody>
+      </p:sp>
+      <p:sp>
+        <p:nvSpPr>
+          <p:cNvPr id="19" name="Text 17"/>
+          <p:cNvSpPr/>
+          <p:nvPr/>
+        </p:nvSpPr>
+        <p:spPr>
+          <a:xfrm>
+            <a:off x="9773793" y="2926080"/>
+            <a:ext cx="548640" cy="548640"/>
+          </a:xfrm>
+          <a:prstGeom prst="ellipse">
+            <a:avLst/>
+          </a:prstGeom>
+          <a:solidFill>
+            <a:srgbClr val="4A6B5D"/>
+          </a:solidFill>
+          <a:ln/>
+        </p:spPr>
+        <p:txBody>
+          <a:bodyPr wrap="square" lIns="0" tIns="0" rIns="0" bIns="0" rtlCol="0" anchor="ctr"/>
+          <a:lstStyle/>
+          <a:p>
+            <a:pPr algn="ctr" indent="0" marL="0">
+              <a:buNone/>
+            </a:pPr>
+            <a:r>
+              <a:rPr lang="en-US" sz="2200" dirty="0">
+                <a:solidFill>
+                  <a:srgbClr val="FAF8F1"/>
+                </a:solidFill>
+                <a:latin typeface="Georgia" pitchFamily="34" charset="0"/>
+                <a:ea typeface="Georgia" pitchFamily="34" charset="-122"/>
+                <a:cs typeface="Georgia" pitchFamily="34" charset="-120"/>
+              </a:rPr>
+              <a:t>4</a:t>
+            </a:r>
+            <a:endParaRPr lang="en-US" sz="2200" dirty="0"/>
+          </a:p>
+        </p:txBody>
+      </p:sp>
+      <p:sp>
+        <p:nvSpPr>
+          <p:cNvPr id="20" name="Text 18"/>
+          <p:cNvSpPr/>
+          <p:nvPr/>
+        </p:nvSpPr>
+        <p:spPr>
+          <a:xfrm>
+            <a:off x="8839962" y="2240280"/>
+            <a:ext cx="2416302" cy="457200"/>
+          </a:xfrm>
+          <a:prstGeom prst="rect">
+            <a:avLst/>
+          </a:prstGeom>
+          <a:noFill/>
+          <a:ln/>
+        </p:spPr>
+        <p:txBody>
+          <a:bodyPr wrap="square" lIns="0" tIns="0" rIns="0" bIns="0" rtlCol="0" anchor="b"/>
+          <a:lstStyle/>
+          <a:p>
+            <a:pPr algn="ctr" indent="0" marL="0">
+              <a:buNone/>
+            </a:pPr>
+            <a:r>
+              <a:rPr lang="en-US" sz="1800" dirty="0">
+                <a:solidFill>
+                  <a:srgbClr val="24313F"/>
+                </a:solidFill>
+                <a:latin typeface="Georgia" pitchFamily="34" charset="0"/>
+                <a:ea typeface="Georgia" pitchFamily="34" charset="-122"/>
+                <a:cs typeface="Georgia" pitchFamily="34" charset="-120"/>
+              </a:rPr>
+              <a:t>Fourth</a:t>
+            </a:r>
+            <a:endParaRPr lang="en-US" sz="1800" dirty="0"/>
+          </a:p>
+        </p:txBody>
+      </p:sp>
+      <p:sp>
+        <p:nvSpPr>
+          <p:cNvPr id="21" name="Text 19"/>
+          <p:cNvSpPr/>
+          <p:nvPr/>
+        </p:nvSpPr>
+        <p:spPr>
+          <a:xfrm>
+            <a:off x="8839962" y="3611880"/>
+            <a:ext cx="2416302" cy="320040"/>
+          </a:xfrm>
+          <a:prstGeom prst="rect">
+            <a:avLst/>
+          </a:prstGeom>
+          <a:noFill/>
+          <a:ln/>
+        </p:spPr>
+        <p:txBody>
+          <a:bodyPr wrap="square" lIns="0" tIns="0" rIns="0" bIns="0" rtlCol="0" anchor="ctr"/>
+          <a:lstStyle/>
+          <a:p>
+            <a:pPr algn="ctr" indent="0" marL="0">
+              <a:buNone/>
+            </a:pPr>
+            <a:r>
+              <a:rPr lang="en-US" sz="950" b="1" spc="50" kern="0" dirty="0">
+                <a:solidFill>
+                  <a:srgbClr val="4A6B5D"/>
+                </a:solidFill>
+                <a:latin typeface="Arial" pitchFamily="34" charset="0"/>
+                <a:ea typeface="Arial" pitchFamily="34" charset="-122"/>
+                <a:cs typeface="Arial" pitchFamily="34" charset="-120"/>
+              </a:rPr>
+              <a:t>THE INTEGRATED PASS</a:t>
+            </a:r>
+            <a:endParaRPr lang="en-US" sz="950" dirty="0"/>
+          </a:p>
+        </p:txBody>
+      </p:sp>
+      <p:sp>
+        <p:nvSpPr>
+          <p:cNvPr id="22" name="Text 20"/>
+          <p:cNvSpPr/>
+          <p:nvPr/>
+        </p:nvSpPr>
+        <p:spPr>
+          <a:xfrm>
+            <a:off x="8876538" y="3977640"/>
+            <a:ext cx="2343150" cy="1188720"/>
+          </a:xfrm>
+          <a:prstGeom prst="rect">
+            <a:avLst/>
+          </a:prstGeom>
+          <a:noFill/>
+          <a:ln/>
+        </p:spPr>
+        <p:txBody>
+          <a:bodyPr wrap="square" lIns="0" tIns="0" rIns="0" bIns="0" rtlCol="0" anchor="t"/>
+          <a:lstStyle/>
+          <a:p>
+            <a:pPr algn="ctr" indent="0" marL="0">
+              <a:lnSpc>
+                <a:spcPts val="1600"/>
+              </a:lnSpc>
+              <a:buNone/>
+            </a:pPr>
+            <a:r>
+              <a:rPr lang="en-US" sz="1250" dirty="0">
+                <a:solidFill>
+                  <a:srgbClr val="24313F"/>
+                </a:solidFill>
+                <a:latin typeface="Georgia" pitchFamily="34" charset="0"/>
+                <a:ea typeface="Georgia" pitchFamily="34" charset="-122"/>
+                <a:cs typeface="Georgia" pitchFamily="34" charset="-120"/>
+              </a:rPr>
+              <a:t>Meaning assembled: what the extract argues, and which codes carry it.</a:t>
+            </a:r>
+            <a:endParaRPr lang="en-US" sz="1250" dirty="0"/>
+          </a:p>
+        </p:txBody>
+      </p:sp>
+      <p:sp>
+        <p:nvSpPr>
+          <p:cNvPr id="23" name="Text 21"/>
+          <p:cNvSpPr/>
+          <p:nvPr/>
+        </p:nvSpPr>
+        <p:spPr>
+          <a:xfrm>
+            <a:off x="822960" y="5257800"/>
+            <a:ext cx="10543032" cy="548640"/>
+          </a:xfrm>
+          <a:prstGeom prst="rect">
+            <a:avLst/>
+          </a:prstGeom>
+          <a:noFill/>
+          <a:ln/>
+        </p:spPr>
+        <p:txBody>
+          <a:bodyPr wrap="square" lIns="0" tIns="0" rIns="0" bIns="0" rtlCol="0" anchor="t"/>
+          <a:lstStyle/>
+          <a:p>
+            <a:pPr indent="0" marL="0">
+              <a:lnSpc>
+                <a:spcPts val="1600"/>
+              </a:lnSpc>
+              <a:buNone/>
+            </a:pPr>
+            <a:r>
+              <a:rPr lang="en-US" sz="1200" i="1" dirty="0">
+                <a:solidFill>
+                  <a:srgbClr val="7A7F72"/>
+                </a:solidFill>
+                <a:latin typeface="Arial" pitchFamily="34" charset="0"/>
+                <a:ea typeface="Arial" pitchFamily="34" charset="-122"/>
+                <a:cs typeface="Arial" pitchFamily="34" charset="-120"/>
+              </a:rPr>
+              <a:t>The paper fixes only two things: four screenings, and no notes on the first. The per-viewing split is this course's discipline, not Cambridge's; keep it because it works, not because the rubric says so.</a:t>
+            </a:r>
+            <a:endParaRPr lang="en-US" sz="1200" dirty="0"/>
+          </a:p>
+        </p:txBody>
+      </p:sp>
+      <p:sp>
+        <p:nvSpPr>
+          <p:cNvPr id="24" name="Shape 22"/>
+          <p:cNvSpPr/>
+          <p:nvPr/>
+        </p:nvSpPr>
+        <p:spPr>
+          <a:xfrm>
+            <a:off x="822960" y="6382512"/>
             <a:ext cx="10543032" cy="0"/>
           </a:xfrm>
           <a:prstGeom prst="line">
@@ -7907,14 +10048,14 @@
       </p:sp>
       <p:sp>
         <p:nvSpPr>
-          <p:cNvPr id="11" name="Text 9"/>
-          <p:cNvSpPr/>
-          <p:nvPr/>
-        </p:nvSpPr>
-        <p:spPr>
-          <a:xfrm>
-            <a:off x="822960" y="2286000"/>
-            <a:ext cx="1463040" cy="548640"/>
+          <p:cNvPr id="25" name="Text 23"/>
+          <p:cNvSpPr/>
+          <p:nvPr/>
+        </p:nvSpPr>
+        <p:spPr>
+          <a:xfrm>
+            <a:off x="822960" y="6419088"/>
+            <a:ext cx="7315200" cy="274320"/>
           </a:xfrm>
           <a:prstGeom prst="rect">
             <a:avLst/>
@@ -7930,816 +10071,54 @@
               <a:buNone/>
             </a:pPr>
             <a:r>
-              <a:rPr lang="en-US" sz="1300" b="1" spc="100" kern="0" dirty="0">
-                <a:solidFill>
-                  <a:srgbClr val="4A6B5D"/>
+              <a:rPr lang="en-US" sz="900" spc="150" kern="0" dirty="0">
+                <a:solidFill>
+                  <a:srgbClr val="7A7F72"/>
                 </a:solidFill>
                 <a:latin typeface="Arial" pitchFamily="34" charset="0"/>
                 <a:ea typeface="Arial" pitchFamily="34" charset="-122"/>
                 <a:cs typeface="Arial" pitchFamily="34" charset="-120"/>
               </a:rPr>
-              <a:t>AO1</a:t>
-            </a:r>
-            <a:endParaRPr lang="en-US" sz="1300" dirty="0"/>
-          </a:p>
-        </p:txBody>
-      </p:sp>
-      <p:sp>
-        <p:nvSpPr>
-          <p:cNvPr id="12" name="Text 10"/>
-          <p:cNvSpPr/>
-          <p:nvPr/>
-        </p:nvSpPr>
-        <p:spPr>
-          <a:xfrm>
-            <a:off x="2377440" y="2286000"/>
-            <a:ext cx="7315200" cy="548640"/>
-          </a:xfrm>
-          <a:prstGeom prst="rect">
-            <a:avLst/>
-          </a:prstGeom>
-          <a:noFill/>
-          <a:ln/>
-        </p:spPr>
-        <p:txBody>
-          <a:bodyPr wrap="square" lIns="0" tIns="0" rIns="0" bIns="0" rtlCol="0" anchor="ctr"/>
-          <a:lstStyle/>
-          <a:p>
-            <a:pPr indent="0" marL="0">
+              <a:t>MEDIA STUDIES 9607 · SEMESTER I</a:t>
+            </a:r>
+            <a:endParaRPr lang="en-US" sz="900" dirty="0"/>
+          </a:p>
+        </p:txBody>
+      </p:sp>
+      <p:sp>
+        <p:nvSpPr>
+          <p:cNvPr id="26" name="Text 24"/>
+          <p:cNvSpPr/>
+          <p:nvPr/>
+        </p:nvSpPr>
+        <p:spPr>
+          <a:xfrm>
+            <a:off x="10268712" y="6355080"/>
+            <a:ext cx="1097280" cy="365760"/>
+          </a:xfrm>
+          <a:prstGeom prst="rect">
+            <a:avLst/>
+          </a:prstGeom>
+          <a:noFill/>
+          <a:ln/>
+        </p:spPr>
+        <p:txBody>
+          <a:bodyPr wrap="square" lIns="0" tIns="0" rIns="0" bIns="0" rtlCol="0" anchor="ctr"/>
+          <a:lstStyle/>
+          <a:p>
+            <a:pPr algn="r" indent="0" marL="0">
               <a:buNone/>
             </a:pPr>
             <a:r>
               <a:rPr lang="en-US" sz="1600" dirty="0">
                 <a:solidFill>
-                  <a:srgbClr val="24313F"/>
+                  <a:srgbClr val="A3C1AD"/>
                 </a:solidFill>
                 <a:latin typeface="Georgia" pitchFamily="34" charset="0"/>
                 <a:ea typeface="Georgia" pitchFamily="34" charset="-122"/>
                 <a:cs typeface="Georgia" pitchFamily="34" charset="-120"/>
               </a:rPr>
-              <a:t>Media Concepts: language and representation</a:t>
-            </a:r>
-            <a:endParaRPr lang="en-US" sz="1600" dirty="0"/>
-          </a:p>
-        </p:txBody>
-      </p:sp>
-      <p:sp>
-        <p:nvSpPr>
-          <p:cNvPr id="13" name="Text 11"/>
-          <p:cNvSpPr/>
-          <p:nvPr/>
-        </p:nvSpPr>
-        <p:spPr>
-          <a:xfrm>
-            <a:off x="9875520" y="2286000"/>
-            <a:ext cx="1463040" cy="548640"/>
-          </a:xfrm>
-          <a:prstGeom prst="rect">
-            <a:avLst/>
-          </a:prstGeom>
-          <a:noFill/>
-          <a:ln/>
-        </p:spPr>
-        <p:txBody>
-          <a:bodyPr wrap="square" lIns="0" tIns="0" rIns="0" bIns="0" rtlCol="0" anchor="ctr"/>
-          <a:lstStyle/>
-          <a:p>
-            <a:pPr algn="r" indent="0" marL="0">
-              <a:buNone/>
-            </a:pPr>
-            <a:r>
-              <a:rPr lang="en-US" sz="1300" b="1" dirty="0">
-                <a:solidFill>
-                  <a:srgbClr val="A3C1AD"/>
-                </a:solidFill>
-                <a:latin typeface="Arial" pitchFamily="34" charset="0"/>
-                <a:ea typeface="Arial" pitchFamily="34" charset="-122"/>
-                <a:cs typeface="Arial" pitchFamily="34" charset="-120"/>
-              </a:rPr>
-              <a:t>/5</a:t>
-            </a:r>
-            <a:endParaRPr lang="en-US" sz="1300" dirty="0"/>
-          </a:p>
-        </p:txBody>
-      </p:sp>
-      <p:sp>
-        <p:nvSpPr>
-          <p:cNvPr id="14" name="Shape 12"/>
-          <p:cNvSpPr/>
-          <p:nvPr/>
-        </p:nvSpPr>
-        <p:spPr>
-          <a:xfrm>
-            <a:off x="822960" y="2834640"/>
-            <a:ext cx="10543032" cy="0"/>
-          </a:xfrm>
-          <a:prstGeom prst="line">
-            <a:avLst/>
-          </a:prstGeom>
-          <a:noFill/>
-          <a:ln w="9525">
-            <a:solidFill>
-              <a:srgbClr val="D9D4C4"/>
-            </a:solidFill>
-            <a:prstDash val="solid"/>
-          </a:ln>
-        </p:spPr>
-      </p:sp>
-      <p:sp>
-        <p:nvSpPr>
-          <p:cNvPr id="15" name="Text 13"/>
-          <p:cNvSpPr/>
-          <p:nvPr/>
-        </p:nvSpPr>
-        <p:spPr>
-          <a:xfrm>
-            <a:off x="822960" y="2834640"/>
-            <a:ext cx="1463040" cy="548640"/>
-          </a:xfrm>
-          <a:prstGeom prst="rect">
-            <a:avLst/>
-          </a:prstGeom>
-          <a:noFill/>
-          <a:ln/>
-        </p:spPr>
-        <p:txBody>
-          <a:bodyPr wrap="square" lIns="0" tIns="0" rIns="0" bIns="0" rtlCol="0" anchor="ctr"/>
-          <a:lstStyle/>
-          <a:p>
-            <a:pPr indent="0" marL="0">
-              <a:buNone/>
-            </a:pPr>
-            <a:r>
-              <a:rPr lang="en-US" sz="1300" b="1" spc="100" kern="0" dirty="0">
-                <a:solidFill>
-                  <a:srgbClr val="4A6B5D"/>
-                </a:solidFill>
-                <a:latin typeface="Arial" pitchFamily="34" charset="0"/>
-                <a:ea typeface="Arial" pitchFamily="34" charset="-122"/>
-                <a:cs typeface="Arial" pitchFamily="34" charset="-120"/>
-              </a:rPr>
-              <a:t>AO1</a:t>
-            </a:r>
-            <a:endParaRPr lang="en-US" sz="1300" dirty="0"/>
-          </a:p>
-        </p:txBody>
-      </p:sp>
-      <p:sp>
-        <p:nvSpPr>
-          <p:cNvPr id="16" name="Text 14"/>
-          <p:cNvSpPr/>
-          <p:nvPr/>
-        </p:nvSpPr>
-        <p:spPr>
-          <a:xfrm>
-            <a:off x="2377440" y="2834640"/>
-            <a:ext cx="7315200" cy="548640"/>
-          </a:xfrm>
-          <a:prstGeom prst="rect">
-            <a:avLst/>
-          </a:prstGeom>
-          <a:noFill/>
-          <a:ln/>
-        </p:spPr>
-        <p:txBody>
-          <a:bodyPr wrap="square" lIns="0" tIns="0" rIns="0" bIns="0" rtlCol="0" anchor="ctr"/>
-          <a:lstStyle/>
-          <a:p>
-            <a:pPr indent="0" marL="0">
-              <a:buNone/>
-            </a:pPr>
-            <a:r>
-              <a:rPr lang="en-US" sz="1600" dirty="0">
-                <a:solidFill>
-                  <a:srgbClr val="24313F"/>
-                </a:solidFill>
-                <a:latin typeface="Georgia" pitchFamily="34" charset="0"/>
-                <a:ea typeface="Georgia" pitchFamily="34" charset="-122"/>
-                <a:cs typeface="Georgia" pitchFamily="34" charset="-120"/>
-              </a:rPr>
-              <a:t>Contexts and Critical Debates</a:t>
-            </a:r>
-            <a:endParaRPr lang="en-US" sz="1600" dirty="0"/>
-          </a:p>
-        </p:txBody>
-      </p:sp>
-      <p:sp>
-        <p:nvSpPr>
-          <p:cNvPr id="17" name="Text 15"/>
-          <p:cNvSpPr/>
-          <p:nvPr/>
-        </p:nvSpPr>
-        <p:spPr>
-          <a:xfrm>
-            <a:off x="9875520" y="2834640"/>
-            <a:ext cx="1463040" cy="548640"/>
-          </a:xfrm>
-          <a:prstGeom prst="rect">
-            <a:avLst/>
-          </a:prstGeom>
-          <a:noFill/>
-          <a:ln/>
-        </p:spPr>
-        <p:txBody>
-          <a:bodyPr wrap="square" lIns="0" tIns="0" rIns="0" bIns="0" rtlCol="0" anchor="ctr"/>
-          <a:lstStyle/>
-          <a:p>
-            <a:pPr algn="r" indent="0" marL="0">
-              <a:buNone/>
-            </a:pPr>
-            <a:r>
-              <a:rPr lang="en-US" sz="1300" b="1" dirty="0">
-                <a:solidFill>
-                  <a:srgbClr val="A3C1AD"/>
-                </a:solidFill>
-                <a:latin typeface="Arial" pitchFamily="34" charset="0"/>
-                <a:ea typeface="Arial" pitchFamily="34" charset="-122"/>
-                <a:cs typeface="Arial" pitchFamily="34" charset="-120"/>
-              </a:rPr>
-              <a:t>/5</a:t>
-            </a:r>
-            <a:endParaRPr lang="en-US" sz="1300" dirty="0"/>
-          </a:p>
-        </p:txBody>
-      </p:sp>
-      <p:sp>
-        <p:nvSpPr>
-          <p:cNvPr id="18" name="Shape 16"/>
-          <p:cNvSpPr/>
-          <p:nvPr/>
-        </p:nvSpPr>
-        <p:spPr>
-          <a:xfrm>
-            <a:off x="822960" y="3383280"/>
-            <a:ext cx="10543032" cy="0"/>
-          </a:xfrm>
-          <a:prstGeom prst="line">
-            <a:avLst/>
-          </a:prstGeom>
-          <a:noFill/>
-          <a:ln w="9525">
-            <a:solidFill>
-              <a:srgbClr val="D9D4C4"/>
-            </a:solidFill>
-            <a:prstDash val="solid"/>
-          </a:ln>
-        </p:spPr>
-      </p:sp>
-      <p:sp>
-        <p:nvSpPr>
-          <p:cNvPr id="19" name="Text 17"/>
-          <p:cNvSpPr/>
-          <p:nvPr/>
-        </p:nvSpPr>
-        <p:spPr>
-          <a:xfrm>
-            <a:off x="822960" y="3383280"/>
-            <a:ext cx="1463040" cy="548640"/>
-          </a:xfrm>
-          <a:prstGeom prst="rect">
-            <a:avLst/>
-          </a:prstGeom>
-          <a:noFill/>
-          <a:ln/>
-        </p:spPr>
-        <p:txBody>
-          <a:bodyPr wrap="square" lIns="0" tIns="0" rIns="0" bIns="0" rtlCol="0" anchor="ctr"/>
-          <a:lstStyle/>
-          <a:p>
-            <a:pPr indent="0" marL="0">
-              <a:buNone/>
-            </a:pPr>
-            <a:r>
-              <a:rPr lang="en-US" sz="1300" b="1" spc="100" kern="0" dirty="0">
-                <a:solidFill>
-                  <a:srgbClr val="4A6B5D"/>
-                </a:solidFill>
-                <a:latin typeface="Arial" pitchFamily="34" charset="0"/>
-                <a:ea typeface="Arial" pitchFamily="34" charset="-122"/>
-                <a:cs typeface="Arial" pitchFamily="34" charset="-120"/>
-              </a:rPr>
-              <a:t>AO1</a:t>
-            </a:r>
-            <a:endParaRPr lang="en-US" sz="1300" dirty="0"/>
-          </a:p>
-        </p:txBody>
-      </p:sp>
-      <p:sp>
-        <p:nvSpPr>
-          <p:cNvPr id="20" name="Text 18"/>
-          <p:cNvSpPr/>
-          <p:nvPr/>
-        </p:nvSpPr>
-        <p:spPr>
-          <a:xfrm>
-            <a:off x="2377440" y="3383280"/>
-            <a:ext cx="7315200" cy="548640"/>
-          </a:xfrm>
-          <a:prstGeom prst="rect">
-            <a:avLst/>
-          </a:prstGeom>
-          <a:noFill/>
-          <a:ln/>
-        </p:spPr>
-        <p:txBody>
-          <a:bodyPr wrap="square" lIns="0" tIns="0" rIns="0" bIns="0" rtlCol="0" anchor="ctr"/>
-          <a:lstStyle/>
-          <a:p>
-            <a:pPr indent="0" marL="0">
-              <a:buNone/>
-            </a:pPr>
-            <a:r>
-              <a:rPr lang="en-US" sz="1600" dirty="0">
-                <a:solidFill>
-                  <a:srgbClr val="24313F"/>
-                </a:solidFill>
-                <a:latin typeface="Georgia" pitchFamily="34" charset="0"/>
-                <a:ea typeface="Georgia" pitchFamily="34" charset="-122"/>
-                <a:cs typeface="Georgia" pitchFamily="34" charset="-120"/>
-              </a:rPr>
-              <a:t>Use of Terminology</a:t>
-            </a:r>
-            <a:endParaRPr lang="en-US" sz="1600" dirty="0"/>
-          </a:p>
-        </p:txBody>
-      </p:sp>
-      <p:sp>
-        <p:nvSpPr>
-          <p:cNvPr id="21" name="Text 19"/>
-          <p:cNvSpPr/>
-          <p:nvPr/>
-        </p:nvSpPr>
-        <p:spPr>
-          <a:xfrm>
-            <a:off x="9875520" y="3383280"/>
-            <a:ext cx="1463040" cy="548640"/>
-          </a:xfrm>
-          <a:prstGeom prst="rect">
-            <a:avLst/>
-          </a:prstGeom>
-          <a:noFill/>
-          <a:ln/>
-        </p:spPr>
-        <p:txBody>
-          <a:bodyPr wrap="square" lIns="0" tIns="0" rIns="0" bIns="0" rtlCol="0" anchor="ctr"/>
-          <a:lstStyle/>
-          <a:p>
-            <a:pPr algn="r" indent="0" marL="0">
-              <a:buNone/>
-            </a:pPr>
-            <a:r>
-              <a:rPr lang="en-US" sz="1300" b="1" dirty="0">
-                <a:solidFill>
-                  <a:srgbClr val="A3C1AD"/>
-                </a:solidFill>
-                <a:latin typeface="Arial" pitchFamily="34" charset="0"/>
-                <a:ea typeface="Arial" pitchFamily="34" charset="-122"/>
-                <a:cs typeface="Arial" pitchFamily="34" charset="-120"/>
-              </a:rPr>
-              <a:t>/5</a:t>
-            </a:r>
-            <a:endParaRPr lang="en-US" sz="1300" dirty="0"/>
-          </a:p>
-        </p:txBody>
-      </p:sp>
-      <p:sp>
-        <p:nvSpPr>
-          <p:cNvPr id="22" name="Shape 20"/>
-          <p:cNvSpPr/>
-          <p:nvPr/>
-        </p:nvSpPr>
-        <p:spPr>
-          <a:xfrm>
-            <a:off x="822960" y="3931920"/>
-            <a:ext cx="10543032" cy="0"/>
-          </a:xfrm>
-          <a:prstGeom prst="line">
-            <a:avLst/>
-          </a:prstGeom>
-          <a:noFill/>
-          <a:ln w="9525">
-            <a:solidFill>
-              <a:srgbClr val="D9D4C4"/>
-            </a:solidFill>
-            <a:prstDash val="solid"/>
-          </a:ln>
-        </p:spPr>
-      </p:sp>
-      <p:sp>
-        <p:nvSpPr>
-          <p:cNvPr id="23" name="Text 21"/>
-          <p:cNvSpPr/>
-          <p:nvPr/>
-        </p:nvSpPr>
-        <p:spPr>
-          <a:xfrm>
-            <a:off x="822960" y="3931920"/>
-            <a:ext cx="1463040" cy="548640"/>
-          </a:xfrm>
-          <a:prstGeom prst="rect">
-            <a:avLst/>
-          </a:prstGeom>
-          <a:noFill/>
-          <a:ln/>
-        </p:spPr>
-        <p:txBody>
-          <a:bodyPr wrap="square" lIns="0" tIns="0" rIns="0" bIns="0" rtlCol="0" anchor="ctr"/>
-          <a:lstStyle/>
-          <a:p>
-            <a:pPr indent="0" marL="0">
-              <a:buNone/>
-            </a:pPr>
-            <a:r>
-              <a:rPr lang="en-US" sz="1300" b="1" spc="100" kern="0" dirty="0">
-                <a:solidFill>
-                  <a:srgbClr val="4A6B5D"/>
-                </a:solidFill>
-                <a:latin typeface="Arial" pitchFamily="34" charset="0"/>
-                <a:ea typeface="Arial" pitchFamily="34" charset="-122"/>
-                <a:cs typeface="Arial" pitchFamily="34" charset="-120"/>
-              </a:rPr>
-              <a:t>AO2</a:t>
-            </a:r>
-            <a:endParaRPr lang="en-US" sz="1300" dirty="0"/>
-          </a:p>
-        </p:txBody>
-      </p:sp>
-      <p:sp>
-        <p:nvSpPr>
-          <p:cNvPr id="24" name="Text 22"/>
-          <p:cNvSpPr/>
-          <p:nvPr/>
-        </p:nvSpPr>
-        <p:spPr>
-          <a:xfrm>
-            <a:off x="2377440" y="3931920"/>
-            <a:ext cx="7315200" cy="548640"/>
-          </a:xfrm>
-          <a:prstGeom prst="rect">
-            <a:avLst/>
-          </a:prstGeom>
-          <a:noFill/>
-          <a:ln/>
-        </p:spPr>
-        <p:txBody>
-          <a:bodyPr wrap="square" lIns="0" tIns="0" rIns="0" bIns="0" rtlCol="0" anchor="ctr"/>
-          <a:lstStyle/>
-          <a:p>
-            <a:pPr indent="0" marL="0">
-              <a:buNone/>
-            </a:pPr>
-            <a:r>
-              <a:rPr lang="en-US" sz="1600" dirty="0">
-                <a:solidFill>
-                  <a:srgbClr val="24313F"/>
-                </a:solidFill>
-                <a:latin typeface="Georgia" pitchFamily="34" charset="0"/>
-                <a:ea typeface="Georgia" pitchFamily="34" charset="-122"/>
-                <a:cs typeface="Georgia" pitchFamily="34" charset="-120"/>
-              </a:rPr>
-              <a:t>Analysis of how meaning is created</a:t>
-            </a:r>
-            <a:endParaRPr lang="en-US" sz="1600" dirty="0"/>
-          </a:p>
-        </p:txBody>
-      </p:sp>
-      <p:sp>
-        <p:nvSpPr>
-          <p:cNvPr id="25" name="Text 23"/>
-          <p:cNvSpPr/>
-          <p:nvPr/>
-        </p:nvSpPr>
-        <p:spPr>
-          <a:xfrm>
-            <a:off x="9875520" y="3931920"/>
-            <a:ext cx="1463040" cy="548640"/>
-          </a:xfrm>
-          <a:prstGeom prst="rect">
-            <a:avLst/>
-          </a:prstGeom>
-          <a:noFill/>
-          <a:ln/>
-        </p:spPr>
-        <p:txBody>
-          <a:bodyPr wrap="square" lIns="0" tIns="0" rIns="0" bIns="0" rtlCol="0" anchor="ctr"/>
-          <a:lstStyle/>
-          <a:p>
-            <a:pPr algn="r" indent="0" marL="0">
-              <a:buNone/>
-            </a:pPr>
-            <a:r>
-              <a:rPr lang="en-US" sz="1300" b="1" dirty="0">
-                <a:solidFill>
-                  <a:srgbClr val="A3C1AD"/>
-                </a:solidFill>
-                <a:latin typeface="Arial" pitchFamily="34" charset="0"/>
-                <a:ea typeface="Arial" pitchFamily="34" charset="-122"/>
-                <a:cs typeface="Arial" pitchFamily="34" charset="-120"/>
-              </a:rPr>
-              <a:t>/5</a:t>
-            </a:r>
-            <a:endParaRPr lang="en-US" sz="1300" dirty="0"/>
-          </a:p>
-        </p:txBody>
-      </p:sp>
-      <p:sp>
-        <p:nvSpPr>
-          <p:cNvPr id="26" name="Shape 24"/>
-          <p:cNvSpPr/>
-          <p:nvPr/>
-        </p:nvSpPr>
-        <p:spPr>
-          <a:xfrm>
-            <a:off x="822960" y="4480560"/>
-            <a:ext cx="10543032" cy="0"/>
-          </a:xfrm>
-          <a:prstGeom prst="line">
-            <a:avLst/>
-          </a:prstGeom>
-          <a:noFill/>
-          <a:ln w="9525">
-            <a:solidFill>
-              <a:srgbClr val="D9D4C4"/>
-            </a:solidFill>
-            <a:prstDash val="solid"/>
-          </a:ln>
-        </p:spPr>
-      </p:sp>
-      <p:sp>
-        <p:nvSpPr>
-          <p:cNvPr id="27" name="Text 25"/>
-          <p:cNvSpPr/>
-          <p:nvPr/>
-        </p:nvSpPr>
-        <p:spPr>
-          <a:xfrm>
-            <a:off x="822960" y="4480560"/>
-            <a:ext cx="1463040" cy="548640"/>
-          </a:xfrm>
-          <a:prstGeom prst="rect">
-            <a:avLst/>
-          </a:prstGeom>
-          <a:noFill/>
-          <a:ln/>
-        </p:spPr>
-        <p:txBody>
-          <a:bodyPr wrap="square" lIns="0" tIns="0" rIns="0" bIns="0" rtlCol="0" anchor="ctr"/>
-          <a:lstStyle/>
-          <a:p>
-            <a:pPr indent="0" marL="0">
-              <a:buNone/>
-            </a:pPr>
-            <a:r>
-              <a:rPr lang="en-US" sz="1300" b="1" spc="100" kern="0" dirty="0">
-                <a:solidFill>
-                  <a:srgbClr val="4A6B5D"/>
-                </a:solidFill>
-                <a:latin typeface="Arial" pitchFamily="34" charset="0"/>
-                <a:ea typeface="Arial" pitchFamily="34" charset="-122"/>
-                <a:cs typeface="Arial" pitchFamily="34" charset="-120"/>
-              </a:rPr>
-              <a:t>AO2</a:t>
-            </a:r>
-            <a:endParaRPr lang="en-US" sz="1300" dirty="0"/>
-          </a:p>
-        </p:txBody>
-      </p:sp>
-      <p:sp>
-        <p:nvSpPr>
-          <p:cNvPr id="28" name="Text 26"/>
-          <p:cNvSpPr/>
-          <p:nvPr/>
-        </p:nvSpPr>
-        <p:spPr>
-          <a:xfrm>
-            <a:off x="2377440" y="4480560"/>
-            <a:ext cx="7315200" cy="548640"/>
-          </a:xfrm>
-          <a:prstGeom prst="rect">
-            <a:avLst/>
-          </a:prstGeom>
-          <a:noFill/>
-          <a:ln/>
-        </p:spPr>
-        <p:txBody>
-          <a:bodyPr wrap="square" lIns="0" tIns="0" rIns="0" bIns="0" rtlCol="0" anchor="ctr"/>
-          <a:lstStyle/>
-          <a:p>
-            <a:pPr indent="0" marL="0">
-              <a:buNone/>
-            </a:pPr>
-            <a:r>
-              <a:rPr lang="en-US" sz="1600" dirty="0">
-                <a:solidFill>
-                  <a:srgbClr val="24313F"/>
-                </a:solidFill>
-                <a:latin typeface="Georgia" pitchFamily="34" charset="0"/>
-                <a:ea typeface="Georgia" pitchFamily="34" charset="-122"/>
-                <a:cs typeface="Georgia" pitchFamily="34" charset="-120"/>
-              </a:rPr>
-              <a:t>Use of Examples</a:t>
-            </a:r>
-            <a:endParaRPr lang="en-US" sz="1600" dirty="0"/>
-          </a:p>
-        </p:txBody>
-      </p:sp>
-      <p:sp>
-        <p:nvSpPr>
-          <p:cNvPr id="29" name="Text 27"/>
-          <p:cNvSpPr/>
-          <p:nvPr/>
-        </p:nvSpPr>
-        <p:spPr>
-          <a:xfrm>
-            <a:off x="9875520" y="4480560"/>
-            <a:ext cx="1463040" cy="548640"/>
-          </a:xfrm>
-          <a:prstGeom prst="rect">
-            <a:avLst/>
-          </a:prstGeom>
-          <a:noFill/>
-          <a:ln/>
-        </p:spPr>
-        <p:txBody>
-          <a:bodyPr wrap="square" lIns="0" tIns="0" rIns="0" bIns="0" rtlCol="0" anchor="ctr"/>
-          <a:lstStyle/>
-          <a:p>
-            <a:pPr algn="r" indent="0" marL="0">
-              <a:buNone/>
-            </a:pPr>
-            <a:r>
-              <a:rPr lang="en-US" sz="1300" b="1" dirty="0">
-                <a:solidFill>
-                  <a:srgbClr val="A3C1AD"/>
-                </a:solidFill>
-                <a:latin typeface="Arial" pitchFamily="34" charset="0"/>
-                <a:ea typeface="Arial" pitchFamily="34" charset="-122"/>
-                <a:cs typeface="Arial" pitchFamily="34" charset="-120"/>
-              </a:rPr>
-              <a:t>/5</a:t>
-            </a:r>
-            <a:endParaRPr lang="en-US" sz="1300" dirty="0"/>
-          </a:p>
-        </p:txBody>
-      </p:sp>
-      <p:sp>
-        <p:nvSpPr>
-          <p:cNvPr id="30" name="Shape 28"/>
-          <p:cNvSpPr/>
-          <p:nvPr/>
-        </p:nvSpPr>
-        <p:spPr>
-          <a:xfrm>
-            <a:off x="822960" y="5029200"/>
-            <a:ext cx="10543032" cy="0"/>
-          </a:xfrm>
-          <a:prstGeom prst="line">
-            <a:avLst/>
-          </a:prstGeom>
-          <a:noFill/>
-          <a:ln w="9525">
-            <a:solidFill>
-              <a:srgbClr val="D9D4C4"/>
-            </a:solidFill>
-            <a:prstDash val="solid"/>
-          </a:ln>
-        </p:spPr>
-      </p:sp>
-      <p:sp>
-        <p:nvSpPr>
-          <p:cNvPr id="31" name="Text 29"/>
-          <p:cNvSpPr/>
-          <p:nvPr/>
-        </p:nvSpPr>
-        <p:spPr>
-          <a:xfrm>
-            <a:off x="822960" y="5212080"/>
-            <a:ext cx="10543032" cy="365760"/>
-          </a:xfrm>
-          <a:prstGeom prst="rect">
-            <a:avLst/>
-          </a:prstGeom>
-          <a:noFill/>
-          <a:ln/>
-        </p:spPr>
-        <p:txBody>
-          <a:bodyPr wrap="square" lIns="0" tIns="0" rIns="0" bIns="0" rtlCol="0" anchor="ctr"/>
-          <a:lstStyle/>
-          <a:p>
-            <a:pPr indent="0" marL="0">
-              <a:buNone/>
-            </a:pPr>
-            <a:r>
-              <a:rPr lang="en-US" sz="1200" i="1" dirty="0">
-                <a:solidFill>
-                  <a:srgbClr val="7A7F72"/>
-                </a:solidFill>
-                <a:latin typeface="Arial" pitchFamily="34" charset="0"/>
-                <a:ea typeface="Arial" pitchFamily="34" charset="-122"/>
-                <a:cs typeface="Arial" pitchFamily="34" charset="-120"/>
-              </a:rPr>
-              <a:t>Band words: 5 Sophisticated  ·  4 Thorough  ·  3 Clear  ·  2 Limited  ·  1 Basic. So A1 is AO1 60 / AO2 40.</a:t>
-            </a:r>
-            <a:endParaRPr lang="en-US" sz="1200" dirty="0"/>
-          </a:p>
-        </p:txBody>
-      </p:sp>
-      <p:sp>
-        <p:nvSpPr>
-          <p:cNvPr id="32" name="Shape 30"/>
-          <p:cNvSpPr/>
-          <p:nvPr/>
-        </p:nvSpPr>
-        <p:spPr>
-          <a:xfrm>
-            <a:off x="822960" y="6382512"/>
-            <a:ext cx="10543032" cy="0"/>
-          </a:xfrm>
-          <a:prstGeom prst="line">
-            <a:avLst/>
-          </a:prstGeom>
-          <a:noFill/>
-          <a:ln w="9525">
-            <a:solidFill>
-              <a:srgbClr val="D9D4C4"/>
-            </a:solidFill>
-            <a:prstDash val="solid"/>
-          </a:ln>
-        </p:spPr>
-      </p:sp>
-      <p:sp>
-        <p:nvSpPr>
-          <p:cNvPr id="33" name="Text 31"/>
-          <p:cNvSpPr/>
-          <p:nvPr/>
-        </p:nvSpPr>
-        <p:spPr>
-          <a:xfrm>
-            <a:off x="822960" y="6419088"/>
-            <a:ext cx="7315200" cy="274320"/>
-          </a:xfrm>
-          <a:prstGeom prst="rect">
-            <a:avLst/>
-          </a:prstGeom>
-          <a:noFill/>
-          <a:ln/>
-        </p:spPr>
-        <p:txBody>
-          <a:bodyPr wrap="square" lIns="0" tIns="0" rIns="0" bIns="0" rtlCol="0" anchor="ctr"/>
-          <a:lstStyle/>
-          <a:p>
-            <a:pPr indent="0" marL="0">
-              <a:buNone/>
-            </a:pPr>
-            <a:r>
-              <a:rPr lang="en-US" sz="900" spc="150" kern="0" dirty="0">
-                <a:solidFill>
-                  <a:srgbClr val="7A7F72"/>
-                </a:solidFill>
-                <a:latin typeface="Arial" pitchFamily="34" charset="0"/>
-                <a:ea typeface="Arial" pitchFamily="34" charset="-122"/>
-                <a:cs typeface="Arial" pitchFamily="34" charset="-120"/>
-              </a:rPr>
-              <a:t>MEDIA STUDIES 9607 · SEMESTER I</a:t>
-            </a:r>
-            <a:endParaRPr lang="en-US" sz="900" dirty="0"/>
-          </a:p>
-        </p:txBody>
-      </p:sp>
-      <p:sp>
-        <p:nvSpPr>
-          <p:cNvPr id="34" name="Text 32"/>
-          <p:cNvSpPr/>
-          <p:nvPr/>
-        </p:nvSpPr>
-        <p:spPr>
-          <a:xfrm>
-            <a:off x="10268712" y="6355080"/>
-            <a:ext cx="1097280" cy="365760"/>
-          </a:xfrm>
-          <a:prstGeom prst="rect">
-            <a:avLst/>
-          </a:prstGeom>
-          <a:noFill/>
-          <a:ln/>
-        </p:spPr>
-        <p:txBody>
-          <a:bodyPr wrap="square" lIns="0" tIns="0" rIns="0" bIns="0" rtlCol="0" anchor="ctr"/>
-          <a:lstStyle/>
-          <a:p>
-            <a:pPr algn="r" indent="0" marL="0">
-              <a:buNone/>
-            </a:pPr>
-            <a:r>
-              <a:rPr lang="en-US" sz="1600" dirty="0">
-                <a:solidFill>
-                  <a:srgbClr val="A3C1AD"/>
-                </a:solidFill>
-                <a:latin typeface="Georgia" pitchFamily="34" charset="0"/>
-                <a:ea typeface="Georgia" pitchFamily="34" charset="-122"/>
-                <a:cs typeface="Georgia" pitchFamily="34" charset="-120"/>
-              </a:rPr>
-              <a:t>06</a:t>
+              <a:t>07</a:t>
             </a:r>
             <a:endParaRPr lang="en-US" sz="1600" dirty="0"/>
           </a:p>

--- a/content/decks/media-studies/media-studies-s1-lesson-08-the-viewing-protocol-and-a1.pptx
+++ b/content/decks/media-studies/media-studies-s1-lesson-08-the-viewing-protocol-and-a1.pptx
@@ -3524,19 +3524,22 @@
         <p:spPr>
           <a:xfrm>
             <a:off x="822960" y="4754880"/>
-            <a:ext cx="10058400" cy="457200"/>
-          </a:xfrm>
-          <a:prstGeom prst="rect">
-            <a:avLst/>
-          </a:prstGeom>
-          <a:noFill/>
-          <a:ln/>
-        </p:spPr>
-        <p:txBody>
-          <a:bodyPr wrap="square" lIns="0" tIns="0" rIns="0" bIns="0" rtlCol="0" anchor="ctr"/>
-          <a:lstStyle/>
-          <a:p>
-            <a:pPr indent="0" marL="0">
+            <a:ext cx="10058400" cy="548640"/>
+          </a:xfrm>
+          <a:prstGeom prst="rect">
+            <a:avLst/>
+          </a:prstGeom>
+          <a:noFill/>
+          <a:ln/>
+        </p:spPr>
+        <p:txBody>
+          <a:bodyPr wrap="square" lIns="0" tIns="0" rIns="0" bIns="0" rtlCol="0" anchor="t"/>
+          <a:lstStyle/>
+          <a:p>
+            <a:pPr indent="0" marL="0">
+              <a:lnSpc>
+                <a:spcPts val="1900"/>
+              </a:lnSpc>
               <a:buNone/>
             </a:pPr>
             <a:r>
@@ -3548,7 +3551,7 @@
                 <a:ea typeface="Arial" pitchFamily="34" charset="-122"/>
                 <a:cs typeface="Arial" pitchFamily="34" charset="-120"/>
               </a:rPr>
-              <a:t>After the Paper 2 stem: how the extract constructs meaning through camera, sound, mise-en-scene, editing. Everything since Week 1 is in play.</a:t>
+              <a:t>The question follows the Paper 2 stem: how does the extract construct meaning through camera, sound, mise-en-scene and editing? Everything since Week 1 counts.</a:t>
             </a:r>
             <a:endParaRPr lang="en-US" sz="1400" dirty="0"/>
           </a:p>
@@ -3758,7 +3761,7 @@
         <p:spPr>
           <a:xfrm>
             <a:off x="822960" y="2697480"/>
-            <a:ext cx="9875520" cy="1828800"/>
+            <a:ext cx="9875520" cy="1920240"/>
           </a:xfrm>
           <a:prstGeom prst="rect">
             <a:avLst/>
@@ -3772,12 +3775,29 @@
           <a:p>
             <a:pPr indent="0" marL="0">
               <a:lnSpc>
-                <a:spcPts val="2700"/>
+                <a:spcPts val="2500"/>
               </a:lnSpc>
               <a:buNone/>
             </a:pPr>
             <a:r>
-              <a:rPr lang="en-US" sz="1900" dirty="0">
+              <a:rPr lang="en-US" sz="1500" b="1" spc="100" kern="0" dirty="0">
+                <a:solidFill>
+                  <a:srgbClr val="4A6B5D"/>
+                </a:solidFill>
+                <a:latin typeface="Arial" pitchFamily="34" charset="0"/>
+                <a:ea typeface="Arial" pitchFamily="34" charset="-122"/>
+                <a:cs typeface="Arial" pitchFamily="34" charset="-120"/>
+              </a:rPr>
+              <a:t>FORMAT   </a:t>
+            </a:r>
+            <a:pPr indent="0" marL="0">
+              <a:lnSpc>
+                <a:spcPts val="2500"/>
+              </a:lnSpc>
+              <a:buNone/>
+            </a:pPr>
+            <a:r>
+              <a:rPr lang="en-US" sz="1700" dirty="0">
                 <a:solidFill>
                   <a:srgbClr val="24313F"/>
                 </a:solidFill>
@@ -3785,9 +3805,83 @@
                 <a:ea typeface="Georgia" pitchFamily="34" charset="-122"/>
                 <a:cs typeface="Georgia" pitchFamily="34" charset="-120"/>
               </a:rPr>
-              <a:t>Timed media language analysis of an unseen TV-drama extract, sixty minutes, full exam conditions. Marked with WS 4.6's rubric in the official five-criteria language, so the feedback transfers straight to Paper 2. Scripts back within five working days.</a:t>
-            </a:r>
-            <a:endParaRPr lang="en-US" sz="1900" dirty="0"/>
+              <a:t>Sixty minutes, full exam conditions. Media language analysis of an unseen TV-drama extract.</a:t>
+            </a:r>
+            <a:endParaRPr lang="en-US" sz="1500" dirty="0"/>
+          </a:p>
+          <a:p>
+            <a:pPr indent="0" marL="0">
+              <a:lnSpc>
+                <a:spcPts val="2500"/>
+              </a:lnSpc>
+              <a:buNone/>
+            </a:pPr>
+            <a:r>
+              <a:rPr lang="en-US" sz="1500" b="1" spc="100" kern="0" dirty="0">
+                <a:solidFill>
+                  <a:srgbClr val="4A6B5D"/>
+                </a:solidFill>
+                <a:latin typeface="Arial" pitchFamily="34" charset="0"/>
+                <a:ea typeface="Arial" pitchFamily="34" charset="-122"/>
+                <a:cs typeface="Arial" pitchFamily="34" charset="-120"/>
+              </a:rPr>
+              <a:t>MARKED   </a:t>
+            </a:r>
+            <a:pPr indent="0" marL="0">
+              <a:lnSpc>
+                <a:spcPts val="2500"/>
+              </a:lnSpc>
+              <a:buNone/>
+            </a:pPr>
+            <a:r>
+              <a:rPr lang="en-US" sz="1700" dirty="0">
+                <a:solidFill>
+                  <a:srgbClr val="24313F"/>
+                </a:solidFill>
+                <a:latin typeface="Georgia" pitchFamily="34" charset="0"/>
+                <a:ea typeface="Georgia" pitchFamily="34" charset="-122"/>
+                <a:cs typeface="Georgia" pitchFamily="34" charset="-120"/>
+              </a:rPr>
+              <a:t>With the WS 4.6 rubric, in the official five-criteria language. It transfers straight to Paper 2.</a:t>
+            </a:r>
+            <a:endParaRPr lang="en-US" sz="1500" dirty="0"/>
+          </a:p>
+          <a:p>
+            <a:pPr indent="0" marL="0">
+              <a:lnSpc>
+                <a:spcPts val="2500"/>
+              </a:lnSpc>
+              <a:buNone/>
+            </a:pPr>
+            <a:r>
+              <a:rPr lang="en-US" sz="1500" b="1" spc="100" kern="0" dirty="0">
+                <a:solidFill>
+                  <a:srgbClr val="4A6B5D"/>
+                </a:solidFill>
+                <a:latin typeface="Arial" pitchFamily="34" charset="0"/>
+                <a:ea typeface="Arial" pitchFamily="34" charset="-122"/>
+                <a:cs typeface="Arial" pitchFamily="34" charset="-120"/>
+              </a:rPr>
+              <a:t>RETURNED   </a:t>
+            </a:r>
+            <a:pPr indent="0" marL="0">
+              <a:lnSpc>
+                <a:spcPts val="2500"/>
+              </a:lnSpc>
+              <a:buNone/>
+            </a:pPr>
+            <a:r>
+              <a:rPr lang="en-US" sz="1700" dirty="0">
+                <a:solidFill>
+                  <a:srgbClr val="24313F"/>
+                </a:solidFill>
+                <a:latin typeface="Georgia" pitchFamily="34" charset="0"/>
+                <a:ea typeface="Georgia" pitchFamily="34" charset="-122"/>
+                <a:cs typeface="Georgia" pitchFamily="34" charset="-120"/>
+              </a:rPr>
+              <a:t>Scripts come back within five working days.</a:t>
+            </a:r>
+            <a:endParaRPr lang="en-US" sz="1500" dirty="0"/>
           </a:p>
         </p:txBody>
       </p:sp>
@@ -4103,7 +4197,7 @@
                 <a:ea typeface="Georgia" pitchFamily="34" charset="-122"/>
                 <a:cs typeface="Georgia" pitchFamily="34" charset="-120"/>
               </a:rPr>
-              <a:t>Lesson 09. Neale, Altman, and a genre attribution defended from the codes you spent a month shooting.</a:t>
+              <a:t>Lesson 09. Neale, Altman, and a genre claim defended with the codes you spent a month shooting.</a:t>
             </a:r>
             <a:endParaRPr lang="en-US" sz="2200" dirty="0"/>
           </a:p>
@@ -4972,12 +5066,29 @@
           <a:p>
             <a:pPr indent="0" marL="0">
               <a:lnSpc>
-                <a:spcPts val="2100"/>
+                <a:spcPts val="1900"/>
               </a:lnSpc>
               <a:buNone/>
             </a:pPr>
             <a:r>
-              <a:rPr lang="en-US" sz="1550" dirty="0">
+              <a:rPr lang="en-US" sz="1300" b="1" spc="100" kern="0" dirty="0">
+                <a:solidFill>
+                  <a:srgbClr val="4A6B5D"/>
+                </a:solidFill>
+                <a:latin typeface="Arial" pitchFamily="34" charset="0"/>
+                <a:ea typeface="Arial" pitchFamily="34" charset="-122"/>
+                <a:cs typeface="Arial" pitchFamily="34" charset="-120"/>
+              </a:rPr>
+              <a:t>WARM-UP   </a:t>
+            </a:r>
+            <a:pPr indent="0" marL="0">
+              <a:lnSpc>
+                <a:spcPts val="1900"/>
+              </a:lnSpc>
+              <a:buNone/>
+            </a:pPr>
+            <a:r>
+              <a:rPr lang="en-US" sz="1500" dirty="0">
                 <a:solidFill>
                   <a:srgbClr val="24313F"/>
                 </a:solidFill>
@@ -4985,9 +5096,46 @@
                 <a:ea typeface="Georgia" pitchFamily="34" charset="-122"/>
                 <a:cs typeface="Georgia" pitchFamily="34" charset="-120"/>
               </a:rPr>
-              <a:t>The quiz's own format, warmed up: shallow focus, over-the-shoulder, high key, canted. Then thirty items across all four elements, at least four each on sound and editing, the families scripts drop.</a:t>
-            </a:r>
-            <a:endParaRPr lang="en-US" sz="1550" dirty="0"/>
+              <a:t>The answers: shallow focus, over-the-shoulder, high key, canted.</a:t>
+            </a:r>
+            <a:endParaRPr lang="en-US" sz="1300" dirty="0"/>
+          </a:p>
+          <a:p>
+            <a:pPr indent="0" marL="0">
+              <a:lnSpc>
+                <a:spcPts val="1900"/>
+              </a:lnSpc>
+              <a:buNone/>
+            </a:pPr>
+            <a:r>
+              <a:rPr lang="en-US" sz="1300" b="1" spc="100" kern="0" dirty="0">
+                <a:solidFill>
+                  <a:srgbClr val="4A6B5D"/>
+                </a:solidFill>
+                <a:latin typeface="Arial" pitchFamily="34" charset="0"/>
+                <a:ea typeface="Arial" pitchFamily="34" charset="-122"/>
+                <a:cs typeface="Arial" pitchFamily="34" charset="-120"/>
+              </a:rPr>
+              <a:t>THE QUIZ   </a:t>
+            </a:r>
+            <a:pPr indent="0" marL="0">
+              <a:lnSpc>
+                <a:spcPts val="1900"/>
+              </a:lnSpc>
+              <a:buNone/>
+            </a:pPr>
+            <a:r>
+              <a:rPr lang="en-US" sz="1500" dirty="0">
+                <a:solidFill>
+                  <a:srgbClr val="24313F"/>
+                </a:solidFill>
+                <a:latin typeface="Georgia" pitchFamily="34" charset="0"/>
+                <a:ea typeface="Georgia" pitchFamily="34" charset="-122"/>
+                <a:cs typeface="Georgia" pitchFamily="34" charset="-120"/>
+              </a:rPr>
+              <a:t>Thirty items across all four elements. At least four each on sound and editing, because scripts forget those two.</a:t>
+            </a:r>
+            <a:endParaRPr lang="en-US" sz="1300" dirty="0"/>
           </a:p>
         </p:txBody>
       </p:sp>
@@ -5265,34 +5413,91 @@
         </p:nvSpPr>
         <p:spPr>
           <a:xfrm>
-            <a:off x="822960" y="5897880"/>
-            <a:ext cx="10424160" cy="411480"/>
-          </a:xfrm>
-          <a:prstGeom prst="rect">
-            <a:avLst/>
-          </a:prstGeom>
-          <a:noFill/>
-          <a:ln/>
-        </p:spPr>
-        <p:txBody>
-          <a:bodyPr wrap="square" lIns="0" tIns="0" rIns="0" bIns="0" rtlCol="0" anchor="ctr"/>
-          <a:lstStyle/>
-          <a:p>
-            <a:pPr indent="0" marL="0">
-              <a:buNone/>
-            </a:pPr>
-            <a:r>
-              <a:rPr lang="en-US" sz="1200" i="1" dirty="0">
-                <a:solidFill>
-                  <a:srgbClr val="7A7F72"/>
+            <a:off x="822960" y="5888736"/>
+            <a:ext cx="10424160" cy="438912"/>
+          </a:xfrm>
+          <a:prstGeom prst="rect">
+            <a:avLst/>
+          </a:prstGeom>
+          <a:noFill/>
+          <a:ln/>
+        </p:spPr>
+        <p:txBody>
+          <a:bodyPr wrap="square" lIns="0" tIns="0" rIns="0" bIns="0" rtlCol="0" anchor="t"/>
+          <a:lstStyle/>
+          <a:p>
+            <a:pPr indent="0" marL="0">
+              <a:lnSpc>
+                <a:spcPts val="1600"/>
+              </a:lnSpc>
+              <a:buNone/>
+            </a:pPr>
+            <a:r>
+              <a:rPr lang="en-US" sz="1000" b="1" spc="100" kern="0" dirty="0">
+                <a:solidFill>
+                  <a:srgbClr val="4A6B5D"/>
                 </a:solidFill>
                 <a:latin typeface="Arial" pitchFamily="34" charset="0"/>
                 <a:ea typeface="Arial" pitchFamily="34" charset="-122"/>
                 <a:cs typeface="Arial" pitchFamily="34" charset="-120"/>
               </a:rPr>
-              <a:t>Whatever you miss here is your revision list for Wednesday. Also Monday: A2 announced, due Monday 26 October, blog posts 1 to 7 to the mid-point standard.</a:t>
-            </a:r>
-            <a:endParaRPr lang="en-US" sz="1200" dirty="0"/>
+              <a:t>YOUR LIST   </a:t>
+            </a:r>
+            <a:pPr indent="0" marL="0">
+              <a:lnSpc>
+                <a:spcPts val="1600"/>
+              </a:lnSpc>
+              <a:buNone/>
+            </a:pPr>
+            <a:r>
+              <a:rPr lang="en-US" sz="1200" dirty="0">
+                <a:solidFill>
+                  <a:srgbClr val="7A7F72"/>
+                </a:solidFill>
+                <a:latin typeface="Georgia" pitchFamily="34" charset="0"/>
+                <a:ea typeface="Georgia" pitchFamily="34" charset="-122"/>
+                <a:cs typeface="Georgia" pitchFamily="34" charset="-120"/>
+              </a:rPr>
+              <a:t>Whatever you miss becomes your revision list for Wednesday.</a:t>
+            </a:r>
+            <a:endParaRPr lang="en-US" sz="1000" dirty="0"/>
+          </a:p>
+          <a:p>
+            <a:pPr indent="0" marL="0">
+              <a:lnSpc>
+                <a:spcPts val="1600"/>
+              </a:lnSpc>
+              <a:buNone/>
+            </a:pPr>
+            <a:r>
+              <a:rPr lang="en-US" sz="1000" b="1" spc="100" kern="0" dirty="0">
+                <a:solidFill>
+                  <a:srgbClr val="4A6B5D"/>
+                </a:solidFill>
+                <a:latin typeface="Arial" pitchFamily="34" charset="0"/>
+                <a:ea typeface="Arial" pitchFamily="34" charset="-122"/>
+                <a:cs typeface="Arial" pitchFamily="34" charset="-120"/>
+              </a:rPr>
+              <a:t>ALSO MONDAY   </a:t>
+            </a:r>
+            <a:pPr indent="0" marL="0">
+              <a:lnSpc>
+                <a:spcPts val="1600"/>
+              </a:lnSpc>
+              <a:buNone/>
+            </a:pPr>
+            <a:r>
+              <a:rPr lang="en-US" sz="1200" dirty="0">
+                <a:solidFill>
+                  <a:srgbClr val="7A7F72"/>
+                </a:solidFill>
+                <a:latin typeface="Georgia" pitchFamily="34" charset="0"/>
+                <a:ea typeface="Georgia" pitchFamily="34" charset="-122"/>
+                <a:cs typeface="Georgia" pitchFamily="34" charset="-120"/>
+              </a:rPr>
+              <a:t>A2 announced: due Monday 26 October, blog posts 1 to 7 at the mid-point standard.</a:t>
+            </a:r>
+            <a:endParaRPr lang="en-US" sz="1000" dirty="0"/>
           </a:p>
         </p:txBody>
       </p:sp>
@@ -6431,7 +6636,7 @@
                 <a:ea typeface="Arial" pitchFamily="34" charset="-122"/>
                 <a:cs typeface="Arial" pitchFamily="34" charset="-120"/>
               </a:rPr>
-              <a:t>The Ladder arrives in full: the order climbs rungs one and two; PEEM climbs the rest.</a:t>
+              <a:t>The Ladder is complete: this order climbs rungs one and two. PEEM climbs the rest.</a:t>
             </a:r>
             <a:endParaRPr lang="en-US" sz="1150" dirty="0"/>
           </a:p>
@@ -7277,19 +7482,39 @@
         <p:spPr>
           <a:xfrm>
             <a:off x="822960" y="5760720"/>
-            <a:ext cx="10543032" cy="411480"/>
-          </a:xfrm>
-          <a:prstGeom prst="rect">
-            <a:avLst/>
-          </a:prstGeom>
-          <a:noFill/>
-          <a:ln/>
-        </p:spPr>
-        <p:txBody>
-          <a:bodyPr wrap="square" lIns="0" tIns="0" rIns="0" bIns="0" rtlCol="0" anchor="ctr"/>
-          <a:lstStyle/>
-          <a:p>
-            <a:pPr indent="0" marL="0">
+            <a:ext cx="10543032" cy="320040"/>
+          </a:xfrm>
+          <a:prstGeom prst="rect">
+            <a:avLst/>
+          </a:prstGeom>
+          <a:noFill/>
+          <a:ln/>
+        </p:spPr>
+        <p:txBody>
+          <a:bodyPr wrap="square" lIns="0" tIns="0" rIns="0" bIns="0" rtlCol="0" anchor="t"/>
+          <a:lstStyle/>
+          <a:p>
+            <a:pPr indent="0" marL="0">
+              <a:lnSpc>
+                <a:spcPts val="1800"/>
+              </a:lnSpc>
+              <a:buNone/>
+            </a:pPr>
+            <a:r>
+              <a:rPr lang="en-US" sz="1150" b="1" spc="100" kern="0" dirty="0">
+                <a:solidFill>
+                  <a:srgbClr val="4A6B5D"/>
+                </a:solidFill>
+                <a:latin typeface="Arial" pitchFamily="34" charset="0"/>
+                <a:ea typeface="Arial" pitchFamily="34" charset="-122"/>
+                <a:cs typeface="Arial" pitchFamily="34" charset="-120"/>
+              </a:rPr>
+              <a:t>KEY POINT   </a:t>
+            </a:r>
+            <a:pPr indent="0" marL="0">
+              <a:lnSpc>
+                <a:spcPts val="1800"/>
+              </a:lnSpc>
               <a:buNone/>
             </a:pPr>
             <a:r>
@@ -7301,9 +7526,9 @@
                 <a:ea typeface="Georgia" pitchFamily="34" charset="-122"/>
                 <a:cs typeface="Georgia" pitchFamily="34" charset="-120"/>
               </a:rPr>
-              <a:t>Systematic reading is a habit, not a talent: the same order, every text, every time, until no code family is left unvisited.</a:t>
-            </a:r>
-            <a:endParaRPr lang="en-US" sz="1350" dirty="0"/>
+              <a:t>Systematic reading is a habit, not a talent. Same order, every text, every time.</a:t>
+            </a:r>
+            <a:endParaRPr lang="en-US" sz="1150" dirty="0"/>
           </a:p>
         </p:txBody>
       </p:sp>
@@ -8100,7 +8325,7 @@
         <p:spPr>
           <a:xfrm>
             <a:off x="822960" y="5212080"/>
-            <a:ext cx="10543032" cy="640080"/>
+            <a:ext cx="10543032" cy="502920"/>
           </a:xfrm>
           <a:prstGeom prst="rect">
             <a:avLst/>
@@ -8119,17 +8344,71 @@
               <a:buNone/>
             </a:pPr>
             <a:r>
-              <a:rPr lang="en-US" sz="1250" i="1" dirty="0">
-                <a:solidFill>
-                  <a:srgbClr val="7A7F72"/>
+              <a:rPr lang="en-US" sz="1050" b="1" spc="100" kern="0" dirty="0">
+                <a:solidFill>
+                  <a:srgbClr val="4A6B5D"/>
                 </a:solidFill>
                 <a:latin typeface="Arial" pitchFamily="34" charset="0"/>
                 <a:ea typeface="Arial" pitchFamily="34" charset="-122"/>
                 <a:cs typeface="Arial" pitchFamily="34" charset="-120"/>
               </a:rPr>
-              <a:t>The A1 pile's commonest failure is assertion: a claim with no evidence, no effect, no link. PEEM is the repair: rungs three to five of the Ladder, climbed by cold call.</a:t>
-            </a:r>
-            <a:endParaRPr lang="en-US" sz="1250" dirty="0"/>
+              <a:t>THE PROBLEM   </a:t>
+            </a:r>
+            <a:pPr indent="0" marL="0">
+              <a:lnSpc>
+                <a:spcPts val="1700"/>
+              </a:lnSpc>
+              <a:buNone/>
+            </a:pPr>
+            <a:r>
+              <a:rPr lang="en-US" sz="1250" dirty="0">
+                <a:solidFill>
+                  <a:srgbClr val="7A7F72"/>
+                </a:solidFill>
+                <a:latin typeface="Georgia" pitchFamily="34" charset="0"/>
+                <a:ea typeface="Georgia" pitchFamily="34" charset="-122"/>
+                <a:cs typeface="Georgia" pitchFamily="34" charset="-120"/>
+              </a:rPr>
+              <a:t>The most common A1 failure is assertion: a claim with no evidence, no effect, no link.</a:t>
+            </a:r>
+            <a:endParaRPr lang="en-US" sz="1050" dirty="0"/>
+          </a:p>
+          <a:p>
+            <a:pPr indent="0" marL="0">
+              <a:lnSpc>
+                <a:spcPts val="1700"/>
+              </a:lnSpc>
+              <a:buNone/>
+            </a:pPr>
+            <a:r>
+              <a:rPr lang="en-US" sz="1050" b="1" spc="100" kern="0" dirty="0">
+                <a:solidFill>
+                  <a:srgbClr val="4A6B5D"/>
+                </a:solidFill>
+                <a:latin typeface="Arial" pitchFamily="34" charset="0"/>
+                <a:ea typeface="Arial" pitchFamily="34" charset="-122"/>
+                <a:cs typeface="Arial" pitchFamily="34" charset="-120"/>
+              </a:rPr>
+              <a:t>THE FIX   </a:t>
+            </a:r>
+            <a:pPr indent="0" marL="0">
+              <a:lnSpc>
+                <a:spcPts val="1700"/>
+              </a:lnSpc>
+              <a:buNone/>
+            </a:pPr>
+            <a:r>
+              <a:rPr lang="en-US" sz="1250" dirty="0">
+                <a:solidFill>
+                  <a:srgbClr val="7A7F72"/>
+                </a:solidFill>
+                <a:latin typeface="Georgia" pitchFamily="34" charset="0"/>
+                <a:ea typeface="Georgia" pitchFamily="34" charset="-122"/>
+                <a:cs typeface="Georgia" pitchFamily="34" charset="-120"/>
+              </a:rPr>
+              <a:t>PEEM. Every claim carries its evidence, its effect, and its meaning.</a:t>
+            </a:r>
+            <a:endParaRPr lang="en-US" sz="1050" dirty="0"/>
           </a:p>
         </p:txBody>
       </p:sp>
@@ -8527,7 +8806,7 @@
                 <a:ea typeface="Arial" pitchFamily="34" charset="-122"/>
                 <a:cs typeface="Arial" pitchFamily="34" charset="-120"/>
               </a:rPr>
-              <a:t>One move, written twice. Nothing after the comma is new, and mid-band scripts are full of it.</a:t>
+              <a:t>One idea, written twice. The second half adds nothing new. Mid-band scripts are full of this.</a:t>
             </a:r>
             <a:endParaRPr lang="en-US" sz="1150" dirty="0"/>
           </a:p>
@@ -8565,7 +8844,7 @@
         <p:spPr>
           <a:xfrm>
             <a:off x="822960" y="4709160"/>
-            <a:ext cx="6309360" cy="1188720"/>
+            <a:ext cx="6309360" cy="594360"/>
           </a:xfrm>
           <a:prstGeom prst="rect">
             <a:avLst/>
@@ -8584,6 +8863,23 @@
               <a:buNone/>
             </a:pPr>
             <a:r>
+              <a:rPr lang="en-US" sz="1350" b="1" spc="100" kern="0" dirty="0">
+                <a:solidFill>
+                  <a:srgbClr val="4A6B5D"/>
+                </a:solidFill>
+                <a:latin typeface="Arial" pitchFamily="34" charset="0"/>
+                <a:ea typeface="Arial" pitchFamily="34" charset="-122"/>
+                <a:cs typeface="Arial" pitchFamily="34" charset="-120"/>
+              </a:rPr>
+              <a:t>EFFECT   </a:t>
+            </a:r>
+            <a:pPr indent="0" marL="0">
+              <a:lnSpc>
+                <a:spcPts val="2100"/>
+              </a:lnSpc>
+              <a:buNone/>
+            </a:pPr>
+            <a:r>
               <a:rPr lang="en-US" sz="1550" dirty="0">
                 <a:solidFill>
                   <a:srgbClr val="24313F"/>
@@ -8592,9 +8888,46 @@
                 <a:ea typeface="Georgia" pitchFamily="34" charset="-122"/>
                 <a:cs typeface="Georgia" pitchFamily="34" charset="-120"/>
               </a:rPr>
-              <a:t>Effect is what it does to the viewer. Meaning is what it therefore says about the person, place or event being represented.</a:t>
-            </a:r>
-            <a:endParaRPr lang="en-US" sz="1550" dirty="0"/>
+              <a:t>what the technique does to the viewer.</a:t>
+            </a:r>
+            <a:endParaRPr lang="en-US" sz="1350" dirty="0"/>
+          </a:p>
+          <a:p>
+            <a:pPr indent="0" marL="0">
+              <a:lnSpc>
+                <a:spcPts val="2100"/>
+              </a:lnSpc>
+              <a:buNone/>
+            </a:pPr>
+            <a:r>
+              <a:rPr lang="en-US" sz="1350" b="1" spc="100" kern="0" dirty="0">
+                <a:solidFill>
+                  <a:srgbClr val="4A6B5D"/>
+                </a:solidFill>
+                <a:latin typeface="Arial" pitchFamily="34" charset="0"/>
+                <a:ea typeface="Arial" pitchFamily="34" charset="-122"/>
+                <a:cs typeface="Arial" pitchFamily="34" charset="-120"/>
+              </a:rPr>
+              <a:t>MEANING   </a:t>
+            </a:r>
+            <a:pPr indent="0" marL="0">
+              <a:lnSpc>
+                <a:spcPts val="2100"/>
+              </a:lnSpc>
+              <a:buNone/>
+            </a:pPr>
+            <a:r>
+              <a:rPr lang="en-US" sz="1550" dirty="0">
+                <a:solidFill>
+                  <a:srgbClr val="24313F"/>
+                </a:solidFill>
+                <a:latin typeface="Georgia" pitchFamily="34" charset="0"/>
+                <a:ea typeface="Georgia" pitchFamily="34" charset="-122"/>
+                <a:cs typeface="Georgia" pitchFamily="34" charset="-120"/>
+              </a:rPr>
+              <a:t>what it therefore says about the person, place, or event.</a:t>
+            </a:r>
+            <a:endParaRPr lang="en-US" sz="1350" dirty="0"/>
           </a:p>
         </p:txBody>
       </p:sp>
@@ -8993,7 +9326,7 @@
                 <a:ea typeface="Georgia" pitchFamily="34" charset="-122"/>
                 <a:cs typeface="Georgia" pitchFamily="34" charset="-120"/>
               </a:rPr>
-              <a:t>The extract repeatedly frames the detective in low-angle mid-shots [Evidence] to construct his institutional authority [Point]: the viewer is positioned beneath him, so his dominance registers as a physical fact of the room [Effect], and the police are thereby represented as a power that need not argue for itself [Meaning].</a:t>
+              <a:t>The extract repeatedly frames the detective in low-angle mid-shots [Evidence]. This constructs his institutional authority [Point]. The viewer is positioned beneath him, so his power feels like a physical fact of the room [Effect]. The police are therefore represented as a power that does not need to argue for itself [Meaning].</a:t>
             </a:r>
             <a:endParaRPr lang="en-US" sz="1900" dirty="0"/>
           </a:p>
@@ -9007,8 +9340,8 @@
         </p:nvSpPr>
         <p:spPr>
           <a:xfrm>
-            <a:off x="822960" y="4434840"/>
-            <a:ext cx="10543032" cy="640080"/>
+            <a:off x="822960" y="4480560"/>
+            <a:ext cx="10543032" cy="594360"/>
           </a:xfrm>
           <a:prstGeom prst="rect">
             <a:avLst/>
@@ -9022,12 +9355,29 @@
           <a:p>
             <a:pPr indent="0" marL="0">
               <a:lnSpc>
-                <a:spcPts val="2100"/>
+                <a:spcPts val="1900"/>
               </a:lnSpc>
               <a:buNone/>
             </a:pPr>
             <a:r>
-              <a:rPr lang="en-US" sz="1550" i="1" dirty="0">
+              <a:rPr lang="en-US" sz="1200" b="1" spc="100" kern="0" dirty="0">
+                <a:solidFill>
+                  <a:srgbClr val="4A6B5D"/>
+                </a:solidFill>
+                <a:latin typeface="Arial" pitchFamily="34" charset="0"/>
+                <a:ea typeface="Arial" pitchFamily="34" charset="-122"/>
+                <a:cs typeface="Arial" pitchFamily="34" charset="-120"/>
+              </a:rPr>
+              <a:t>CHECK   </a:t>
+            </a:r>
+            <a:pPr indent="0" marL="0">
+              <a:lnSpc>
+                <a:spcPts val="1900"/>
+              </a:lnSpc>
+              <a:buNone/>
+            </a:pPr>
+            <a:r>
+              <a:rPr lang="en-US" sz="1400" dirty="0">
                 <a:solidFill>
                   <a:srgbClr val="4A6B5D"/>
                 </a:solidFill>
@@ -9035,9 +9385,46 @@
                 <a:ea typeface="Georgia" pitchFamily="34" charset="-122"/>
                 <a:cs typeface="Georgia" pitchFamily="34" charset="-120"/>
               </a:rPr>
-              <a:t>Four labelled moves, one paragraph, no sentence repeatable in another's place. Write the labels in the margin of your own CS7 rewrite; the labels come off on Wednesday.</a:t>
-            </a:r>
-            <a:endParaRPr lang="en-US" sz="1550" dirty="0"/>
+              <a:t>No sentence could swap places with another. Each adds something new.</a:t>
+            </a:r>
+            <a:endParaRPr lang="en-US" sz="1200" dirty="0"/>
+          </a:p>
+          <a:p>
+            <a:pPr indent="0" marL="0">
+              <a:lnSpc>
+                <a:spcPts val="1900"/>
+              </a:lnSpc>
+              <a:buNone/>
+            </a:pPr>
+            <a:r>
+              <a:rPr lang="en-US" sz="1200" b="1" spc="100" kern="0" dirty="0">
+                <a:solidFill>
+                  <a:srgbClr val="4A6B5D"/>
+                </a:solidFill>
+                <a:latin typeface="Arial" pitchFamily="34" charset="0"/>
+                <a:ea typeface="Arial" pitchFamily="34" charset="-122"/>
+                <a:cs typeface="Arial" pitchFamily="34" charset="-120"/>
+              </a:rPr>
+              <a:t>TASK   </a:t>
+            </a:r>
+            <a:pPr indent="0" marL="0">
+              <a:lnSpc>
+                <a:spcPts val="1900"/>
+              </a:lnSpc>
+              <a:buNone/>
+            </a:pPr>
+            <a:r>
+              <a:rPr lang="en-US" sz="1400" dirty="0">
+                <a:solidFill>
+                  <a:srgbClr val="4A6B5D"/>
+                </a:solidFill>
+                <a:latin typeface="Georgia" pitchFamily="34" charset="0"/>
+                <a:ea typeface="Georgia" pitchFamily="34" charset="-122"/>
+                <a:cs typeface="Georgia" pitchFamily="34" charset="-120"/>
+              </a:rPr>
+              <a:t>Write the four labels in the margin of your CS7 rewrite. On Wednesday, the labels come off.</a:t>
+            </a:r>
+            <a:endParaRPr lang="en-US" sz="1200" dirty="0"/>
           </a:p>
         </p:txBody>
       </p:sp>
@@ -9990,7 +10377,7 @@
         <p:spPr>
           <a:xfrm>
             <a:off x="822960" y="5257800"/>
-            <a:ext cx="10543032" cy="548640"/>
+            <a:ext cx="10543032" cy="457200"/>
           </a:xfrm>
           <a:prstGeom prst="rect">
             <a:avLst/>
@@ -10009,17 +10396,71 @@
               <a:buNone/>
             </a:pPr>
             <a:r>
-              <a:rPr lang="en-US" sz="1200" i="1" dirty="0">
-                <a:solidFill>
-                  <a:srgbClr val="7A7F72"/>
+              <a:rPr lang="en-US" sz="1000" b="1" spc="100" kern="0" dirty="0">
+                <a:solidFill>
+                  <a:srgbClr val="4A6B5D"/>
                 </a:solidFill>
                 <a:latin typeface="Arial" pitchFamily="34" charset="0"/>
                 <a:ea typeface="Arial" pitchFamily="34" charset="-122"/>
                 <a:cs typeface="Arial" pitchFamily="34" charset="-120"/>
               </a:rPr>
-              <a:t>The paper fixes only two things: four screenings, and no notes on the first. The per-viewing split is this course's discipline, not Cambridge's; keep it because it works, not because the rubric says so.</a:t>
-            </a:r>
-            <a:endParaRPr lang="en-US" sz="1200" dirty="0"/>
+              <a:t>THE PAPER'S RULE   </a:t>
+            </a:r>
+            <a:pPr indent="0" marL="0">
+              <a:lnSpc>
+                <a:spcPts val="1600"/>
+              </a:lnSpc>
+              <a:buNone/>
+            </a:pPr>
+            <a:r>
+              <a:rPr lang="en-US" sz="1200" dirty="0">
+                <a:solidFill>
+                  <a:srgbClr val="7A7F72"/>
+                </a:solidFill>
+                <a:latin typeface="Georgia" pitchFamily="34" charset="0"/>
+                <a:ea typeface="Georgia" pitchFamily="34" charset="-122"/>
+                <a:cs typeface="Georgia" pitchFamily="34" charset="-120"/>
+              </a:rPr>
+              <a:t>Four screenings, and no notes during the first. Cambridge fixes only that.</a:t>
+            </a:r>
+            <a:endParaRPr lang="en-US" sz="1000" dirty="0"/>
+          </a:p>
+          <a:p>
+            <a:pPr indent="0" marL="0">
+              <a:lnSpc>
+                <a:spcPts val="1600"/>
+              </a:lnSpc>
+              <a:buNone/>
+            </a:pPr>
+            <a:r>
+              <a:rPr lang="en-US" sz="1000" b="1" spc="100" kern="0" dirty="0">
+                <a:solidFill>
+                  <a:srgbClr val="4A6B5D"/>
+                </a:solidFill>
+                <a:latin typeface="Arial" pitchFamily="34" charset="0"/>
+                <a:ea typeface="Arial" pitchFamily="34" charset="-122"/>
+                <a:cs typeface="Arial" pitchFamily="34" charset="-120"/>
+              </a:rPr>
+              <a:t>OUR SPLIT   </a:t>
+            </a:r>
+            <a:pPr indent="0" marL="0">
+              <a:lnSpc>
+                <a:spcPts val="1600"/>
+              </a:lnSpc>
+              <a:buNone/>
+            </a:pPr>
+            <a:r>
+              <a:rPr lang="en-US" sz="1200" dirty="0">
+                <a:solidFill>
+                  <a:srgbClr val="7A7F72"/>
+                </a:solidFill>
+                <a:latin typeface="Georgia" pitchFamily="34" charset="0"/>
+                <a:ea typeface="Georgia" pitchFamily="34" charset="-122"/>
+                <a:cs typeface="Georgia" pitchFamily="34" charset="-120"/>
+              </a:rPr>
+              <a:t>The per-viewing focus is this course's method. Use it because it works.</a:t>
+            </a:r>
+            <a:endParaRPr lang="en-US" sz="1000" dirty="0"/>
           </a:p>
         </p:txBody>
       </p:sp>

--- a/content/decks/media-studies/media-studies-s1-lesson-08-the-viewing-protocol-and-a1.pptx
+++ b/content/decks/media-studies/media-studies-s1-lesson-08-the-viewing-protocol-and-a1.pptx
@@ -778,7 +778,7 @@
           <a:p>
             <a:r>
               <a:rPr lang="en-US" dirty="0"/>
-              <a:t>A2 was announced Monday (see slide 3): due Monday 26 October, posts 1 to 7 to the mid-point standard. Wednesday is the sit only; no announcements share it.</a:t>
+              <a:t>A2 was announced Monday (see slide 3): due Monday 26 October, posts 1 to 7 to the mid-point standard. Wednesday is the sit only; no announcements share it. Thursday P1 is the stakes-off re-run: retrieval, a fresh extract in protocol order, one PEEM paragraph to time, then Beat the Examiner lite.</a:t>
             </a:r>
             <a:endParaRPr lang="en-US" dirty="0"/>
           </a:p>
@@ -2178,7 +2178,7 @@
                 <a:ea typeface="Arial" pitchFamily="34" charset="-122"/>
                 <a:cs typeface="Arial" pitchFamily="34" charset="-120"/>
               </a:rPr>
-              <a:t>Three days  ·  Monday 12 to Wednesday 14 October  ·  the first attainment</a:t>
+              <a:t>Three days  ·  Mon 12 · Wed 14 (double) · Thu 15 October  ·  the first attainment</a:t>
             </a:r>
             <a:endParaRPr lang="en-US" sz="1300" dirty="0"/>
           </a:p>
